--- a/tests/Manita_Lanzamiento.pptx
+++ b/tests/Manita_Lanzamiento.pptx
@@ -17,9 +17,12 @@
     <p:sldId id="265" r:id="rId11"/>
     <p:sldId id="266" r:id="rId12"/>
     <p:sldId id="267" r:id="rId13"/>
+    <p:sldId id="268" r:id="rId14"/>
+    <p:sldId id="269" r:id="rId15"/>
+    <p:sldId id="270" r:id="rId16"/>
   </p:sldIdLst>
   <p:notesMasterIdLst>
-    <p:notesMasterId r:id="rId14"/>
+    <p:notesMasterId r:id="rId17"/>
   </p:notesMasterIdLst>
   <p:sldSz cx="12191695" cy="6858000"/>
   <p:notesSz cx="6858000" cy="12191695"/>
@@ -801,6 +804,270 @@
             <a:fld id="{F7021451-1387-4CA6-816F-3879F97B5CBC}" type="slidenum">
               <a:rPr lang="en-US"/>
               <a:t>12</a:t>
+            </a:fld>
+            <a:endParaRPr lang="en-US"/>
+          </a:p>
+        </p:txBody>
+      </p:sp>
+    </p:spTree>
+    <p:extLst>
+      <p:ext uri="{BB962C8B-B14F-4D97-AF65-F5344CB8AC3E}">
+        <p14:creationId xmlns:p14="http://schemas.microsoft.com/office/powerpoint/2010/main" val="1024086991"/>
+      </p:ext>
+    </p:extLst>
+  </p:cSld>
+  <p:clrMapOvr>
+    <a:masterClrMapping/>
+  </p:clrMapOvr>
+</p:notes>
+</file>
+
+<file path=ppt/notesSlides/notesSlide13.xml><?xml version="1.0" encoding="utf-8"?>
+<p:notes xmlns:a="http://schemas.openxmlformats.org/drawingml/2006/main" xmlns:r="http://schemas.openxmlformats.org/officeDocument/2006/relationships" xmlns:p="http://schemas.openxmlformats.org/presentationml/2006/main">
+  <p:cSld>
+    <p:spTree>
+      <p:nvGrpSpPr>
+        <p:cNvPr id="1" name=""/>
+        <p:cNvGrpSpPr/>
+        <p:nvPr/>
+      </p:nvGrpSpPr>
+      <p:grpSpPr>
+        <a:xfrm>
+          <a:off x="0" y="0"/>
+          <a:ext cx="0" cy="0"/>
+          <a:chOff x="0" y="0"/>
+          <a:chExt cx="0" cy="0"/>
+        </a:xfrm>
+      </p:grpSpPr>
+      <p:sp>
+        <p:nvSpPr>
+          <p:cNvPr id="2" name="Slide Image Placeholder 1"/>
+          <p:cNvSpPr>
+            <a:spLocks noGrp="1" noRot="1" noChangeAspect="1"/>
+          </p:cNvSpPr>
+          <p:nvPr>
+            <p:ph type="sldImg"/>
+          </p:nvPr>
+        </p:nvSpPr>
+        <p:spPr/>
+      </p:sp>
+      <p:sp>
+        <p:nvSpPr>
+          <p:cNvPr id="3" name="Notes Placeholder 2"/>
+          <p:cNvSpPr>
+            <a:spLocks noGrp="1"/>
+          </p:cNvSpPr>
+          <p:nvPr>
+            <p:ph type="body" idx="1"/>
+          </p:nvPr>
+        </p:nvSpPr>
+        <p:spPr/>
+        <p:txBody>
+          <a:bodyPr/>
+          <a:lstStyle/>
+          <a:p>
+            <a:r>
+              <a:rPr lang="en-US" dirty="0"/>
+              <a:t/>
+            </a:r>
+            <a:endParaRPr lang="en-US" dirty="0"/>
+          </a:p>
+        </p:txBody>
+      </p:sp>
+      <p:sp>
+        <p:nvSpPr>
+          <p:cNvPr id="4" name="Slide Number Placeholder 3"/>
+          <p:cNvSpPr>
+            <a:spLocks noGrp="1"/>
+          </p:cNvSpPr>
+          <p:nvPr>
+            <p:ph type="sldNum" sz="quarter" idx="10"/>
+          </p:nvPr>
+        </p:nvSpPr>
+        <p:spPr/>
+        <p:txBody>
+          <a:bodyPr/>
+          <a:lstStyle/>
+          <a:p>
+            <a:fld id="{F7021451-1387-4CA6-816F-3879F97B5CBC}" type="slidenum">
+              <a:rPr lang="en-US"/>
+              <a:t>13</a:t>
+            </a:fld>
+            <a:endParaRPr lang="en-US"/>
+          </a:p>
+        </p:txBody>
+      </p:sp>
+    </p:spTree>
+    <p:extLst>
+      <p:ext uri="{BB962C8B-B14F-4D97-AF65-F5344CB8AC3E}">
+        <p14:creationId xmlns:p14="http://schemas.microsoft.com/office/powerpoint/2010/main" val="1024086991"/>
+      </p:ext>
+    </p:extLst>
+  </p:cSld>
+  <p:clrMapOvr>
+    <a:masterClrMapping/>
+  </p:clrMapOvr>
+</p:notes>
+</file>
+
+<file path=ppt/notesSlides/notesSlide14.xml><?xml version="1.0" encoding="utf-8"?>
+<p:notes xmlns:a="http://schemas.openxmlformats.org/drawingml/2006/main" xmlns:r="http://schemas.openxmlformats.org/officeDocument/2006/relationships" xmlns:p="http://schemas.openxmlformats.org/presentationml/2006/main">
+  <p:cSld>
+    <p:spTree>
+      <p:nvGrpSpPr>
+        <p:cNvPr id="1" name=""/>
+        <p:cNvGrpSpPr/>
+        <p:nvPr/>
+      </p:nvGrpSpPr>
+      <p:grpSpPr>
+        <a:xfrm>
+          <a:off x="0" y="0"/>
+          <a:ext cx="0" cy="0"/>
+          <a:chOff x="0" y="0"/>
+          <a:chExt cx="0" cy="0"/>
+        </a:xfrm>
+      </p:grpSpPr>
+      <p:sp>
+        <p:nvSpPr>
+          <p:cNvPr id="2" name="Slide Image Placeholder 1"/>
+          <p:cNvSpPr>
+            <a:spLocks noGrp="1" noRot="1" noChangeAspect="1"/>
+          </p:cNvSpPr>
+          <p:nvPr>
+            <p:ph type="sldImg"/>
+          </p:nvPr>
+        </p:nvSpPr>
+        <p:spPr/>
+      </p:sp>
+      <p:sp>
+        <p:nvSpPr>
+          <p:cNvPr id="3" name="Notes Placeholder 2"/>
+          <p:cNvSpPr>
+            <a:spLocks noGrp="1"/>
+          </p:cNvSpPr>
+          <p:nvPr>
+            <p:ph type="body" idx="1"/>
+          </p:nvPr>
+        </p:nvSpPr>
+        <p:spPr/>
+        <p:txBody>
+          <a:bodyPr/>
+          <a:lstStyle/>
+          <a:p>
+            <a:r>
+              <a:rPr lang="en-US" dirty="0"/>
+              <a:t/>
+            </a:r>
+            <a:endParaRPr lang="en-US" dirty="0"/>
+          </a:p>
+        </p:txBody>
+      </p:sp>
+      <p:sp>
+        <p:nvSpPr>
+          <p:cNvPr id="4" name="Slide Number Placeholder 3"/>
+          <p:cNvSpPr>
+            <a:spLocks noGrp="1"/>
+          </p:cNvSpPr>
+          <p:nvPr>
+            <p:ph type="sldNum" sz="quarter" idx="10"/>
+          </p:nvPr>
+        </p:nvSpPr>
+        <p:spPr/>
+        <p:txBody>
+          <a:bodyPr/>
+          <a:lstStyle/>
+          <a:p>
+            <a:fld id="{F7021451-1387-4CA6-816F-3879F97B5CBC}" type="slidenum">
+              <a:rPr lang="en-US"/>
+              <a:t>14</a:t>
+            </a:fld>
+            <a:endParaRPr lang="en-US"/>
+          </a:p>
+        </p:txBody>
+      </p:sp>
+    </p:spTree>
+    <p:extLst>
+      <p:ext uri="{BB962C8B-B14F-4D97-AF65-F5344CB8AC3E}">
+        <p14:creationId xmlns:p14="http://schemas.microsoft.com/office/powerpoint/2010/main" val="1024086991"/>
+      </p:ext>
+    </p:extLst>
+  </p:cSld>
+  <p:clrMapOvr>
+    <a:masterClrMapping/>
+  </p:clrMapOvr>
+</p:notes>
+</file>
+
+<file path=ppt/notesSlides/notesSlide15.xml><?xml version="1.0" encoding="utf-8"?>
+<p:notes xmlns:a="http://schemas.openxmlformats.org/drawingml/2006/main" xmlns:r="http://schemas.openxmlformats.org/officeDocument/2006/relationships" xmlns:p="http://schemas.openxmlformats.org/presentationml/2006/main">
+  <p:cSld>
+    <p:spTree>
+      <p:nvGrpSpPr>
+        <p:cNvPr id="1" name=""/>
+        <p:cNvGrpSpPr/>
+        <p:nvPr/>
+      </p:nvGrpSpPr>
+      <p:grpSpPr>
+        <a:xfrm>
+          <a:off x="0" y="0"/>
+          <a:ext cx="0" cy="0"/>
+          <a:chOff x="0" y="0"/>
+          <a:chExt cx="0" cy="0"/>
+        </a:xfrm>
+      </p:grpSpPr>
+      <p:sp>
+        <p:nvSpPr>
+          <p:cNvPr id="2" name="Slide Image Placeholder 1"/>
+          <p:cNvSpPr>
+            <a:spLocks noGrp="1" noRot="1" noChangeAspect="1"/>
+          </p:cNvSpPr>
+          <p:nvPr>
+            <p:ph type="sldImg"/>
+          </p:nvPr>
+        </p:nvSpPr>
+        <p:spPr/>
+      </p:sp>
+      <p:sp>
+        <p:nvSpPr>
+          <p:cNvPr id="3" name="Notes Placeholder 2"/>
+          <p:cNvSpPr>
+            <a:spLocks noGrp="1"/>
+          </p:cNvSpPr>
+          <p:nvPr>
+            <p:ph type="body" idx="1"/>
+          </p:nvPr>
+        </p:nvSpPr>
+        <p:spPr/>
+        <p:txBody>
+          <a:bodyPr/>
+          <a:lstStyle/>
+          <a:p>
+            <a:r>
+              <a:rPr lang="en-US" dirty="0"/>
+              <a:t/>
+            </a:r>
+            <a:endParaRPr lang="en-US" dirty="0"/>
+          </a:p>
+        </p:txBody>
+      </p:sp>
+      <p:sp>
+        <p:nvSpPr>
+          <p:cNvPr id="4" name="Slide Number Placeholder 3"/>
+          <p:cNvSpPr>
+            <a:spLocks noGrp="1"/>
+          </p:cNvSpPr>
+          <p:nvPr>
+            <p:ph type="sldNum" sz="quarter" idx="10"/>
+          </p:nvPr>
+        </p:nvSpPr>
+        <p:spPr/>
+        <p:txBody>
+          <a:bodyPr/>
+          <a:lstStyle/>
+          <a:p>
+            <a:fld id="{F7021451-1387-4CA6-816F-3879F97B5CBC}" type="slidenum">
+              <a:rPr lang="en-US"/>
+              <a:t>15</a:t>
             </a:fld>
             <a:endParaRPr lang="en-US"/>
           </a:p>
@@ -2072,7 +2339,7 @@
     <p:bg>
       <p:bgPr>
         <a:solidFill>
-          <a:srgbClr val="FFFFFF"/>
+          <a:srgbClr val="2D3E75"/>
         </a:solidFill>
       </p:bgPr>
     </p:bg>
@@ -2092,23 +2359,39 @@
       </p:grpSpPr>
       <p:sp>
         <p:nvSpPr>
-          <p:cNvPr id="2" name="Shape 0"/>
-          <p:cNvSpPr/>
-          <p:nvPr/>
-        </p:nvSpPr>
-        <p:spPr>
-          <a:xfrm>
-            <a:off x="0" y="0"/>
-            <a:ext cx="12191695" cy="164592"/>
-          </a:xfrm>
-          <a:prstGeom prst="rect">
-            <a:avLst/>
-          </a:prstGeom>
-          <a:solidFill>
-            <a:srgbClr val="FF6B4A"/>
-          </a:solidFill>
-          <a:ln/>
-        </p:spPr>
+          <p:cNvPr id="2" name="Text 0"/>
+          <p:cNvSpPr/>
+          <p:nvPr/>
+        </p:nvSpPr>
+        <p:spPr>
+          <a:xfrm>
+            <a:off x="640080" y="502920"/>
+            <a:ext cx="7315200" cy="365760"/>
+          </a:xfrm>
+          <a:prstGeom prst="rect">
+            <a:avLst/>
+          </a:prstGeom>
+          <a:noFill/>
+          <a:ln/>
+        </p:spPr>
+        <p:txBody>
+          <a:bodyPr wrap="square" rtlCol="0" anchor="ctr"/>
+          <a:lstStyle/>
+          <a:p>
+            <a:pPr indent="0" marL="0">
+              <a:buNone/>
+            </a:pPr>
+            <a:r>
+              <a:rPr lang="en-US" sz="1300" b="1" spc="200" kern="0" dirty="0">
+                <a:solidFill>
+                  <a:srgbClr val="FFB4A2"/>
+                </a:solidFill>
+              </a:rPr>
+              <a:t>EL PRODUCTO</a:t>
+            </a:r>
+            <a:endParaRPr lang="en-US" sz="1300" dirty="0"/>
+          </a:p>
+        </p:txBody>
       </p:sp>
       <p:sp>
         <p:nvSpPr>
@@ -2118,8 +2401,8 @@
         </p:nvSpPr>
         <p:spPr>
           <a:xfrm>
-            <a:off x="640080" y="457200"/>
-            <a:ext cx="7315200" cy="365760"/>
+            <a:off x="640080" y="914400"/>
+            <a:ext cx="10881360" cy="822960"/>
           </a:xfrm>
           <a:prstGeom prst="rect">
             <a:avLst/>
@@ -2135,479 +2418,109 @@
               <a:buNone/>
             </a:pPr>
             <a:r>
-              <a:rPr lang="en-US" sz="1300" b="1" spc="200" kern="0" dirty="0">
-                <a:solidFill>
-                  <a:srgbClr val="C43D26"/>
-                </a:solidFill>
-              </a:rPr>
-              <a:t>OPORTUNIDAD</a:t>
-            </a:r>
-            <a:endParaRPr lang="en-US" sz="1300" dirty="0"/>
-          </a:p>
-        </p:txBody>
-      </p:sp>
-      <p:sp>
-        <p:nvSpPr>
-          <p:cNvPr id="4" name="Text 2"/>
-          <p:cNvSpPr/>
-          <p:nvPr/>
-        </p:nvSpPr>
-        <p:spPr>
-          <a:xfrm>
-            <a:off x="640080" y="868680"/>
-            <a:ext cx="10881360" cy="822960"/>
-          </a:xfrm>
-          <a:prstGeom prst="rect">
-            <a:avLst/>
-          </a:prstGeom>
-          <a:noFill/>
-          <a:ln/>
-        </p:spPr>
-        <p:txBody>
-          <a:bodyPr wrap="square" rtlCol="0" anchor="ctr"/>
-          <a:lstStyle/>
-          <a:p>
-            <a:pPr indent="0" marL="0">
-              <a:buNone/>
-            </a:pPr>
-            <a:r>
-              <a:rPr lang="en-US" sz="2800" b="1" dirty="0">
-                <a:solidFill>
-                  <a:srgbClr val="2D3E75"/>
-                </a:solidFill>
-              </a:rPr>
-              <a:t>Mercado grande, sin líder local claro</a:t>
-            </a:r>
-            <a:endParaRPr lang="en-US" sz="2800" dirty="0"/>
-          </a:p>
-        </p:txBody>
-      </p:sp>
-      <p:sp>
-        <p:nvSpPr>
-          <p:cNvPr id="5" name="Shape 3"/>
-          <p:cNvSpPr/>
-          <p:nvPr/>
-        </p:nvSpPr>
-        <p:spPr>
-          <a:xfrm>
-            <a:off x="640080" y="2194560"/>
-            <a:ext cx="3474720" cy="2377440"/>
-          </a:xfrm>
-          <a:prstGeom prst="roundRect">
-            <a:avLst>
-              <a:gd name="adj" fmla="val 5769"/>
-            </a:avLst>
-          </a:prstGeom>
-          <a:solidFill>
-            <a:srgbClr val="FBF7F4"/>
-          </a:solidFill>
-          <a:ln/>
-        </p:spPr>
-      </p:sp>
-      <p:sp>
-        <p:nvSpPr>
-          <p:cNvPr id="6" name="Text 4"/>
-          <p:cNvSpPr/>
-          <p:nvPr/>
-        </p:nvSpPr>
-        <p:spPr>
-          <a:xfrm>
-            <a:off x="640080" y="2423160"/>
-            <a:ext cx="3474720" cy="822960"/>
-          </a:xfrm>
-          <a:prstGeom prst="rect">
-            <a:avLst/>
-          </a:prstGeom>
-          <a:noFill/>
-          <a:ln/>
-        </p:spPr>
-        <p:txBody>
-          <a:bodyPr wrap="square" rtlCol="0" anchor="ctr"/>
-          <a:lstStyle/>
-          <a:p>
-            <a:pPr algn="ctr" indent="0" marL="0">
-              <a:buNone/>
-            </a:pPr>
-            <a:r>
-              <a:rPr lang="en-US" sz="4000" dirty="0">
-                <a:solidFill>
-                  <a:srgbClr val="000000"/>
-                </a:solidFill>
-              </a:rPr>
-              <a:t>🏙️</a:t>
-            </a:r>
-            <a:endParaRPr lang="en-US" sz="4000" dirty="0"/>
-          </a:p>
-        </p:txBody>
-      </p:sp>
-      <p:sp>
-        <p:nvSpPr>
-          <p:cNvPr id="7" name="Text 5"/>
-          <p:cNvSpPr/>
-          <p:nvPr/>
-        </p:nvSpPr>
-        <p:spPr>
-          <a:xfrm>
-            <a:off x="822960" y="3291840"/>
-            <a:ext cx="3108960" cy="457200"/>
-          </a:xfrm>
-          <a:prstGeom prst="rect">
-            <a:avLst/>
-          </a:prstGeom>
-          <a:noFill/>
-          <a:ln/>
-        </p:spPr>
-        <p:txBody>
-          <a:bodyPr wrap="square" rtlCol="0" anchor="ctr"/>
-          <a:lstStyle/>
-          <a:p>
-            <a:pPr algn="ctr" indent="0" marL="0">
-              <a:buNone/>
-            </a:pPr>
-            <a:r>
-              <a:rPr lang="en-US" sz="1700" b="1" dirty="0">
-                <a:solidFill>
-                  <a:srgbClr val="2D3E75"/>
-                </a:solidFill>
-              </a:rPr>
-              <a:t>Local</a:t>
-            </a:r>
-            <a:endParaRPr lang="en-US" sz="1700" dirty="0"/>
-          </a:p>
-        </p:txBody>
-      </p:sp>
-      <p:sp>
-        <p:nvSpPr>
-          <p:cNvPr id="8" name="Text 6"/>
-          <p:cNvSpPr/>
-          <p:nvPr/>
-        </p:nvSpPr>
-        <p:spPr>
-          <a:xfrm>
-            <a:off x="822960" y="3794760"/>
-            <a:ext cx="3108960" cy="731520"/>
-          </a:xfrm>
-          <a:prstGeom prst="rect">
-            <a:avLst/>
-          </a:prstGeom>
-          <a:noFill/>
-          <a:ln/>
-        </p:spPr>
-        <p:txBody>
-          <a:bodyPr wrap="square" rtlCol="0" anchor="ctr"/>
-          <a:lstStyle/>
-          <a:p>
-            <a:pPr algn="ctr" indent="0" marL="0">
-              <a:buNone/>
-            </a:pPr>
-            <a:r>
-              <a:rPr lang="en-US" sz="1300" dirty="0">
-                <a:solidFill>
-                  <a:srgbClr val="565D6B"/>
-                </a:solidFill>
-              </a:rPr>
-              <a:t>Nacido en CDMX, en español mexicano.</a:t>
-            </a:r>
-            <a:endParaRPr lang="en-US" sz="1300" dirty="0"/>
-          </a:p>
-        </p:txBody>
-      </p:sp>
-      <p:sp>
-        <p:nvSpPr>
-          <p:cNvPr id="9" name="Shape 7"/>
-          <p:cNvSpPr/>
-          <p:nvPr/>
-        </p:nvSpPr>
-        <p:spPr>
-          <a:xfrm>
-            <a:off x="4343400" y="2194560"/>
-            <a:ext cx="3474720" cy="2377440"/>
-          </a:xfrm>
-          <a:prstGeom prst="roundRect">
-            <a:avLst>
-              <a:gd name="adj" fmla="val 5769"/>
-            </a:avLst>
-          </a:prstGeom>
-          <a:solidFill>
-            <a:srgbClr val="FBF7F4"/>
-          </a:solidFill>
-          <a:ln/>
-        </p:spPr>
-      </p:sp>
-      <p:sp>
-        <p:nvSpPr>
-          <p:cNvPr id="10" name="Text 8"/>
-          <p:cNvSpPr/>
-          <p:nvPr/>
-        </p:nvSpPr>
-        <p:spPr>
-          <a:xfrm>
-            <a:off x="4343400" y="2423160"/>
-            <a:ext cx="3474720" cy="822960"/>
-          </a:xfrm>
-          <a:prstGeom prst="rect">
-            <a:avLst/>
-          </a:prstGeom>
-          <a:noFill/>
-          <a:ln/>
-        </p:spPr>
-        <p:txBody>
-          <a:bodyPr wrap="square" rtlCol="0" anchor="ctr"/>
-          <a:lstStyle/>
-          <a:p>
-            <a:pPr algn="ctr" indent="0" marL="0">
-              <a:buNone/>
-            </a:pPr>
-            <a:r>
-              <a:rPr lang="en-US" sz="4000" dirty="0">
-                <a:solidFill>
-                  <a:srgbClr val="000000"/>
-                </a:solidFill>
-              </a:rPr>
-              <a:t>🌎</a:t>
-            </a:r>
-            <a:endParaRPr lang="en-US" sz="4000" dirty="0"/>
-          </a:p>
-        </p:txBody>
-      </p:sp>
-      <p:sp>
-        <p:nvSpPr>
-          <p:cNvPr id="11" name="Text 9"/>
-          <p:cNvSpPr/>
-          <p:nvPr/>
-        </p:nvSpPr>
-        <p:spPr>
-          <a:xfrm>
-            <a:off x="4526280" y="3291840"/>
-            <a:ext cx="3108960" cy="457200"/>
-          </a:xfrm>
-          <a:prstGeom prst="rect">
-            <a:avLst/>
-          </a:prstGeom>
-          <a:noFill/>
-          <a:ln/>
-        </p:spPr>
-        <p:txBody>
-          <a:bodyPr wrap="square" rtlCol="0" anchor="ctr"/>
-          <a:lstStyle/>
-          <a:p>
-            <a:pPr algn="ctr" indent="0" marL="0">
-              <a:buNone/>
-            </a:pPr>
-            <a:r>
-              <a:rPr lang="en-US" sz="1700" b="1" dirty="0">
-                <a:solidFill>
-                  <a:srgbClr val="2D3E75"/>
-                </a:solidFill>
-              </a:rPr>
-              <a:t>Modelo probado</a:t>
-            </a:r>
-            <a:endParaRPr lang="en-US" sz="1700" dirty="0"/>
-          </a:p>
-        </p:txBody>
-      </p:sp>
-      <p:sp>
-        <p:nvSpPr>
-          <p:cNvPr id="12" name="Text 10"/>
-          <p:cNvSpPr/>
-          <p:nvPr/>
-        </p:nvSpPr>
-        <p:spPr>
-          <a:xfrm>
-            <a:off x="4526280" y="3794760"/>
-            <a:ext cx="3108960" cy="731520"/>
-          </a:xfrm>
-          <a:prstGeom prst="rect">
-            <a:avLst/>
-          </a:prstGeom>
-          <a:noFill/>
-          <a:ln/>
-        </p:spPr>
-        <p:txBody>
-          <a:bodyPr wrap="square" rtlCol="0" anchor="ctr"/>
-          <a:lstStyle/>
-          <a:p>
-            <a:pPr algn="ctr" indent="0" marL="0">
-              <a:buNone/>
-            </a:pPr>
-            <a:r>
-              <a:rPr lang="en-US" sz="1300" dirty="0">
-                <a:solidFill>
-                  <a:srgbClr val="565D6B"/>
-                </a:solidFill>
-              </a:rPr>
-              <a:t>Webel y TaskRabbit validan la idea.</a:t>
-            </a:r>
-            <a:endParaRPr lang="en-US" sz="1300" dirty="0"/>
-          </a:p>
-        </p:txBody>
-      </p:sp>
-      <p:sp>
-        <p:nvSpPr>
-          <p:cNvPr id="13" name="Shape 11"/>
-          <p:cNvSpPr/>
-          <p:nvPr/>
-        </p:nvSpPr>
-        <p:spPr>
-          <a:xfrm>
-            <a:off x="8046720" y="2194560"/>
-            <a:ext cx="3474720" cy="2377440"/>
-          </a:xfrm>
-          <a:prstGeom prst="roundRect">
-            <a:avLst>
-              <a:gd name="adj" fmla="val 5769"/>
-            </a:avLst>
-          </a:prstGeom>
-          <a:solidFill>
-            <a:srgbClr val="FBF7F4"/>
-          </a:solidFill>
-          <a:ln/>
-        </p:spPr>
-      </p:sp>
-      <p:sp>
-        <p:nvSpPr>
-          <p:cNvPr id="14" name="Text 12"/>
-          <p:cNvSpPr/>
-          <p:nvPr/>
-        </p:nvSpPr>
-        <p:spPr>
-          <a:xfrm>
-            <a:off x="8046720" y="2423160"/>
-            <a:ext cx="3474720" cy="822960"/>
-          </a:xfrm>
-          <a:prstGeom prst="rect">
-            <a:avLst/>
-          </a:prstGeom>
-          <a:noFill/>
-          <a:ln/>
-        </p:spPr>
-        <p:txBody>
-          <a:bodyPr wrap="square" rtlCol="0" anchor="ctr"/>
-          <a:lstStyle/>
-          <a:p>
-            <a:pPr algn="ctr" indent="0" marL="0">
-              <a:buNone/>
-            </a:pPr>
-            <a:r>
-              <a:rPr lang="en-US" sz="4000" dirty="0">
-                <a:solidFill>
-                  <a:srgbClr val="000000"/>
-                </a:solidFill>
-              </a:rPr>
-              <a:t>💳</a:t>
-            </a:r>
-            <a:endParaRPr lang="en-US" sz="4000" dirty="0"/>
-          </a:p>
-        </p:txBody>
-      </p:sp>
-      <p:sp>
-        <p:nvSpPr>
-          <p:cNvPr id="15" name="Text 13"/>
-          <p:cNvSpPr/>
-          <p:nvPr/>
-        </p:nvSpPr>
-        <p:spPr>
-          <a:xfrm>
-            <a:off x="8229600" y="3291840"/>
-            <a:ext cx="3108960" cy="457200"/>
-          </a:xfrm>
-          <a:prstGeom prst="rect">
-            <a:avLst/>
-          </a:prstGeom>
-          <a:noFill/>
-          <a:ln/>
-        </p:spPr>
-        <p:txBody>
-          <a:bodyPr wrap="square" rtlCol="0" anchor="ctr"/>
-          <a:lstStyle/>
-          <a:p>
-            <a:pPr algn="ctr" indent="0" marL="0">
-              <a:buNone/>
-            </a:pPr>
-            <a:r>
-              <a:rPr lang="en-US" sz="1700" b="1" dirty="0">
-                <a:solidFill>
-                  <a:srgbClr val="2D3E75"/>
-                </a:solidFill>
-              </a:rPr>
-              <a:t>Ingreso claro</a:t>
-            </a:r>
-            <a:endParaRPr lang="en-US" sz="1700" dirty="0"/>
-          </a:p>
-        </p:txBody>
-      </p:sp>
-      <p:sp>
-        <p:nvSpPr>
-          <p:cNvPr id="16" name="Text 14"/>
-          <p:cNvSpPr/>
-          <p:nvPr/>
-        </p:nvSpPr>
-        <p:spPr>
-          <a:xfrm>
-            <a:off x="8229600" y="3794760"/>
-            <a:ext cx="3108960" cy="731520"/>
-          </a:xfrm>
-          <a:prstGeom prst="rect">
-            <a:avLst/>
-          </a:prstGeom>
-          <a:noFill/>
-          <a:ln/>
-        </p:spPr>
-        <p:txBody>
-          <a:bodyPr wrap="square" rtlCol="0" anchor="ctr"/>
-          <a:lstStyle/>
-          <a:p>
-            <a:pPr algn="ctr" indent="0" marL="0">
-              <a:buNone/>
-            </a:pPr>
-            <a:r>
-              <a:rPr lang="en-US" sz="1300" dirty="0">
-                <a:solidFill>
-                  <a:srgbClr val="565D6B"/>
-                </a:solidFill>
-              </a:rPr>
-              <a:t>Comisión por servicio completado (split de pago).</a:t>
-            </a:r>
-            <a:endParaRPr lang="en-US" sz="1300" dirty="0"/>
-          </a:p>
-        </p:txBody>
-      </p:sp>
-      <p:sp>
-        <p:nvSpPr>
-          <p:cNvPr id="17" name="Text 15"/>
-          <p:cNvSpPr/>
-          <p:nvPr/>
-        </p:nvSpPr>
-        <p:spPr>
-          <a:xfrm>
-            <a:off x="640080" y="4937760"/>
-            <a:ext cx="10881360" cy="457200"/>
-          </a:xfrm>
-          <a:prstGeom prst="rect">
-            <a:avLst/>
-          </a:prstGeom>
-          <a:noFill/>
-          <a:ln/>
-        </p:spPr>
-        <p:txBody>
-          <a:bodyPr wrap="square" rtlCol="0" anchor="ctr"/>
-          <a:lstStyle/>
-          <a:p>
-            <a:pPr indent="0" marL="0">
-              <a:buNone/>
-            </a:pPr>
-            <a:r>
-              <a:rPr lang="en-US" sz="1200" i="1" dirty="0">
-                <a:solidFill>
-                  <a:srgbClr val="565D6B"/>
-                </a:solidFill>
-              </a:rPr>
-              <a:t>📌 Cifras de mercado y % de comisión: por validar/definir.</a:t>
-            </a:r>
-            <a:endParaRPr lang="en-US" sz="1200" dirty="0"/>
-          </a:p>
-        </p:txBody>
-      </p:sp>
+              <a:rPr lang="en-US" sz="3000" b="1" dirty="0">
+                <a:solidFill>
+                  <a:srgbClr val="FFFFFF"/>
+                </a:solidFill>
+              </a:rPr>
+              <a:t>Se ve y se siente como una app real</a:t>
+            </a:r>
+            <a:endParaRPr lang="en-US" sz="3000" dirty="0"/>
+          </a:p>
+        </p:txBody>
+      </p:sp>
+      <p:pic>
+        <p:nvPicPr>
+          <p:cNvPr id="4" name="Image 0" descr="C:\Users\rpinedar\kiro chats\desktop-organizer\manita\tests\capturas\02-inicio-app-iphone.png">    </p:cNvPr>
+          <p:cNvPicPr>
+            <a:picLocks noChangeAspect="1"/>
+          </p:cNvPicPr>
+          <p:nvPr/>
+        </p:nvPicPr>
+        <p:blipFill>
+          <a:blip r:embed="rId1"/>
+          <a:srcRect l="0" r="0" t="0" b="0"/>
+          <a:stretch/>
+        </p:blipFill>
+        <p:spPr>
+          <a:xfrm>
+            <a:off x="960120" y="2011680"/>
+            <a:ext cx="2194560" cy="4297680"/>
+          </a:xfrm>
+          <a:prstGeom prst="rect">
+            <a:avLst/>
+          </a:prstGeom>
+        </p:spPr>
+      </p:pic>
+      <p:pic>
+        <p:nvPicPr>
+          <p:cNvPr id="5" name="Image 1" descr="C:\Users\rpinedar\kiro chats\desktop-organizer\manita\tests\capturas\03-categorias-iphone.png">    </p:cNvPr>
+          <p:cNvPicPr>
+            <a:picLocks noChangeAspect="1"/>
+          </p:cNvPicPr>
+          <p:nvPr/>
+        </p:nvPicPr>
+        <p:blipFill>
+          <a:blip r:embed="rId2"/>
+          <a:srcRect l="0" r="0" t="0" b="0"/>
+          <a:stretch/>
+        </p:blipFill>
+        <p:spPr>
+          <a:xfrm>
+            <a:off x="3794760" y="2011680"/>
+            <a:ext cx="2194560" cy="4297680"/>
+          </a:xfrm>
+          <a:prstGeom prst="rect">
+            <a:avLst/>
+          </a:prstGeom>
+        </p:spPr>
+      </p:pic>
+      <p:pic>
+        <p:nvPicPr>
+          <p:cNvPr id="6" name="Image 2" descr="C:\Users\rpinedar\kiro chats\desktop-organizer\manita\tests\capturas\04-servicios-iphone.png">    </p:cNvPr>
+          <p:cNvPicPr>
+            <a:picLocks noChangeAspect="1"/>
+          </p:cNvPicPr>
+          <p:nvPr/>
+        </p:nvPicPr>
+        <p:blipFill>
+          <a:blip r:embed="rId3"/>
+          <a:srcRect l="0" r="0" t="0" b="0"/>
+          <a:stretch/>
+        </p:blipFill>
+        <p:spPr>
+          <a:xfrm>
+            <a:off x="6629400" y="2011680"/>
+            <a:ext cx="2194560" cy="4297680"/>
+          </a:xfrm>
+          <a:prstGeom prst="rect">
+            <a:avLst/>
+          </a:prstGeom>
+        </p:spPr>
+      </p:pic>
+      <p:pic>
+        <p:nvPicPr>
+          <p:cNvPr id="7" name="Image 3" descr="C:\Users\rpinedar\kiro chats\desktop-organizer\manita\tests\capturas\11-onboarding-iphone.png">    </p:cNvPr>
+          <p:cNvPicPr>
+            <a:picLocks noChangeAspect="1"/>
+          </p:cNvPicPr>
+          <p:nvPr/>
+        </p:nvPicPr>
+        <p:blipFill>
+          <a:blip r:embed="rId4"/>
+          <a:srcRect l="0" r="0" t="0" b="0"/>
+          <a:stretch/>
+        </p:blipFill>
+        <p:spPr>
+          <a:xfrm>
+            <a:off x="9464040" y="2011680"/>
+            <a:ext cx="2194560" cy="4297680"/>
+          </a:xfrm>
+          <a:prstGeom prst="rect">
+            <a:avLst/>
+          </a:prstGeom>
+        </p:spPr>
+      </p:pic>
     </p:spTree>
   </p:cSld>
   <p:clrMapOvr>
@@ -2687,10 +2600,10 @@
             <a:r>
               <a:rPr lang="en-US" sz="1300" b="1" spc="200" kern="0" dirty="0">
                 <a:solidFill>
-                  <a:srgbClr val="16A97F"/>
-                </a:solidFill>
-              </a:rPr>
-              <a:t>DÓNDE ESTAMOS</a:t>
+                  <a:srgbClr val="C43D26"/>
+                </a:solidFill>
+              </a:rPr>
+              <a:t>OPORTUNIDAD</a:t>
             </a:r>
             <a:endParaRPr lang="en-US" sz="1300" dirty="0"/>
           </a:p>
@@ -2721,14 +2634,14 @@
               <a:buNone/>
             </a:pPr>
             <a:r>
-              <a:rPr lang="en-US" sz="3000" b="1" dirty="0">
+              <a:rPr lang="en-US" sz="2800" b="1" dirty="0">
                 <a:solidFill>
                   <a:srgbClr val="2D3E75"/>
                 </a:solidFill>
               </a:rPr>
-              <a:t>Producto listo para probarse</a:t>
-            </a:r>
-            <a:endParaRPr lang="en-US" sz="3000" dirty="0"/>
+              <a:t>Mercado grande, sin líder local claro</a:t>
+            </a:r>
+            <a:endParaRPr lang="en-US" sz="2800" dirty="0"/>
           </a:p>
         </p:txBody>
       </p:sp>
@@ -2741,15 +2654,15 @@
         <p:spPr>
           <a:xfrm>
             <a:off x="640080" y="2194560"/>
-            <a:ext cx="2606040" cy="2194560"/>
+            <a:ext cx="3474720" cy="2377440"/>
           </a:xfrm>
           <a:prstGeom prst="roundRect">
             <a:avLst>
-              <a:gd name="adj" fmla="val 6250"/>
+              <a:gd name="adj" fmla="val 5769"/>
             </a:avLst>
           </a:prstGeom>
           <a:solidFill>
-            <a:srgbClr val="FFF0EC"/>
+            <a:srgbClr val="FBF7F4"/>
           </a:solidFill>
           <a:ln/>
         </p:spPr>
@@ -2762,8 +2675,8 @@
         </p:nvSpPr>
         <p:spPr>
           <a:xfrm>
-            <a:off x="640080" y="2514600"/>
-            <a:ext cx="2606040" cy="914400"/>
+            <a:off x="640080" y="2423160"/>
+            <a:ext cx="3474720" cy="822960"/>
           </a:xfrm>
           <a:prstGeom prst="rect">
             <a:avLst/>
@@ -2779,14 +2692,14 @@
               <a:buNone/>
             </a:pPr>
             <a:r>
-              <a:rPr lang="en-US" sz="3600" b="1" dirty="0">
-                <a:solidFill>
-                  <a:srgbClr val="C43D26"/>
-                </a:solidFill>
-              </a:rPr>
-              <a:t>MVP</a:t>
-            </a:r>
-            <a:endParaRPr lang="en-US" sz="3600" dirty="0"/>
+              <a:rPr lang="en-US" sz="4000" dirty="0">
+                <a:solidFill>
+                  <a:srgbClr val="000000"/>
+                </a:solidFill>
+              </a:rPr>
+              <a:t>🏙️</a:t>
+            </a:r>
+            <a:endParaRPr lang="en-US" sz="4000" dirty="0"/>
           </a:p>
         </p:txBody>
       </p:sp>
@@ -2798,8 +2711,8 @@
         </p:nvSpPr>
         <p:spPr>
           <a:xfrm>
-            <a:off x="777240" y="3566160"/>
-            <a:ext cx="2331720" cy="731520"/>
+            <a:off x="822960" y="3291840"/>
+            <a:ext cx="3108960" cy="457200"/>
           </a:xfrm>
           <a:prstGeom prst="rect">
             <a:avLst/>
@@ -2815,12 +2728,48 @@
               <a:buNone/>
             </a:pPr>
             <a:r>
+              <a:rPr lang="en-US" sz="1700" b="1" dirty="0">
+                <a:solidFill>
+                  <a:srgbClr val="2D3E75"/>
+                </a:solidFill>
+              </a:rPr>
+              <a:t>Local</a:t>
+            </a:r>
+            <a:endParaRPr lang="en-US" sz="1700" dirty="0"/>
+          </a:p>
+        </p:txBody>
+      </p:sp>
+      <p:sp>
+        <p:nvSpPr>
+          <p:cNvPr id="8" name="Text 6"/>
+          <p:cNvSpPr/>
+          <p:nvPr/>
+        </p:nvSpPr>
+        <p:spPr>
+          <a:xfrm>
+            <a:off x="822960" y="3794760"/>
+            <a:ext cx="3108960" cy="731520"/>
+          </a:xfrm>
+          <a:prstGeom prst="rect">
+            <a:avLst/>
+          </a:prstGeom>
+          <a:noFill/>
+          <a:ln/>
+        </p:spPr>
+        <p:txBody>
+          <a:bodyPr wrap="square" rtlCol="0" anchor="ctr"/>
+          <a:lstStyle/>
+          <a:p>
+            <a:pPr algn="ctr" indent="0" marL="0">
+              <a:buNone/>
+            </a:pPr>
+            <a:r>
               <a:rPr lang="en-US" sz="1300" dirty="0">
                 <a:solidFill>
-                  <a:srgbClr val="22232B"/>
-                </a:solidFill>
-              </a:rPr>
-              <a:t>funcional de punta a punta</a:t>
+                  <a:srgbClr val="565D6B"/>
+                </a:solidFill>
+              </a:rPr>
+              <a:t>Nacido en CDMX, en español mexicano.</a:t>
             </a:r>
             <a:endParaRPr lang="en-US" sz="1300" dirty="0"/>
           </a:p>
@@ -2828,36 +2777,36 @@
       </p:sp>
       <p:sp>
         <p:nvSpPr>
-          <p:cNvPr id="8" name="Shape 6"/>
-          <p:cNvSpPr/>
-          <p:nvPr/>
-        </p:nvSpPr>
-        <p:spPr>
-          <a:xfrm>
-            <a:off x="3429000" y="2194560"/>
-            <a:ext cx="2606040" cy="2194560"/>
+          <p:cNvPr id="9" name="Shape 7"/>
+          <p:cNvSpPr/>
+          <p:nvPr/>
+        </p:nvSpPr>
+        <p:spPr>
+          <a:xfrm>
+            <a:off x="4343400" y="2194560"/>
+            <a:ext cx="3474720" cy="2377440"/>
           </a:xfrm>
           <a:prstGeom prst="roundRect">
             <a:avLst>
-              <a:gd name="adj" fmla="val 6250"/>
+              <a:gd name="adj" fmla="val 5769"/>
             </a:avLst>
           </a:prstGeom>
           <a:solidFill>
-            <a:srgbClr val="FFF0EC"/>
+            <a:srgbClr val="FBF7F4"/>
           </a:solidFill>
           <a:ln/>
         </p:spPr>
       </p:sp>
       <p:sp>
         <p:nvSpPr>
-          <p:cNvPr id="9" name="Text 7"/>
-          <p:cNvSpPr/>
-          <p:nvPr/>
-        </p:nvSpPr>
-        <p:spPr>
-          <a:xfrm>
-            <a:off x="3429000" y="2514600"/>
-            <a:ext cx="2606040" cy="914400"/>
+          <p:cNvPr id="10" name="Text 8"/>
+          <p:cNvSpPr/>
+          <p:nvPr/>
+        </p:nvSpPr>
+        <p:spPr>
+          <a:xfrm>
+            <a:off x="4343400" y="2423160"/>
+            <a:ext cx="3474720" cy="822960"/>
           </a:xfrm>
           <a:prstGeom prst="rect">
             <a:avLst/>
@@ -2873,27 +2822,27 @@
               <a:buNone/>
             </a:pPr>
             <a:r>
-              <a:rPr lang="en-US" sz="3600" b="1" dirty="0">
-                <a:solidFill>
-                  <a:srgbClr val="C43D26"/>
-                </a:solidFill>
-              </a:rPr>
-              <a:t>Web + App</a:t>
-            </a:r>
-            <a:endParaRPr lang="en-US" sz="3600" dirty="0"/>
-          </a:p>
-        </p:txBody>
-      </p:sp>
-      <p:sp>
-        <p:nvSpPr>
-          <p:cNvPr id="10" name="Text 8"/>
-          <p:cNvSpPr/>
-          <p:nvPr/>
-        </p:nvSpPr>
-        <p:spPr>
-          <a:xfrm>
-            <a:off x="3566160" y="3566160"/>
-            <a:ext cx="2331720" cy="731520"/>
+              <a:rPr lang="en-US" sz="4000" dirty="0">
+                <a:solidFill>
+                  <a:srgbClr val="000000"/>
+                </a:solidFill>
+              </a:rPr>
+              <a:t>🌎</a:t>
+            </a:r>
+            <a:endParaRPr lang="en-US" sz="4000" dirty="0"/>
+          </a:p>
+        </p:txBody>
+      </p:sp>
+      <p:sp>
+        <p:nvSpPr>
+          <p:cNvPr id="11" name="Text 9"/>
+          <p:cNvSpPr/>
+          <p:nvPr/>
+        </p:nvSpPr>
+        <p:spPr>
+          <a:xfrm>
+            <a:off x="4526280" y="3291840"/>
+            <a:ext cx="3108960" cy="457200"/>
           </a:xfrm>
           <a:prstGeom prst="rect">
             <a:avLst/>
@@ -2909,12 +2858,48 @@
               <a:buNone/>
             </a:pPr>
             <a:r>
+              <a:rPr lang="en-US" sz="1700" b="1" dirty="0">
+                <a:solidFill>
+                  <a:srgbClr val="2D3E75"/>
+                </a:solidFill>
+              </a:rPr>
+              <a:t>Modelo probado</a:t>
+            </a:r>
+            <a:endParaRPr lang="en-US" sz="1700" dirty="0"/>
+          </a:p>
+        </p:txBody>
+      </p:sp>
+      <p:sp>
+        <p:nvSpPr>
+          <p:cNvPr id="12" name="Text 10"/>
+          <p:cNvSpPr/>
+          <p:nvPr/>
+        </p:nvSpPr>
+        <p:spPr>
+          <a:xfrm>
+            <a:off x="4526280" y="3794760"/>
+            <a:ext cx="3108960" cy="731520"/>
+          </a:xfrm>
+          <a:prstGeom prst="rect">
+            <a:avLst/>
+          </a:prstGeom>
+          <a:noFill/>
+          <a:ln/>
+        </p:spPr>
+        <p:txBody>
+          <a:bodyPr wrap="square" rtlCol="0" anchor="ctr"/>
+          <a:lstStyle/>
+          <a:p>
+            <a:pPr algn="ctr" indent="0" marL="0">
+              <a:buNone/>
+            </a:pPr>
+            <a:r>
               <a:rPr lang="en-US" sz="1300" dirty="0">
                 <a:solidFill>
-                  <a:srgbClr val="22232B"/>
-                </a:solidFill>
-              </a:rPr>
-              <a:t>instalable Android/iPhone</a:t>
+                  <a:srgbClr val="565D6B"/>
+                </a:solidFill>
+              </a:rPr>
+              <a:t>Webel y TaskRabbit validan la idea.</a:t>
             </a:r>
             <a:endParaRPr lang="en-US" sz="1300" dirty="0"/>
           </a:p>
@@ -2922,36 +2907,36 @@
       </p:sp>
       <p:sp>
         <p:nvSpPr>
-          <p:cNvPr id="11" name="Shape 9"/>
-          <p:cNvSpPr/>
-          <p:nvPr/>
-        </p:nvSpPr>
-        <p:spPr>
-          <a:xfrm>
-            <a:off x="6217920" y="2194560"/>
-            <a:ext cx="2606040" cy="2194560"/>
+          <p:cNvPr id="13" name="Shape 11"/>
+          <p:cNvSpPr/>
+          <p:nvPr/>
+        </p:nvSpPr>
+        <p:spPr>
+          <a:xfrm>
+            <a:off x="8046720" y="2194560"/>
+            <a:ext cx="3474720" cy="2377440"/>
           </a:xfrm>
           <a:prstGeom prst="roundRect">
             <a:avLst>
-              <a:gd name="adj" fmla="val 6250"/>
+              <a:gd name="adj" fmla="val 5769"/>
             </a:avLst>
           </a:prstGeom>
           <a:solidFill>
-            <a:srgbClr val="FFF0EC"/>
+            <a:srgbClr val="FBF7F4"/>
           </a:solidFill>
           <a:ln/>
         </p:spPr>
       </p:sp>
       <p:sp>
         <p:nvSpPr>
-          <p:cNvPr id="12" name="Text 10"/>
-          <p:cNvSpPr/>
-          <p:nvPr/>
-        </p:nvSpPr>
-        <p:spPr>
-          <a:xfrm>
-            <a:off x="6217920" y="2514600"/>
-            <a:ext cx="2606040" cy="914400"/>
+          <p:cNvPr id="14" name="Text 12"/>
+          <p:cNvSpPr/>
+          <p:nvPr/>
+        </p:nvSpPr>
+        <p:spPr>
+          <a:xfrm>
+            <a:off x="8046720" y="2423160"/>
+            <a:ext cx="3474720" cy="822960"/>
           </a:xfrm>
           <a:prstGeom prst="rect">
             <a:avLst/>
@@ -2967,27 +2952,27 @@
               <a:buNone/>
             </a:pPr>
             <a:r>
-              <a:rPr lang="en-US" sz="3600" b="1" dirty="0">
-                <a:solidFill>
-                  <a:srgbClr val="C43D26"/>
-                </a:solidFill>
-              </a:rPr>
-              <a:t>0</a:t>
-            </a:r>
-            <a:endParaRPr lang="en-US" sz="3600" dirty="0"/>
-          </a:p>
-        </p:txBody>
-      </p:sp>
-      <p:sp>
-        <p:nvSpPr>
-          <p:cNvPr id="13" name="Text 11"/>
-          <p:cNvSpPr/>
-          <p:nvPr/>
-        </p:nvSpPr>
-        <p:spPr>
-          <a:xfrm>
-            <a:off x="6355080" y="3566160"/>
-            <a:ext cx="2331720" cy="731520"/>
+              <a:rPr lang="en-US" sz="4000" dirty="0">
+                <a:solidFill>
+                  <a:srgbClr val="000000"/>
+                </a:solidFill>
+              </a:rPr>
+              <a:t>💳</a:t>
+            </a:r>
+            <a:endParaRPr lang="en-US" sz="4000" dirty="0"/>
+          </a:p>
+        </p:txBody>
+      </p:sp>
+      <p:sp>
+        <p:nvSpPr>
+          <p:cNvPr id="15" name="Text 13"/>
+          <p:cNvSpPr/>
+          <p:nvPr/>
+        </p:nvSpPr>
+        <p:spPr>
+          <a:xfrm>
+            <a:off x="8229600" y="3291840"/>
+            <a:ext cx="3108960" cy="457200"/>
           </a:xfrm>
           <a:prstGeom prst="rect">
             <a:avLst/>
@@ -3003,12 +2988,48 @@
               <a:buNone/>
             </a:pPr>
             <a:r>
+              <a:rPr lang="en-US" sz="1700" b="1" dirty="0">
+                <a:solidFill>
+                  <a:srgbClr val="2D3E75"/>
+                </a:solidFill>
+              </a:rPr>
+              <a:t>Ingreso claro</a:t>
+            </a:r>
+            <a:endParaRPr lang="en-US" sz="1700" dirty="0"/>
+          </a:p>
+        </p:txBody>
+      </p:sp>
+      <p:sp>
+        <p:nvSpPr>
+          <p:cNvPr id="16" name="Text 14"/>
+          <p:cNvSpPr/>
+          <p:nvPr/>
+        </p:nvSpPr>
+        <p:spPr>
+          <a:xfrm>
+            <a:off x="8229600" y="3794760"/>
+            <a:ext cx="3108960" cy="731520"/>
+          </a:xfrm>
+          <a:prstGeom prst="rect">
+            <a:avLst/>
+          </a:prstGeom>
+          <a:noFill/>
+          <a:ln/>
+        </p:spPr>
+        <p:txBody>
+          <a:bodyPr wrap="square" rtlCol="0" anchor="ctr"/>
+          <a:lstStyle/>
+          <a:p>
+            <a:pPr algn="ctr" indent="0" marL="0">
+              <a:buNone/>
+            </a:pPr>
+            <a:r>
               <a:rPr lang="en-US" sz="1300" dirty="0">
                 <a:solidFill>
-                  <a:srgbClr val="22232B"/>
-                </a:solidFill>
-              </a:rPr>
-              <a:t>fallos en pruebas de 20 usuarios</a:t>
+                  <a:srgbClr val="565D6B"/>
+                </a:solidFill>
+              </a:rPr>
+              <a:t>Comisión por servicio completado (split de pago).</a:t>
             </a:r>
             <a:endParaRPr lang="en-US" sz="1300" dirty="0"/>
           </a:p>
@@ -3016,107 +3037,13 @@
       </p:sp>
       <p:sp>
         <p:nvSpPr>
-          <p:cNvPr id="14" name="Shape 12"/>
-          <p:cNvSpPr/>
-          <p:nvPr/>
-        </p:nvSpPr>
-        <p:spPr>
-          <a:xfrm>
-            <a:off x="9006840" y="2194560"/>
-            <a:ext cx="2606040" cy="2194560"/>
-          </a:xfrm>
-          <a:prstGeom prst="roundRect">
-            <a:avLst>
-              <a:gd name="adj" fmla="val 6250"/>
-            </a:avLst>
-          </a:prstGeom>
-          <a:solidFill>
-            <a:srgbClr val="FFF0EC"/>
-          </a:solidFill>
-          <a:ln/>
-        </p:spPr>
-      </p:sp>
-      <p:sp>
-        <p:nvSpPr>
-          <p:cNvPr id="15" name="Text 13"/>
-          <p:cNvSpPr/>
-          <p:nvPr/>
-        </p:nvSpPr>
-        <p:spPr>
-          <a:xfrm>
-            <a:off x="9006840" y="2514600"/>
-            <a:ext cx="2606040" cy="914400"/>
-          </a:xfrm>
-          <a:prstGeom prst="rect">
-            <a:avLst/>
-          </a:prstGeom>
-          <a:noFill/>
-          <a:ln/>
-        </p:spPr>
-        <p:txBody>
-          <a:bodyPr wrap="square" rtlCol="0" anchor="ctr"/>
-          <a:lstStyle/>
-          <a:p>
-            <a:pPr algn="ctr" indent="0" marL="0">
-              <a:buNone/>
-            </a:pPr>
-            <a:r>
-              <a:rPr lang="en-US" sz="3600" b="1" dirty="0">
-                <a:solidFill>
-                  <a:srgbClr val="C43D26"/>
-                </a:solidFill>
-              </a:rPr>
-              <a:t>✔</a:t>
-            </a:r>
-            <a:endParaRPr lang="en-US" sz="3600" dirty="0"/>
-          </a:p>
-        </p:txBody>
-      </p:sp>
-      <p:sp>
-        <p:nvSpPr>
-          <p:cNvPr id="16" name="Text 14"/>
-          <p:cNvSpPr/>
-          <p:nvPr/>
-        </p:nvSpPr>
-        <p:spPr>
-          <a:xfrm>
-            <a:off x="9144000" y="3566160"/>
-            <a:ext cx="2331720" cy="731520"/>
-          </a:xfrm>
-          <a:prstGeom prst="rect">
-            <a:avLst/>
-          </a:prstGeom>
-          <a:noFill/>
-          <a:ln/>
-        </p:spPr>
-        <p:txBody>
-          <a:bodyPr wrap="square" rtlCol="0" anchor="ctr"/>
-          <a:lstStyle/>
-          <a:p>
-            <a:pPr algn="ctr" indent="0" marL="0">
-              <a:buNone/>
-            </a:pPr>
-            <a:r>
-              <a:rPr lang="en-US" sz="1300" dirty="0">
-                <a:solidFill>
-                  <a:srgbClr val="22232B"/>
-                </a:solidFill>
-              </a:rPr>
-              <a:t>base legal preparada</a:t>
-            </a:r>
-            <a:endParaRPr lang="en-US" sz="1300" dirty="0"/>
-          </a:p>
-        </p:txBody>
-      </p:sp>
-      <p:sp>
-        <p:nvSpPr>
           <p:cNvPr id="17" name="Text 15"/>
           <p:cNvSpPr/>
           <p:nvPr/>
         </p:nvSpPr>
         <p:spPr>
           <a:xfrm>
-            <a:off x="640080" y="4754880"/>
+            <a:off x="640080" y="4937760"/>
             <a:ext cx="10881360" cy="457200"/>
           </a:xfrm>
           <a:prstGeom prst="rect">
@@ -3133,14 +3060,14 @@
               <a:buNone/>
             </a:pPr>
             <a:r>
-              <a:rPr lang="en-US" sz="1400" b="1" dirty="0">
-                <a:solidFill>
-                  <a:srgbClr val="16A97F"/>
-                </a:solidFill>
-              </a:rPr>
-              <a:t>Todo funcionando y verificado: registro, búsqueda, reserva, gestión y reseñas.</a:t>
-            </a:r>
-            <a:endParaRPr lang="en-US" sz="1400" dirty="0"/>
+              <a:rPr lang="en-US" sz="1200" i="1" dirty="0">
+                <a:solidFill>
+                  <a:srgbClr val="565D6B"/>
+                </a:solidFill>
+              </a:rPr>
+              <a:t>📌 Cifras de mercado y % de comisión: por validar/definir.</a:t>
+            </a:r>
+            <a:endParaRPr lang="en-US" sz="1200" dirty="0"/>
           </a:p>
         </p:txBody>
       </p:sp>
@@ -3155,6 +3082,1408 @@
 <file path=ppt/slides/slide12.xml><?xml version="1.0" encoding="utf-8"?>
 <p:sld xmlns:a="http://schemas.openxmlformats.org/drawingml/2006/main" xmlns:r="http://schemas.openxmlformats.org/officeDocument/2006/relationships" xmlns:p="http://schemas.openxmlformats.org/presentationml/2006/main">
   <p:cSld name="Slide 12">
+    <p:bg>
+      <p:bgPr>
+        <a:solidFill>
+          <a:srgbClr val="FFFFFF"/>
+        </a:solidFill>
+      </p:bgPr>
+    </p:bg>
+    <p:spTree>
+      <p:nvGrpSpPr>
+        <p:cNvPr id="1" name=""/>
+        <p:cNvGrpSpPr/>
+        <p:nvPr/>
+      </p:nvGrpSpPr>
+      <p:grpSpPr>
+        <a:xfrm>
+          <a:off x="0" y="0"/>
+          <a:ext cx="0" cy="0"/>
+          <a:chOff x="0" y="0"/>
+          <a:chExt cx="0" cy="0"/>
+        </a:xfrm>
+      </p:grpSpPr>
+      <p:sp>
+        <p:nvSpPr>
+          <p:cNvPr id="2" name="Shape 0"/>
+          <p:cNvSpPr/>
+          <p:nvPr/>
+        </p:nvSpPr>
+        <p:spPr>
+          <a:xfrm>
+            <a:off x="0" y="0"/>
+            <a:ext cx="12191695" cy="164592"/>
+          </a:xfrm>
+          <a:prstGeom prst="rect">
+            <a:avLst/>
+          </a:prstGeom>
+          <a:solidFill>
+            <a:srgbClr val="FF6B4A"/>
+          </a:solidFill>
+          <a:ln/>
+        </p:spPr>
+      </p:sp>
+      <p:sp>
+        <p:nvSpPr>
+          <p:cNvPr id="3" name="Text 1"/>
+          <p:cNvSpPr/>
+          <p:nvPr/>
+        </p:nvSpPr>
+        <p:spPr>
+          <a:xfrm>
+            <a:off x="640080" y="457200"/>
+            <a:ext cx="7315200" cy="365760"/>
+          </a:xfrm>
+          <a:prstGeom prst="rect">
+            <a:avLst/>
+          </a:prstGeom>
+          <a:noFill/>
+          <a:ln/>
+        </p:spPr>
+        <p:txBody>
+          <a:bodyPr wrap="square" rtlCol="0" anchor="ctr"/>
+          <a:lstStyle/>
+          <a:p>
+            <a:pPr indent="0" marL="0">
+              <a:buNone/>
+            </a:pPr>
+            <a:r>
+              <a:rPr lang="en-US" sz="1300" b="1" spc="200" kern="0" dirty="0">
+                <a:solidFill>
+                  <a:srgbClr val="16A97F"/>
+                </a:solidFill>
+              </a:rPr>
+              <a:t>DÓNDE ESTAMOS</a:t>
+            </a:r>
+            <a:endParaRPr lang="en-US" sz="1300" dirty="0"/>
+          </a:p>
+        </p:txBody>
+      </p:sp>
+      <p:sp>
+        <p:nvSpPr>
+          <p:cNvPr id="4" name="Text 2"/>
+          <p:cNvSpPr/>
+          <p:nvPr/>
+        </p:nvSpPr>
+        <p:spPr>
+          <a:xfrm>
+            <a:off x="640080" y="868680"/>
+            <a:ext cx="10881360" cy="822960"/>
+          </a:xfrm>
+          <a:prstGeom prst="rect">
+            <a:avLst/>
+          </a:prstGeom>
+          <a:noFill/>
+          <a:ln/>
+        </p:spPr>
+        <p:txBody>
+          <a:bodyPr wrap="square" rtlCol="0" anchor="ctr"/>
+          <a:lstStyle/>
+          <a:p>
+            <a:pPr indent="0" marL="0">
+              <a:buNone/>
+            </a:pPr>
+            <a:r>
+              <a:rPr lang="en-US" sz="3000" b="1" dirty="0">
+                <a:solidFill>
+                  <a:srgbClr val="2D3E75"/>
+                </a:solidFill>
+              </a:rPr>
+              <a:t>Producto listo para probarse</a:t>
+            </a:r>
+            <a:endParaRPr lang="en-US" sz="3000" dirty="0"/>
+          </a:p>
+        </p:txBody>
+      </p:sp>
+      <p:sp>
+        <p:nvSpPr>
+          <p:cNvPr id="5" name="Shape 3"/>
+          <p:cNvSpPr/>
+          <p:nvPr/>
+        </p:nvSpPr>
+        <p:spPr>
+          <a:xfrm>
+            <a:off x="640080" y="2194560"/>
+            <a:ext cx="2606040" cy="2194560"/>
+          </a:xfrm>
+          <a:prstGeom prst="roundRect">
+            <a:avLst>
+              <a:gd name="adj" fmla="val 6250"/>
+            </a:avLst>
+          </a:prstGeom>
+          <a:solidFill>
+            <a:srgbClr val="FFF0EC"/>
+          </a:solidFill>
+          <a:ln/>
+        </p:spPr>
+      </p:sp>
+      <p:sp>
+        <p:nvSpPr>
+          <p:cNvPr id="6" name="Text 4"/>
+          <p:cNvSpPr/>
+          <p:nvPr/>
+        </p:nvSpPr>
+        <p:spPr>
+          <a:xfrm>
+            <a:off x="640080" y="2514600"/>
+            <a:ext cx="2606040" cy="914400"/>
+          </a:xfrm>
+          <a:prstGeom prst="rect">
+            <a:avLst/>
+          </a:prstGeom>
+          <a:noFill/>
+          <a:ln/>
+        </p:spPr>
+        <p:txBody>
+          <a:bodyPr wrap="square" rtlCol="0" anchor="ctr"/>
+          <a:lstStyle/>
+          <a:p>
+            <a:pPr algn="ctr" indent="0" marL="0">
+              <a:buNone/>
+            </a:pPr>
+            <a:r>
+              <a:rPr lang="en-US" sz="3600" b="1" dirty="0">
+                <a:solidFill>
+                  <a:srgbClr val="C43D26"/>
+                </a:solidFill>
+              </a:rPr>
+              <a:t>MVP</a:t>
+            </a:r>
+            <a:endParaRPr lang="en-US" sz="3600" dirty="0"/>
+          </a:p>
+        </p:txBody>
+      </p:sp>
+      <p:sp>
+        <p:nvSpPr>
+          <p:cNvPr id="7" name="Text 5"/>
+          <p:cNvSpPr/>
+          <p:nvPr/>
+        </p:nvSpPr>
+        <p:spPr>
+          <a:xfrm>
+            <a:off x="777240" y="3566160"/>
+            <a:ext cx="2331720" cy="731520"/>
+          </a:xfrm>
+          <a:prstGeom prst="rect">
+            <a:avLst/>
+          </a:prstGeom>
+          <a:noFill/>
+          <a:ln/>
+        </p:spPr>
+        <p:txBody>
+          <a:bodyPr wrap="square" rtlCol="0" anchor="ctr"/>
+          <a:lstStyle/>
+          <a:p>
+            <a:pPr algn="ctr" indent="0" marL="0">
+              <a:buNone/>
+            </a:pPr>
+            <a:r>
+              <a:rPr lang="en-US" sz="1300" dirty="0">
+                <a:solidFill>
+                  <a:srgbClr val="22232B"/>
+                </a:solidFill>
+              </a:rPr>
+              <a:t>funcional de punta a punta</a:t>
+            </a:r>
+            <a:endParaRPr lang="en-US" sz="1300" dirty="0"/>
+          </a:p>
+        </p:txBody>
+      </p:sp>
+      <p:sp>
+        <p:nvSpPr>
+          <p:cNvPr id="8" name="Shape 6"/>
+          <p:cNvSpPr/>
+          <p:nvPr/>
+        </p:nvSpPr>
+        <p:spPr>
+          <a:xfrm>
+            <a:off x="3429000" y="2194560"/>
+            <a:ext cx="2606040" cy="2194560"/>
+          </a:xfrm>
+          <a:prstGeom prst="roundRect">
+            <a:avLst>
+              <a:gd name="adj" fmla="val 6250"/>
+            </a:avLst>
+          </a:prstGeom>
+          <a:solidFill>
+            <a:srgbClr val="FFF0EC"/>
+          </a:solidFill>
+          <a:ln/>
+        </p:spPr>
+      </p:sp>
+      <p:sp>
+        <p:nvSpPr>
+          <p:cNvPr id="9" name="Text 7"/>
+          <p:cNvSpPr/>
+          <p:nvPr/>
+        </p:nvSpPr>
+        <p:spPr>
+          <a:xfrm>
+            <a:off x="3429000" y="2514600"/>
+            <a:ext cx="2606040" cy="914400"/>
+          </a:xfrm>
+          <a:prstGeom prst="rect">
+            <a:avLst/>
+          </a:prstGeom>
+          <a:noFill/>
+          <a:ln/>
+        </p:spPr>
+        <p:txBody>
+          <a:bodyPr wrap="square" rtlCol="0" anchor="ctr"/>
+          <a:lstStyle/>
+          <a:p>
+            <a:pPr algn="ctr" indent="0" marL="0">
+              <a:buNone/>
+            </a:pPr>
+            <a:r>
+              <a:rPr lang="en-US" sz="3600" b="1" dirty="0">
+                <a:solidFill>
+                  <a:srgbClr val="C43D26"/>
+                </a:solidFill>
+              </a:rPr>
+              <a:t>Web + App</a:t>
+            </a:r>
+            <a:endParaRPr lang="en-US" sz="3600" dirty="0"/>
+          </a:p>
+        </p:txBody>
+      </p:sp>
+      <p:sp>
+        <p:nvSpPr>
+          <p:cNvPr id="10" name="Text 8"/>
+          <p:cNvSpPr/>
+          <p:nvPr/>
+        </p:nvSpPr>
+        <p:spPr>
+          <a:xfrm>
+            <a:off x="3566160" y="3566160"/>
+            <a:ext cx="2331720" cy="731520"/>
+          </a:xfrm>
+          <a:prstGeom prst="rect">
+            <a:avLst/>
+          </a:prstGeom>
+          <a:noFill/>
+          <a:ln/>
+        </p:spPr>
+        <p:txBody>
+          <a:bodyPr wrap="square" rtlCol="0" anchor="ctr"/>
+          <a:lstStyle/>
+          <a:p>
+            <a:pPr algn="ctr" indent="0" marL="0">
+              <a:buNone/>
+            </a:pPr>
+            <a:r>
+              <a:rPr lang="en-US" sz="1300" dirty="0">
+                <a:solidFill>
+                  <a:srgbClr val="22232B"/>
+                </a:solidFill>
+              </a:rPr>
+              <a:t>instalable Android/iPhone</a:t>
+            </a:r>
+            <a:endParaRPr lang="en-US" sz="1300" dirty="0"/>
+          </a:p>
+        </p:txBody>
+      </p:sp>
+      <p:sp>
+        <p:nvSpPr>
+          <p:cNvPr id="11" name="Shape 9"/>
+          <p:cNvSpPr/>
+          <p:nvPr/>
+        </p:nvSpPr>
+        <p:spPr>
+          <a:xfrm>
+            <a:off x="6217920" y="2194560"/>
+            <a:ext cx="2606040" cy="2194560"/>
+          </a:xfrm>
+          <a:prstGeom prst="roundRect">
+            <a:avLst>
+              <a:gd name="adj" fmla="val 6250"/>
+            </a:avLst>
+          </a:prstGeom>
+          <a:solidFill>
+            <a:srgbClr val="FFF0EC"/>
+          </a:solidFill>
+          <a:ln/>
+        </p:spPr>
+      </p:sp>
+      <p:sp>
+        <p:nvSpPr>
+          <p:cNvPr id="12" name="Text 10"/>
+          <p:cNvSpPr/>
+          <p:nvPr/>
+        </p:nvSpPr>
+        <p:spPr>
+          <a:xfrm>
+            <a:off x="6217920" y="2514600"/>
+            <a:ext cx="2606040" cy="914400"/>
+          </a:xfrm>
+          <a:prstGeom prst="rect">
+            <a:avLst/>
+          </a:prstGeom>
+          <a:noFill/>
+          <a:ln/>
+        </p:spPr>
+        <p:txBody>
+          <a:bodyPr wrap="square" rtlCol="0" anchor="ctr"/>
+          <a:lstStyle/>
+          <a:p>
+            <a:pPr algn="ctr" indent="0" marL="0">
+              <a:buNone/>
+            </a:pPr>
+            <a:r>
+              <a:rPr lang="en-US" sz="3600" b="1" dirty="0">
+                <a:solidFill>
+                  <a:srgbClr val="C43D26"/>
+                </a:solidFill>
+              </a:rPr>
+              <a:t>0</a:t>
+            </a:r>
+            <a:endParaRPr lang="en-US" sz="3600" dirty="0"/>
+          </a:p>
+        </p:txBody>
+      </p:sp>
+      <p:sp>
+        <p:nvSpPr>
+          <p:cNvPr id="13" name="Text 11"/>
+          <p:cNvSpPr/>
+          <p:nvPr/>
+        </p:nvSpPr>
+        <p:spPr>
+          <a:xfrm>
+            <a:off x="6355080" y="3566160"/>
+            <a:ext cx="2331720" cy="731520"/>
+          </a:xfrm>
+          <a:prstGeom prst="rect">
+            <a:avLst/>
+          </a:prstGeom>
+          <a:noFill/>
+          <a:ln/>
+        </p:spPr>
+        <p:txBody>
+          <a:bodyPr wrap="square" rtlCol="0" anchor="ctr"/>
+          <a:lstStyle/>
+          <a:p>
+            <a:pPr algn="ctr" indent="0" marL="0">
+              <a:buNone/>
+            </a:pPr>
+            <a:r>
+              <a:rPr lang="en-US" sz="1300" dirty="0">
+                <a:solidFill>
+                  <a:srgbClr val="22232B"/>
+                </a:solidFill>
+              </a:rPr>
+              <a:t>fallos en pruebas de 20 usuarios</a:t>
+            </a:r>
+            <a:endParaRPr lang="en-US" sz="1300" dirty="0"/>
+          </a:p>
+        </p:txBody>
+      </p:sp>
+      <p:sp>
+        <p:nvSpPr>
+          <p:cNvPr id="14" name="Shape 12"/>
+          <p:cNvSpPr/>
+          <p:nvPr/>
+        </p:nvSpPr>
+        <p:spPr>
+          <a:xfrm>
+            <a:off x="9006840" y="2194560"/>
+            <a:ext cx="2606040" cy="2194560"/>
+          </a:xfrm>
+          <a:prstGeom prst="roundRect">
+            <a:avLst>
+              <a:gd name="adj" fmla="val 6250"/>
+            </a:avLst>
+          </a:prstGeom>
+          <a:solidFill>
+            <a:srgbClr val="FFF0EC"/>
+          </a:solidFill>
+          <a:ln/>
+        </p:spPr>
+      </p:sp>
+      <p:sp>
+        <p:nvSpPr>
+          <p:cNvPr id="15" name="Text 13"/>
+          <p:cNvSpPr/>
+          <p:nvPr/>
+        </p:nvSpPr>
+        <p:spPr>
+          <a:xfrm>
+            <a:off x="9006840" y="2514600"/>
+            <a:ext cx="2606040" cy="914400"/>
+          </a:xfrm>
+          <a:prstGeom prst="rect">
+            <a:avLst/>
+          </a:prstGeom>
+          <a:noFill/>
+          <a:ln/>
+        </p:spPr>
+        <p:txBody>
+          <a:bodyPr wrap="square" rtlCol="0" anchor="ctr"/>
+          <a:lstStyle/>
+          <a:p>
+            <a:pPr algn="ctr" indent="0" marL="0">
+              <a:buNone/>
+            </a:pPr>
+            <a:r>
+              <a:rPr lang="en-US" sz="3600" b="1" dirty="0">
+                <a:solidFill>
+                  <a:srgbClr val="C43D26"/>
+                </a:solidFill>
+              </a:rPr>
+              <a:t>✔</a:t>
+            </a:r>
+            <a:endParaRPr lang="en-US" sz="3600" dirty="0"/>
+          </a:p>
+        </p:txBody>
+      </p:sp>
+      <p:sp>
+        <p:nvSpPr>
+          <p:cNvPr id="16" name="Text 14"/>
+          <p:cNvSpPr/>
+          <p:nvPr/>
+        </p:nvSpPr>
+        <p:spPr>
+          <a:xfrm>
+            <a:off x="9144000" y="3566160"/>
+            <a:ext cx="2331720" cy="731520"/>
+          </a:xfrm>
+          <a:prstGeom prst="rect">
+            <a:avLst/>
+          </a:prstGeom>
+          <a:noFill/>
+          <a:ln/>
+        </p:spPr>
+        <p:txBody>
+          <a:bodyPr wrap="square" rtlCol="0" anchor="ctr"/>
+          <a:lstStyle/>
+          <a:p>
+            <a:pPr algn="ctr" indent="0" marL="0">
+              <a:buNone/>
+            </a:pPr>
+            <a:r>
+              <a:rPr lang="en-US" sz="1300" dirty="0">
+                <a:solidFill>
+                  <a:srgbClr val="22232B"/>
+                </a:solidFill>
+              </a:rPr>
+              <a:t>base legal preparada</a:t>
+            </a:r>
+            <a:endParaRPr lang="en-US" sz="1300" dirty="0"/>
+          </a:p>
+        </p:txBody>
+      </p:sp>
+      <p:sp>
+        <p:nvSpPr>
+          <p:cNvPr id="17" name="Text 15"/>
+          <p:cNvSpPr/>
+          <p:nvPr/>
+        </p:nvSpPr>
+        <p:spPr>
+          <a:xfrm>
+            <a:off x="640080" y="4754880"/>
+            <a:ext cx="10881360" cy="457200"/>
+          </a:xfrm>
+          <a:prstGeom prst="rect">
+            <a:avLst/>
+          </a:prstGeom>
+          <a:noFill/>
+          <a:ln/>
+        </p:spPr>
+        <p:txBody>
+          <a:bodyPr wrap="square" rtlCol="0" anchor="ctr"/>
+          <a:lstStyle/>
+          <a:p>
+            <a:pPr indent="0" marL="0">
+              <a:buNone/>
+            </a:pPr>
+            <a:r>
+              <a:rPr lang="en-US" sz="1400" b="1" dirty="0">
+                <a:solidFill>
+                  <a:srgbClr val="16A97F"/>
+                </a:solidFill>
+              </a:rPr>
+              <a:t>Todo funcionando y verificado: registro, búsqueda, reserva, gestión y reseñas.</a:t>
+            </a:r>
+            <a:endParaRPr lang="en-US" sz="1400" dirty="0"/>
+          </a:p>
+        </p:txBody>
+      </p:sp>
+    </p:spTree>
+  </p:cSld>
+  <p:clrMapOvr>
+    <a:masterClrMapping/>
+  </p:clrMapOvr>
+</p:sld>
+</file>
+
+<file path=ppt/slides/slide13.xml><?xml version="1.0" encoding="utf-8"?>
+<p:sld xmlns:a="http://schemas.openxmlformats.org/drawingml/2006/main" xmlns:r="http://schemas.openxmlformats.org/officeDocument/2006/relationships" xmlns:p="http://schemas.openxmlformats.org/presentationml/2006/main">
+  <p:cSld name="Slide 13">
+    <p:spTree>
+      <p:nvGrpSpPr>
+        <p:cNvPr id="1" name=""/>
+        <p:cNvGrpSpPr/>
+        <p:nvPr/>
+      </p:nvGrpSpPr>
+      <p:grpSpPr>
+        <a:xfrm>
+          <a:off x="0" y="0"/>
+          <a:ext cx="0" cy="0"/>
+          <a:chOff x="0" y="0"/>
+          <a:chExt cx="0" cy="0"/>
+        </a:xfrm>
+      </p:grpSpPr>
+      <p:pic>
+        <p:nvPicPr>
+          <p:cNvPr id="2" name="Image 0" descr="C:\Users\rpinedar\kiro chats\desktop-organizer\manita\tests\capturas\fotos\app-mano.jpg">    </p:cNvPr>
+          <p:cNvPicPr>
+            <a:picLocks noChangeAspect="1"/>
+          </p:cNvPicPr>
+          <p:nvPr/>
+        </p:nvPicPr>
+        <p:blipFill>
+          <a:blip r:embed="rId1"/>
+          <a:srcRect l="0" r="0" t="0" b="0"/>
+          <a:stretch/>
+        </p:blipFill>
+        <p:spPr>
+          <a:xfrm>
+            <a:off x="0" y="0"/>
+            <a:ext cx="12191695" cy="6858000"/>
+          </a:xfrm>
+          <a:prstGeom prst="rect">
+            <a:avLst/>
+          </a:prstGeom>
+        </p:spPr>
+      </p:pic>
+      <p:sp>
+        <p:nvSpPr>
+          <p:cNvPr id="3" name="Shape 0"/>
+          <p:cNvSpPr/>
+          <p:nvPr/>
+        </p:nvSpPr>
+        <p:spPr>
+          <a:xfrm>
+            <a:off x="0" y="0"/>
+            <a:ext cx="12191695" cy="6858000"/>
+          </a:xfrm>
+          <a:prstGeom prst="rect">
+            <a:avLst/>
+          </a:prstGeom>
+          <a:solidFill>
+            <a:srgbClr val="1F2544">
+              <a:alpha val="55000"/>
+            </a:srgbClr>
+          </a:solidFill>
+          <a:ln/>
+        </p:spPr>
+      </p:sp>
+      <p:sp>
+        <p:nvSpPr>
+          <p:cNvPr id="4" name="Text 1"/>
+          <p:cNvSpPr/>
+          <p:nvPr/>
+        </p:nvSpPr>
+        <p:spPr>
+          <a:xfrm>
+            <a:off x="640080" y="914400"/>
+            <a:ext cx="7315200" cy="365760"/>
+          </a:xfrm>
+          <a:prstGeom prst="rect">
+            <a:avLst/>
+          </a:prstGeom>
+          <a:noFill/>
+          <a:ln/>
+        </p:spPr>
+        <p:txBody>
+          <a:bodyPr wrap="square" rtlCol="0" anchor="ctr"/>
+          <a:lstStyle/>
+          <a:p>
+            <a:pPr indent="0" marL="0">
+              <a:buNone/>
+            </a:pPr>
+            <a:r>
+              <a:rPr lang="en-US" sz="1400" b="1" spc="200" kern="0" dirty="0">
+                <a:solidFill>
+                  <a:srgbClr val="FFB4A2"/>
+                </a:solidFill>
+              </a:rPr>
+              <a:t>SIN TIENDAS, SIN ESPERA</a:t>
+            </a:r>
+            <a:endParaRPr lang="en-US" sz="1400" dirty="0"/>
+          </a:p>
+        </p:txBody>
+      </p:sp>
+      <p:sp>
+        <p:nvSpPr>
+          <p:cNvPr id="5" name="Text 2"/>
+          <p:cNvSpPr/>
+          <p:nvPr/>
+        </p:nvSpPr>
+        <p:spPr>
+          <a:xfrm>
+            <a:off x="640080" y="1371600"/>
+            <a:ext cx="10881360" cy="914400"/>
+          </a:xfrm>
+          <a:prstGeom prst="rect">
+            <a:avLst/>
+          </a:prstGeom>
+          <a:noFill/>
+          <a:ln/>
+        </p:spPr>
+        <p:txBody>
+          <a:bodyPr wrap="square" rtlCol="0" anchor="ctr"/>
+          <a:lstStyle/>
+          <a:p>
+            <a:pPr indent="0" marL="0">
+              <a:buNone/>
+            </a:pPr>
+            <a:r>
+              <a:rPr lang="en-US" sz="3800" b="1" dirty="0">
+                <a:solidFill>
+                  <a:srgbClr val="FFFFFF"/>
+                </a:solidFill>
+              </a:rPr>
+              <a:t>Instálala en 30 segundos</a:t>
+            </a:r>
+            <a:endParaRPr lang="en-US" sz="3800" dirty="0"/>
+          </a:p>
+        </p:txBody>
+      </p:sp>
+      <p:sp>
+        <p:nvSpPr>
+          <p:cNvPr id="6" name="Shape 3"/>
+          <p:cNvSpPr/>
+          <p:nvPr/>
+        </p:nvSpPr>
+        <p:spPr>
+          <a:xfrm>
+            <a:off x="640080" y="2834640"/>
+            <a:ext cx="2606040" cy="2194560"/>
+          </a:xfrm>
+          <a:prstGeom prst="roundRect">
+            <a:avLst>
+              <a:gd name="adj" fmla="val 6250"/>
+            </a:avLst>
+          </a:prstGeom>
+          <a:solidFill>
+            <a:srgbClr val="FFFFFF">
+              <a:alpha val="92000"/>
+            </a:srgbClr>
+          </a:solidFill>
+          <a:ln/>
+        </p:spPr>
+      </p:sp>
+      <p:sp>
+        <p:nvSpPr>
+          <p:cNvPr id="7" name="Text 4"/>
+          <p:cNvSpPr/>
+          <p:nvPr/>
+        </p:nvSpPr>
+        <p:spPr>
+          <a:xfrm>
+            <a:off x="640080" y="3063240"/>
+            <a:ext cx="2606040" cy="822960"/>
+          </a:xfrm>
+          <a:prstGeom prst="rect">
+            <a:avLst/>
+          </a:prstGeom>
+          <a:noFill/>
+          <a:ln/>
+        </p:spPr>
+        <p:txBody>
+          <a:bodyPr wrap="square" rtlCol="0" anchor="ctr"/>
+          <a:lstStyle/>
+          <a:p>
+            <a:pPr algn="ctr" indent="0" marL="0">
+              <a:buNone/>
+            </a:pPr>
+            <a:r>
+              <a:rPr lang="en-US" sz="3600" dirty="0">
+                <a:solidFill>
+                  <a:srgbClr val="000000"/>
+                </a:solidFill>
+              </a:rPr>
+              <a:t>📲</a:t>
+            </a:r>
+            <a:endParaRPr lang="en-US" sz="3600" dirty="0"/>
+          </a:p>
+        </p:txBody>
+      </p:sp>
+      <p:sp>
+        <p:nvSpPr>
+          <p:cNvPr id="8" name="Text 5"/>
+          <p:cNvSpPr/>
+          <p:nvPr/>
+        </p:nvSpPr>
+        <p:spPr>
+          <a:xfrm>
+            <a:off x="777240" y="3977640"/>
+            <a:ext cx="2331720" cy="457200"/>
+          </a:xfrm>
+          <a:prstGeom prst="rect">
+            <a:avLst/>
+          </a:prstGeom>
+          <a:noFill/>
+          <a:ln/>
+        </p:spPr>
+        <p:txBody>
+          <a:bodyPr wrap="square" rtlCol="0" anchor="ctr"/>
+          <a:lstStyle/>
+          <a:p>
+            <a:pPr algn="ctr" indent="0" marL="0">
+              <a:buNone/>
+            </a:pPr>
+            <a:r>
+              <a:rPr lang="en-US" sz="1700" b="1" dirty="0">
+                <a:solidFill>
+                  <a:srgbClr val="2D3E75"/>
+                </a:solidFill>
+              </a:rPr>
+              <a:t>Abre</a:t>
+            </a:r>
+            <a:endParaRPr lang="en-US" sz="1700" dirty="0"/>
+          </a:p>
+        </p:txBody>
+      </p:sp>
+      <p:sp>
+        <p:nvSpPr>
+          <p:cNvPr id="9" name="Text 6"/>
+          <p:cNvSpPr/>
+          <p:nvPr/>
+        </p:nvSpPr>
+        <p:spPr>
+          <a:xfrm>
+            <a:off x="777240" y="4434840"/>
+            <a:ext cx="2331720" cy="548640"/>
+          </a:xfrm>
+          <a:prstGeom prst="rect">
+            <a:avLst/>
+          </a:prstGeom>
+          <a:noFill/>
+          <a:ln/>
+        </p:spPr>
+        <p:txBody>
+          <a:bodyPr wrap="square" rtlCol="0" anchor="ctr"/>
+          <a:lstStyle/>
+          <a:p>
+            <a:pPr algn="ctr" indent="0" marL="0">
+              <a:buNone/>
+            </a:pPr>
+            <a:r>
+              <a:rPr lang="en-US" sz="1200" dirty="0">
+                <a:solidFill>
+                  <a:srgbClr val="565D6B"/>
+                </a:solidFill>
+              </a:rPr>
+              <a:t>manita-cdmx.netlify.app</a:t>
+            </a:r>
+            <a:endParaRPr lang="en-US" sz="1200" dirty="0"/>
+          </a:p>
+        </p:txBody>
+      </p:sp>
+      <p:sp>
+        <p:nvSpPr>
+          <p:cNvPr id="10" name="Shape 7"/>
+          <p:cNvSpPr/>
+          <p:nvPr/>
+        </p:nvSpPr>
+        <p:spPr>
+          <a:xfrm>
+            <a:off x="3429000" y="2834640"/>
+            <a:ext cx="2606040" cy="2194560"/>
+          </a:xfrm>
+          <a:prstGeom prst="roundRect">
+            <a:avLst>
+              <a:gd name="adj" fmla="val 6250"/>
+            </a:avLst>
+          </a:prstGeom>
+          <a:solidFill>
+            <a:srgbClr val="FFFFFF">
+              <a:alpha val="92000"/>
+            </a:srgbClr>
+          </a:solidFill>
+          <a:ln/>
+        </p:spPr>
+      </p:sp>
+      <p:sp>
+        <p:nvSpPr>
+          <p:cNvPr id="11" name="Text 8"/>
+          <p:cNvSpPr/>
+          <p:nvPr/>
+        </p:nvSpPr>
+        <p:spPr>
+          <a:xfrm>
+            <a:off x="3429000" y="3063240"/>
+            <a:ext cx="2606040" cy="822960"/>
+          </a:xfrm>
+          <a:prstGeom prst="rect">
+            <a:avLst/>
+          </a:prstGeom>
+          <a:noFill/>
+          <a:ln/>
+        </p:spPr>
+        <p:txBody>
+          <a:bodyPr wrap="square" rtlCol="0" anchor="ctr"/>
+          <a:lstStyle/>
+          <a:p>
+            <a:pPr algn="ctr" indent="0" marL="0">
+              <a:buNone/>
+            </a:pPr>
+            <a:r>
+              <a:rPr lang="en-US" sz="3600" dirty="0">
+                <a:solidFill>
+                  <a:srgbClr val="000000"/>
+                </a:solidFill>
+              </a:rPr>
+              <a:t>⬆️</a:t>
+            </a:r>
+            <a:endParaRPr lang="en-US" sz="3600" dirty="0"/>
+          </a:p>
+        </p:txBody>
+      </p:sp>
+      <p:sp>
+        <p:nvSpPr>
+          <p:cNvPr id="12" name="Text 9"/>
+          <p:cNvSpPr/>
+          <p:nvPr/>
+        </p:nvSpPr>
+        <p:spPr>
+          <a:xfrm>
+            <a:off x="3566160" y="3977640"/>
+            <a:ext cx="2331720" cy="457200"/>
+          </a:xfrm>
+          <a:prstGeom prst="rect">
+            <a:avLst/>
+          </a:prstGeom>
+          <a:noFill/>
+          <a:ln/>
+        </p:spPr>
+        <p:txBody>
+          <a:bodyPr wrap="square" rtlCol="0" anchor="ctr"/>
+          <a:lstStyle/>
+          <a:p>
+            <a:pPr algn="ctr" indent="0" marL="0">
+              <a:buNone/>
+            </a:pPr>
+            <a:r>
+              <a:rPr lang="en-US" sz="1700" b="1" dirty="0">
+                <a:solidFill>
+                  <a:srgbClr val="2D3E75"/>
+                </a:solidFill>
+              </a:rPr>
+              <a:t>Comparte</a:t>
+            </a:r>
+            <a:endParaRPr lang="en-US" sz="1700" dirty="0"/>
+          </a:p>
+        </p:txBody>
+      </p:sp>
+      <p:sp>
+        <p:nvSpPr>
+          <p:cNvPr id="13" name="Text 10"/>
+          <p:cNvSpPr/>
+          <p:nvPr/>
+        </p:nvSpPr>
+        <p:spPr>
+          <a:xfrm>
+            <a:off x="3566160" y="4434840"/>
+            <a:ext cx="2331720" cy="548640"/>
+          </a:xfrm>
+          <a:prstGeom prst="rect">
+            <a:avLst/>
+          </a:prstGeom>
+          <a:noFill/>
+          <a:ln/>
+        </p:spPr>
+        <p:txBody>
+          <a:bodyPr wrap="square" rtlCol="0" anchor="ctr"/>
+          <a:lstStyle/>
+          <a:p>
+            <a:pPr algn="ctr" indent="0" marL="0">
+              <a:buNone/>
+            </a:pPr>
+            <a:r>
+              <a:rPr lang="en-US" sz="1200" dirty="0">
+                <a:solidFill>
+                  <a:srgbClr val="565D6B"/>
+                </a:solidFill>
+              </a:rPr>
+              <a:t>Toca el botón compartir</a:t>
+            </a:r>
+            <a:endParaRPr lang="en-US" sz="1200" dirty="0"/>
+          </a:p>
+        </p:txBody>
+      </p:sp>
+      <p:sp>
+        <p:nvSpPr>
+          <p:cNvPr id="14" name="Shape 11"/>
+          <p:cNvSpPr/>
+          <p:nvPr/>
+        </p:nvSpPr>
+        <p:spPr>
+          <a:xfrm>
+            <a:off x="6217920" y="2834640"/>
+            <a:ext cx="2606040" cy="2194560"/>
+          </a:xfrm>
+          <a:prstGeom prst="roundRect">
+            <a:avLst>
+              <a:gd name="adj" fmla="val 6250"/>
+            </a:avLst>
+          </a:prstGeom>
+          <a:solidFill>
+            <a:srgbClr val="FFFFFF">
+              <a:alpha val="92000"/>
+            </a:srgbClr>
+          </a:solidFill>
+          <a:ln/>
+        </p:spPr>
+      </p:sp>
+      <p:sp>
+        <p:nvSpPr>
+          <p:cNvPr id="15" name="Text 12"/>
+          <p:cNvSpPr/>
+          <p:nvPr/>
+        </p:nvSpPr>
+        <p:spPr>
+          <a:xfrm>
+            <a:off x="6217920" y="3063240"/>
+            <a:ext cx="2606040" cy="822960"/>
+          </a:xfrm>
+          <a:prstGeom prst="rect">
+            <a:avLst/>
+          </a:prstGeom>
+          <a:noFill/>
+          <a:ln/>
+        </p:spPr>
+        <p:txBody>
+          <a:bodyPr wrap="square" rtlCol="0" anchor="ctr"/>
+          <a:lstStyle/>
+          <a:p>
+            <a:pPr algn="ctr" indent="0" marL="0">
+              <a:buNone/>
+            </a:pPr>
+            <a:r>
+              <a:rPr lang="en-US" sz="3600" dirty="0">
+                <a:solidFill>
+                  <a:srgbClr val="000000"/>
+                </a:solidFill>
+              </a:rPr>
+              <a:t>🏠</a:t>
+            </a:r>
+            <a:endParaRPr lang="en-US" sz="3600" dirty="0"/>
+          </a:p>
+        </p:txBody>
+      </p:sp>
+      <p:sp>
+        <p:nvSpPr>
+          <p:cNvPr id="16" name="Text 13"/>
+          <p:cNvSpPr/>
+          <p:nvPr/>
+        </p:nvSpPr>
+        <p:spPr>
+          <a:xfrm>
+            <a:off x="6355080" y="3977640"/>
+            <a:ext cx="2331720" cy="457200"/>
+          </a:xfrm>
+          <a:prstGeom prst="rect">
+            <a:avLst/>
+          </a:prstGeom>
+          <a:noFill/>
+          <a:ln/>
+        </p:spPr>
+        <p:txBody>
+          <a:bodyPr wrap="square" rtlCol="0" anchor="ctr"/>
+          <a:lstStyle/>
+          <a:p>
+            <a:pPr algn="ctr" indent="0" marL="0">
+              <a:buNone/>
+            </a:pPr>
+            <a:r>
+              <a:rPr lang="en-US" sz="1700" b="1" dirty="0">
+                <a:solidFill>
+                  <a:srgbClr val="2D3E75"/>
+                </a:solidFill>
+              </a:rPr>
+              <a:t>Agrega</a:t>
+            </a:r>
+            <a:endParaRPr lang="en-US" sz="1700" dirty="0"/>
+          </a:p>
+        </p:txBody>
+      </p:sp>
+      <p:sp>
+        <p:nvSpPr>
+          <p:cNvPr id="17" name="Text 14"/>
+          <p:cNvSpPr/>
+          <p:nvPr/>
+        </p:nvSpPr>
+        <p:spPr>
+          <a:xfrm>
+            <a:off x="6355080" y="4434840"/>
+            <a:ext cx="2331720" cy="548640"/>
+          </a:xfrm>
+          <a:prstGeom prst="rect">
+            <a:avLst/>
+          </a:prstGeom>
+          <a:noFill/>
+          <a:ln/>
+        </p:spPr>
+        <p:txBody>
+          <a:bodyPr wrap="square" rtlCol="0" anchor="ctr"/>
+          <a:lstStyle/>
+          <a:p>
+            <a:pPr algn="ctr" indent="0" marL="0">
+              <a:buNone/>
+            </a:pPr>
+            <a:r>
+              <a:rPr lang="en-US" sz="1200" dirty="0">
+                <a:solidFill>
+                  <a:srgbClr val="565D6B"/>
+                </a:solidFill>
+              </a:rPr>
+              <a:t>"A pantalla de inicio"</a:t>
+            </a:r>
+            <a:endParaRPr lang="en-US" sz="1200" dirty="0"/>
+          </a:p>
+        </p:txBody>
+      </p:sp>
+      <p:sp>
+        <p:nvSpPr>
+          <p:cNvPr id="18" name="Shape 15"/>
+          <p:cNvSpPr/>
+          <p:nvPr/>
+        </p:nvSpPr>
+        <p:spPr>
+          <a:xfrm>
+            <a:off x="9006840" y="2834640"/>
+            <a:ext cx="2606040" cy="2194560"/>
+          </a:xfrm>
+          <a:prstGeom prst="roundRect">
+            <a:avLst>
+              <a:gd name="adj" fmla="val 6250"/>
+            </a:avLst>
+          </a:prstGeom>
+          <a:solidFill>
+            <a:srgbClr val="FFFFFF">
+              <a:alpha val="92000"/>
+            </a:srgbClr>
+          </a:solidFill>
+          <a:ln/>
+        </p:spPr>
+      </p:sp>
+      <p:sp>
+        <p:nvSpPr>
+          <p:cNvPr id="19" name="Text 16"/>
+          <p:cNvSpPr/>
+          <p:nvPr/>
+        </p:nvSpPr>
+        <p:spPr>
+          <a:xfrm>
+            <a:off x="9006840" y="3063240"/>
+            <a:ext cx="2606040" cy="822960"/>
+          </a:xfrm>
+          <a:prstGeom prst="rect">
+            <a:avLst/>
+          </a:prstGeom>
+          <a:noFill/>
+          <a:ln/>
+        </p:spPr>
+        <p:txBody>
+          <a:bodyPr wrap="square" rtlCol="0" anchor="ctr"/>
+          <a:lstStyle/>
+          <a:p>
+            <a:pPr algn="ctr" indent="0" marL="0">
+              <a:buNone/>
+            </a:pPr>
+            <a:r>
+              <a:rPr lang="en-US" sz="3600" dirty="0">
+                <a:solidFill>
+                  <a:srgbClr val="000000"/>
+                </a:solidFill>
+              </a:rPr>
+              <a:t>🎉</a:t>
+            </a:r>
+            <a:endParaRPr lang="en-US" sz="3600" dirty="0"/>
+          </a:p>
+        </p:txBody>
+      </p:sp>
+      <p:sp>
+        <p:nvSpPr>
+          <p:cNvPr id="20" name="Text 17"/>
+          <p:cNvSpPr/>
+          <p:nvPr/>
+        </p:nvSpPr>
+        <p:spPr>
+          <a:xfrm>
+            <a:off x="9144000" y="3977640"/>
+            <a:ext cx="2331720" cy="457200"/>
+          </a:xfrm>
+          <a:prstGeom prst="rect">
+            <a:avLst/>
+          </a:prstGeom>
+          <a:noFill/>
+          <a:ln/>
+        </p:spPr>
+        <p:txBody>
+          <a:bodyPr wrap="square" rtlCol="0" anchor="ctr"/>
+          <a:lstStyle/>
+          <a:p>
+            <a:pPr algn="ctr" indent="0" marL="0">
+              <a:buNone/>
+            </a:pPr>
+            <a:r>
+              <a:rPr lang="en-US" sz="1700" b="1" dirty="0">
+                <a:solidFill>
+                  <a:srgbClr val="2D3E75"/>
+                </a:solidFill>
+              </a:rPr>
+              <a:t>Listo</a:t>
+            </a:r>
+            <a:endParaRPr lang="en-US" sz="1700" dirty="0"/>
+          </a:p>
+        </p:txBody>
+      </p:sp>
+      <p:sp>
+        <p:nvSpPr>
+          <p:cNvPr id="21" name="Text 18"/>
+          <p:cNvSpPr/>
+          <p:nvPr/>
+        </p:nvSpPr>
+        <p:spPr>
+          <a:xfrm>
+            <a:off x="9144000" y="4434840"/>
+            <a:ext cx="2331720" cy="548640"/>
+          </a:xfrm>
+          <a:prstGeom prst="rect">
+            <a:avLst/>
+          </a:prstGeom>
+          <a:noFill/>
+          <a:ln/>
+        </p:spPr>
+        <p:txBody>
+          <a:bodyPr wrap="square" rtlCol="0" anchor="ctr"/>
+          <a:lstStyle/>
+          <a:p>
+            <a:pPr algn="ctr" indent="0" marL="0">
+              <a:buNone/>
+            </a:pPr>
+            <a:r>
+              <a:rPr lang="en-US" sz="1200" dirty="0">
+                <a:solidFill>
+                  <a:srgbClr val="565D6B"/>
+                </a:solidFill>
+              </a:rPr>
+              <a:t>Ya tienes la app</a:t>
+            </a:r>
+            <a:endParaRPr lang="en-US" sz="1200" dirty="0"/>
+          </a:p>
+        </p:txBody>
+      </p:sp>
+      <p:sp>
+        <p:nvSpPr>
+          <p:cNvPr id="22" name="Text 19"/>
+          <p:cNvSpPr/>
+          <p:nvPr/>
+        </p:nvSpPr>
+        <p:spPr>
+          <a:xfrm>
+            <a:off x="640080" y="5394960"/>
+            <a:ext cx="10881360" cy="457200"/>
+          </a:xfrm>
+          <a:prstGeom prst="rect">
+            <a:avLst/>
+          </a:prstGeom>
+          <a:noFill/>
+          <a:ln/>
+        </p:spPr>
+        <p:txBody>
+          <a:bodyPr wrap="square" rtlCol="0" anchor="ctr"/>
+          <a:lstStyle/>
+          <a:p>
+            <a:pPr algn="ctr" indent="0" marL="0">
+              <a:buNone/>
+            </a:pPr>
+            <a:r>
+              <a:rPr lang="en-US" sz="1600" b="1" dirty="0">
+                <a:solidFill>
+                  <a:srgbClr val="FFFFFF"/>
+                </a:solidFill>
+              </a:rPr>
+              <a:t>Funciona en Android y iPhone, gratis y sin App Store.</a:t>
+            </a:r>
+            <a:endParaRPr lang="en-US" sz="1600" dirty="0"/>
+          </a:p>
+        </p:txBody>
+      </p:sp>
+    </p:spTree>
+  </p:cSld>
+  <p:clrMapOvr>
+    <a:masterClrMapping/>
+  </p:clrMapOvr>
+</p:sld>
+</file>
+
+<file path=ppt/slides/slide14.xml><?xml version="1.0" encoding="utf-8"?>
+<p:sld xmlns:a="http://schemas.openxmlformats.org/drawingml/2006/main" xmlns:r="http://schemas.openxmlformats.org/officeDocument/2006/relationships" xmlns:p="http://schemas.openxmlformats.org/presentationml/2006/main">
+  <p:cSld name="Slide 14">
+    <p:bg>
+      <p:bgPr>
+        <a:solidFill>
+          <a:srgbClr val="2D3E75"/>
+        </a:solidFill>
+      </p:bgPr>
+    </p:bg>
+    <p:spTree>
+      <p:nvGrpSpPr>
+        <p:cNvPr id="1" name=""/>
+        <p:cNvGrpSpPr/>
+        <p:nvPr/>
+      </p:nvGrpSpPr>
+      <p:grpSpPr>
+        <a:xfrm>
+          <a:off x="0" y="0"/>
+          <a:ext cx="0" cy="0"/>
+          <a:chOff x="0" y="0"/>
+          <a:chExt cx="0" cy="0"/>
+        </a:xfrm>
+      </p:grpSpPr>
+      <p:sp>
+        <p:nvSpPr>
+          <p:cNvPr id="2" name="Text 0"/>
+          <p:cNvSpPr/>
+          <p:nvPr/>
+        </p:nvSpPr>
+        <p:spPr>
+          <a:xfrm>
+            <a:off x="640080" y="1097280"/>
+            <a:ext cx="1828800" cy="1371600"/>
+          </a:xfrm>
+          <a:prstGeom prst="rect">
+            <a:avLst/>
+          </a:prstGeom>
+          <a:noFill/>
+          <a:ln/>
+        </p:spPr>
+        <p:txBody>
+          <a:bodyPr wrap="square" rtlCol="0" anchor="ctr"/>
+          <a:lstStyle/>
+          <a:p>
+            <a:pPr indent="0" marL="0">
+              <a:buNone/>
+            </a:pPr>
+            <a:r>
+              <a:rPr lang="en-US" sz="10000" b="1" dirty="0">
+                <a:solidFill>
+                  <a:srgbClr val="FF6B4A"/>
+                </a:solidFill>
+              </a:rPr>
+              <a:t>“</a:t>
+            </a:r>
+            <a:endParaRPr lang="en-US" sz="10000" dirty="0"/>
+          </a:p>
+        </p:txBody>
+      </p:sp>
+      <p:sp>
+        <p:nvSpPr>
+          <p:cNvPr id="3" name="Text 1"/>
+          <p:cNvSpPr/>
+          <p:nvPr/>
+        </p:nvSpPr>
+        <p:spPr>
+          <a:xfrm>
+            <a:off x="1371600" y="2377440"/>
+            <a:ext cx="9601200" cy="1645920"/>
+          </a:xfrm>
+          <a:prstGeom prst="rect">
+            <a:avLst/>
+          </a:prstGeom>
+          <a:noFill/>
+          <a:ln/>
+        </p:spPr>
+        <p:txBody>
+          <a:bodyPr wrap="square" rtlCol="0" anchor="ctr"/>
+          <a:lstStyle/>
+          <a:p>
+            <a:pPr indent="0" marL="0">
+              <a:lnSpc>
+                <a:spcPct val="110000"/>
+              </a:lnSpc>
+              <a:buNone/>
+            </a:pPr>
+            <a:r>
+              <a:rPr lang="en-US" sz="3000" b="1" i="1" dirty="0">
+                <a:solidFill>
+                  <a:srgbClr val="FFFFFF"/>
+                </a:solidFill>
+              </a:rPr>
+              <a:t>Que en CDMX contratar ayuda de confianza</a:t>
+            </a:r>
+            <a:endParaRPr lang="en-US" sz="3000" dirty="0"/>
+          </a:p>
+          <a:p>
+            <a:pPr indent="0" marL="0">
+              <a:lnSpc>
+                <a:spcPct val="110000"/>
+              </a:lnSpc>
+              <a:buNone/>
+            </a:pPr>
+            <a:r>
+              <a:rPr lang="en-US" sz="3000" b="1" i="1" dirty="0">
+                <a:solidFill>
+                  <a:srgbClr val="FFFFFF"/>
+                </a:solidFill>
+              </a:rPr>
+              <a:t>sea tan simple como pedir un taxi.</a:t>
+            </a:r>
+            <a:endParaRPr lang="en-US" sz="3000" dirty="0"/>
+          </a:p>
+        </p:txBody>
+      </p:sp>
+      <p:sp>
+        <p:nvSpPr>
+          <p:cNvPr id="4" name="Text 2"/>
+          <p:cNvSpPr/>
+          <p:nvPr/>
+        </p:nvSpPr>
+        <p:spPr>
+          <a:xfrm>
+            <a:off x="1371600" y="4206240"/>
+            <a:ext cx="9144000" cy="457200"/>
+          </a:xfrm>
+          <a:prstGeom prst="rect">
+            <a:avLst/>
+          </a:prstGeom>
+          <a:noFill/>
+          <a:ln/>
+        </p:spPr>
+        <p:txBody>
+          <a:bodyPr wrap="square" rtlCol="0" anchor="ctr"/>
+          <a:lstStyle/>
+          <a:p>
+            <a:pPr indent="0" marL="0">
+              <a:buNone/>
+            </a:pPr>
+            <a:r>
+              <a:rPr lang="en-US" sz="1600" dirty="0">
+                <a:solidFill>
+                  <a:srgbClr val="FFB4A2"/>
+                </a:solidFill>
+              </a:rPr>
+              <a:t>— La visión de Manita</a:t>
+            </a:r>
+            <a:endParaRPr lang="en-US" sz="1600" dirty="0"/>
+          </a:p>
+        </p:txBody>
+      </p:sp>
+    </p:spTree>
+  </p:cSld>
+  <p:clrMapOvr>
+    <a:masterClrMapping/>
+  </p:clrMapOvr>
+</p:sld>
+</file>
+
+<file path=ppt/slides/slide15.xml><?xml version="1.0" encoding="utf-8"?>
+<p:sld xmlns:a="http://schemas.openxmlformats.org/drawingml/2006/main" xmlns:r="http://schemas.openxmlformats.org/officeDocument/2006/relationships" xmlns:p="http://schemas.openxmlformats.org/presentationml/2006/main">
+  <p:cSld name="Slide 15">
     <p:spTree>
       <p:nvGrpSpPr>
         <p:cNvPr id="1" name=""/>
@@ -3619,7 +4948,7 @@
         </p:nvSpPr>
         <p:spPr>
           <a:xfrm>
-            <a:off x="640080" y="457200"/>
+            <a:off x="640080" y="411480"/>
             <a:ext cx="7315200" cy="365760"/>
           </a:xfrm>
           <a:prstGeom prst="rect">
@@ -3655,8 +4984,8 @@
         </p:nvSpPr>
         <p:spPr>
           <a:xfrm>
-            <a:off x="640080" y="868680"/>
-            <a:ext cx="10881360" cy="822960"/>
+            <a:off x="640080" y="822960"/>
+            <a:ext cx="10881360" cy="731520"/>
           </a:xfrm>
           <a:prstGeom prst="rect">
             <a:avLst/>
@@ -3672,14 +5001,14 @@
               <a:buNone/>
             </a:pPr>
             <a:r>
-              <a:rPr lang="en-US" sz="3000" b="1" dirty="0">
+              <a:rPr lang="en-US" sz="2800" b="1" dirty="0">
                 <a:solidFill>
                   <a:srgbClr val="2D3E75"/>
                 </a:solidFill>
               </a:rPr>
               <a:t>Casi cualquier servicio, a domicilio</a:t>
             </a:r>
-            <a:endParaRPr lang="en-US" sz="3000" dirty="0"/>
+            <a:endParaRPr lang="en-US" sz="2800" dirty="0"/>
           </a:p>
         </p:txBody>
       </p:sp>
@@ -3698,8 +5027,8 @@
         </p:blipFill>
         <p:spPr>
           <a:xfrm>
-            <a:off x="548640" y="1920240"/>
-            <a:ext cx="2651760" cy="1554480"/>
+            <a:off x="548640" y="1691640"/>
+            <a:ext cx="2651760" cy="1143000"/>
           </a:xfrm>
           <a:prstGeom prst="ellipse">
             <a:avLst/>
@@ -3714,8 +5043,8 @@
         </p:nvSpPr>
         <p:spPr>
           <a:xfrm>
-            <a:off x="548640" y="3493008"/>
-            <a:ext cx="2651760" cy="365760"/>
+            <a:off x="548640" y="2852928"/>
+            <a:ext cx="2651760" cy="320040"/>
           </a:xfrm>
           <a:prstGeom prst="rect">
             <a:avLst/>
@@ -3731,14 +5060,14 @@
               <a:buNone/>
             </a:pPr>
             <a:r>
-              <a:rPr lang="en-US" sz="1300" b="1" dirty="0">
+              <a:rPr lang="en-US" sz="1200" b="1" dirty="0">
                 <a:solidFill>
                   <a:srgbClr val="2D3E75"/>
                 </a:solidFill>
               </a:rPr>
               <a:t>Limpieza</a:t>
             </a:r>
-            <a:endParaRPr lang="en-US" sz="1300" dirty="0"/>
+            <a:endParaRPr lang="en-US" sz="1200" dirty="0"/>
           </a:p>
         </p:txBody>
       </p:sp>
@@ -3757,8 +5086,8 @@
         </p:blipFill>
         <p:spPr>
           <a:xfrm>
-            <a:off x="3364992" y="1920240"/>
-            <a:ext cx="2651760" cy="1554480"/>
+            <a:off x="3364992" y="1691640"/>
+            <a:ext cx="2651760" cy="1143000"/>
           </a:xfrm>
           <a:prstGeom prst="ellipse">
             <a:avLst/>
@@ -3773,8 +5102,8 @@
         </p:nvSpPr>
         <p:spPr>
           <a:xfrm>
-            <a:off x="3364992" y="3493008"/>
-            <a:ext cx="2651760" cy="365760"/>
+            <a:off x="3364992" y="2852928"/>
+            <a:ext cx="2651760" cy="320040"/>
           </a:xfrm>
           <a:prstGeom prst="rect">
             <a:avLst/>
@@ -3790,14 +5119,14 @@
               <a:buNone/>
             </a:pPr>
             <a:r>
-              <a:rPr lang="en-US" sz="1300" b="1" dirty="0">
+              <a:rPr lang="en-US" sz="1200" b="1" dirty="0">
                 <a:solidFill>
                   <a:srgbClr val="2D3E75"/>
                 </a:solidFill>
               </a:rPr>
               <a:t>Plomería</a:t>
             </a:r>
-            <a:endParaRPr lang="en-US" sz="1300" dirty="0"/>
+            <a:endParaRPr lang="en-US" sz="1200" dirty="0"/>
           </a:p>
         </p:txBody>
       </p:sp>
@@ -3816,8 +5145,8 @@
         </p:blipFill>
         <p:spPr>
           <a:xfrm>
-            <a:off x="6181344" y="1920240"/>
-            <a:ext cx="2651760" cy="1554480"/>
+            <a:off x="6181344" y="1691640"/>
+            <a:ext cx="2651760" cy="1143000"/>
           </a:xfrm>
           <a:prstGeom prst="ellipse">
             <a:avLst/>
@@ -3832,8 +5161,8 @@
         </p:nvSpPr>
         <p:spPr>
           <a:xfrm>
-            <a:off x="6181344" y="3493008"/>
-            <a:ext cx="2651760" cy="365760"/>
+            <a:off x="6181344" y="2852928"/>
+            <a:ext cx="2651760" cy="320040"/>
           </a:xfrm>
           <a:prstGeom prst="rect">
             <a:avLst/>
@@ -3849,14 +5178,14 @@
               <a:buNone/>
             </a:pPr>
             <a:r>
-              <a:rPr lang="en-US" sz="1300" b="1" dirty="0">
+              <a:rPr lang="en-US" sz="1200" b="1" dirty="0">
                 <a:solidFill>
                   <a:srgbClr val="2D3E75"/>
                 </a:solidFill>
               </a:rPr>
               <a:t>Electricidad</a:t>
             </a:r>
-            <a:endParaRPr lang="en-US" sz="1300" dirty="0"/>
+            <a:endParaRPr lang="en-US" sz="1200" dirty="0"/>
           </a:p>
         </p:txBody>
       </p:sp>
@@ -3875,8 +5204,8 @@
         </p:blipFill>
         <p:spPr>
           <a:xfrm>
-            <a:off x="8997696" y="1920240"/>
-            <a:ext cx="2651760" cy="1554480"/>
+            <a:off x="8997696" y="1691640"/>
+            <a:ext cx="2651760" cy="1143000"/>
           </a:xfrm>
           <a:prstGeom prst="ellipse">
             <a:avLst/>
@@ -3891,8 +5220,8 @@
         </p:nvSpPr>
         <p:spPr>
           <a:xfrm>
-            <a:off x="8997696" y="3493008"/>
-            <a:ext cx="2651760" cy="365760"/>
+            <a:off x="8997696" y="2852928"/>
+            <a:ext cx="2651760" cy="320040"/>
           </a:xfrm>
           <a:prstGeom prst="rect">
             <a:avLst/>
@@ -3908,14 +5237,14 @@
               <a:buNone/>
             </a:pPr>
             <a:r>
-              <a:rPr lang="en-US" sz="1300" b="1" dirty="0">
+              <a:rPr lang="en-US" sz="1200" b="1" dirty="0">
                 <a:solidFill>
                   <a:srgbClr val="2D3E75"/>
                 </a:solidFill>
               </a:rPr>
               <a:t>Manitas / Hogar</a:t>
             </a:r>
-            <a:endParaRPr lang="en-US" sz="1300" dirty="0"/>
+            <a:endParaRPr lang="en-US" sz="1200" dirty="0"/>
           </a:p>
         </p:txBody>
       </p:sp>
@@ -3934,8 +5263,8 @@
         </p:blipFill>
         <p:spPr>
           <a:xfrm>
-            <a:off x="548640" y="4069080"/>
-            <a:ext cx="2651760" cy="1554480"/>
+            <a:off x="548640" y="3291840"/>
+            <a:ext cx="2651760" cy="1143000"/>
           </a:xfrm>
           <a:prstGeom prst="ellipse">
             <a:avLst/>
@@ -3950,8 +5279,8 @@
         </p:nvSpPr>
         <p:spPr>
           <a:xfrm>
-            <a:off x="548640" y="5641848"/>
-            <a:ext cx="2651760" cy="365760"/>
+            <a:off x="548640" y="4453128"/>
+            <a:ext cx="2651760" cy="320040"/>
           </a:xfrm>
           <a:prstGeom prst="rect">
             <a:avLst/>
@@ -3967,20 +5296,20 @@
               <a:buNone/>
             </a:pPr>
             <a:r>
-              <a:rPr lang="en-US" sz="1300" b="1" dirty="0">
+              <a:rPr lang="en-US" sz="1200" b="1" dirty="0">
                 <a:solidFill>
                   <a:srgbClr val="2D3E75"/>
                 </a:solidFill>
               </a:rPr>
               <a:t>Clases de piano</a:t>
             </a:r>
-            <a:endParaRPr lang="en-US" sz="1300" dirty="0"/>
+            <a:endParaRPr lang="en-US" sz="1200" dirty="0"/>
           </a:p>
         </p:txBody>
       </p:sp>
       <p:pic>
         <p:nvPicPr>
-          <p:cNvPr id="15" name="Image 5" descr="C:\Users\rpinedar\kiro chats\desktop-organizer\manita\tests\capturas\fotos\patinaje.jpg">    </p:cNvPr>
+          <p:cNvPr id="15" name="Image 5" descr="C:\Users\rpinedar\kiro chats\desktop-organizer\manita\tests\capturas\fotos\rollers.jpg">    </p:cNvPr>
           <p:cNvPicPr>
             <a:picLocks noChangeAspect="1"/>
           </p:cNvPicPr>
@@ -3993,8 +5322,8 @@
         </p:blipFill>
         <p:spPr>
           <a:xfrm>
-            <a:off x="3364992" y="4069080"/>
-            <a:ext cx="2651760" cy="1554480"/>
+            <a:off x="3364992" y="3291840"/>
+            <a:ext cx="2651760" cy="1143000"/>
           </a:xfrm>
           <a:prstGeom prst="ellipse">
             <a:avLst/>
@@ -4009,8 +5338,8 @@
         </p:nvSpPr>
         <p:spPr>
           <a:xfrm>
-            <a:off x="3364992" y="5641848"/>
-            <a:ext cx="2651760" cy="365760"/>
+            <a:off x="3364992" y="4453128"/>
+            <a:ext cx="2651760" cy="320040"/>
           </a:xfrm>
           <a:prstGeom prst="rect">
             <a:avLst/>
@@ -4026,20 +5355,20 @@
               <a:buNone/>
             </a:pPr>
             <a:r>
-              <a:rPr lang="en-US" sz="1300" b="1" dirty="0">
+              <a:rPr lang="en-US" sz="1200" b="1" dirty="0">
                 <a:solidFill>
                   <a:srgbClr val="2D3E75"/>
                 </a:solidFill>
               </a:rPr>
-              <a:t>Clases de patinaje</a:t>
-            </a:r>
-            <a:endParaRPr lang="en-US" sz="1300" dirty="0"/>
+              <a:t>Patinaje / Rollers</a:t>
+            </a:r>
+            <a:endParaRPr lang="en-US" sz="1200" dirty="0"/>
           </a:p>
         </p:txBody>
       </p:sp>
       <p:pic>
         <p:nvPicPr>
-          <p:cNvPr id="17" name="Image 6" descr="C:\Users\rpinedar\kiro chats\desktop-organizer\manita\tests\capturas\fotos\belleza.jpg">    </p:cNvPr>
+          <p:cNvPr id="17" name="Image 6" descr="C:\Users\rpinedar\kiro chats\desktop-organizer\manita\tests\capturas\fotos\guitarra.jpg">    </p:cNvPr>
           <p:cNvPicPr>
             <a:picLocks noChangeAspect="1"/>
           </p:cNvPicPr>
@@ -4052,8 +5381,8 @@
         </p:blipFill>
         <p:spPr>
           <a:xfrm>
-            <a:off x="6181344" y="4069080"/>
-            <a:ext cx="2651760" cy="1554480"/>
+            <a:off x="6181344" y="3291840"/>
+            <a:ext cx="2651760" cy="1143000"/>
           </a:xfrm>
           <a:prstGeom prst="ellipse">
             <a:avLst/>
@@ -4068,8 +5397,8 @@
         </p:nvSpPr>
         <p:spPr>
           <a:xfrm>
-            <a:off x="6181344" y="5641848"/>
-            <a:ext cx="2651760" cy="365760"/>
+            <a:off x="6181344" y="4453128"/>
+            <a:ext cx="2651760" cy="320040"/>
           </a:xfrm>
           <a:prstGeom prst="rect">
             <a:avLst/>
@@ -4085,20 +5414,20 @@
               <a:buNone/>
             </a:pPr>
             <a:r>
-              <a:rPr lang="en-US" sz="1300" b="1" dirty="0">
+              <a:rPr lang="en-US" sz="1200" b="1" dirty="0">
                 <a:solidFill>
                   <a:srgbClr val="2D3E75"/>
                 </a:solidFill>
               </a:rPr>
-              <a:t>Belleza y estética</a:t>
-            </a:r>
-            <a:endParaRPr lang="en-US" sz="1300" dirty="0"/>
+              <a:t>Clases de guitarra</a:t>
+            </a:r>
+            <a:endParaRPr lang="en-US" sz="1200" dirty="0"/>
           </a:p>
         </p:txBody>
       </p:sp>
       <p:pic>
         <p:nvPicPr>
-          <p:cNvPr id="19" name="Image 7" descr="C:\Users\rpinedar\kiro chats\desktop-organizer\manita\tests\capturas\fotos\mascotas.jpg">    </p:cNvPr>
+          <p:cNvPr id="19" name="Image 7" descr="C:\Users\rpinedar\kiro chats\desktop-organizer\manita\tests\capturas\fotos\belleza.jpg">    </p:cNvPr>
           <p:cNvPicPr>
             <a:picLocks noChangeAspect="1"/>
           </p:cNvPicPr>
@@ -4111,8 +5440,8 @@
         </p:blipFill>
         <p:spPr>
           <a:xfrm>
-            <a:off x="8997696" y="4069080"/>
-            <a:ext cx="2651760" cy="1554480"/>
+            <a:off x="8997696" y="3291840"/>
+            <a:ext cx="2651760" cy="1143000"/>
           </a:xfrm>
           <a:prstGeom prst="ellipse">
             <a:avLst/>
@@ -4127,8 +5456,8 @@
         </p:nvSpPr>
         <p:spPr>
           <a:xfrm>
-            <a:off x="8997696" y="5641848"/>
-            <a:ext cx="2651760" cy="365760"/>
+            <a:off x="8997696" y="4453128"/>
+            <a:ext cx="2651760" cy="320040"/>
           </a:xfrm>
           <a:prstGeom prst="rect">
             <a:avLst/>
@@ -4144,14 +5473,250 @@
               <a:buNone/>
             </a:pPr>
             <a:r>
-              <a:rPr lang="en-US" sz="1300" b="1" dirty="0">
+              <a:rPr lang="en-US" sz="1200" b="1" dirty="0">
                 <a:solidFill>
                   <a:srgbClr val="2D3E75"/>
                 </a:solidFill>
               </a:rPr>
+              <a:t>Belleza</a:t>
+            </a:r>
+            <a:endParaRPr lang="en-US" sz="1200" dirty="0"/>
+          </a:p>
+        </p:txBody>
+      </p:sp>
+      <p:pic>
+        <p:nvPicPr>
+          <p:cNvPr id="21" name="Image 8" descr="C:\Users\rpinedar\kiro chats\desktop-organizer\manita\tests\capturas\fotos\mascotas.jpg">    </p:cNvPr>
+          <p:cNvPicPr>
+            <a:picLocks noChangeAspect="1"/>
+          </p:cNvPicPr>
+          <p:nvPr/>
+        </p:nvPicPr>
+        <p:blipFill>
+          <a:blip r:embed="rId9"/>
+          <a:srcRect l="0" r="0" t="0" b="0"/>
+          <a:stretch/>
+        </p:blipFill>
+        <p:spPr>
+          <a:xfrm>
+            <a:off x="548640" y="4892040"/>
+            <a:ext cx="2651760" cy="1143000"/>
+          </a:xfrm>
+          <a:prstGeom prst="ellipse">
+            <a:avLst/>
+          </a:prstGeom>
+        </p:spPr>
+      </p:pic>
+      <p:sp>
+        <p:nvSpPr>
+          <p:cNvPr id="22" name="Text 11"/>
+          <p:cNvSpPr/>
+          <p:nvPr/>
+        </p:nvSpPr>
+        <p:spPr>
+          <a:xfrm>
+            <a:off x="548640" y="6053328"/>
+            <a:ext cx="2651760" cy="320040"/>
+          </a:xfrm>
+          <a:prstGeom prst="rect">
+            <a:avLst/>
+          </a:prstGeom>
+          <a:noFill/>
+          <a:ln/>
+        </p:spPr>
+        <p:txBody>
+          <a:bodyPr wrap="square" rtlCol="0" anchor="ctr"/>
+          <a:lstStyle/>
+          <a:p>
+            <a:pPr algn="ctr" indent="0" marL="0">
+              <a:buNone/>
+            </a:pPr>
+            <a:r>
+              <a:rPr lang="en-US" sz="1200" b="1" dirty="0">
+                <a:solidFill>
+                  <a:srgbClr val="2D3E75"/>
+                </a:solidFill>
+              </a:rPr>
               <a:t>Paseo de mascotas</a:t>
             </a:r>
-            <a:endParaRPr lang="en-US" sz="1300" dirty="0"/>
+            <a:endParaRPr lang="en-US" sz="1200" dirty="0"/>
+          </a:p>
+        </p:txBody>
+      </p:sp>
+      <p:pic>
+        <p:nvPicPr>
+          <p:cNvPr id="23" name="Image 9" descr="C:\Users\rpinedar\kiro chats\desktop-organizer\manita\tests\capturas\fotos\ninos.jpg">    </p:cNvPr>
+          <p:cNvPicPr>
+            <a:picLocks noChangeAspect="1"/>
+          </p:cNvPicPr>
+          <p:nvPr/>
+        </p:nvPicPr>
+        <p:blipFill>
+          <a:blip r:embed="rId10"/>
+          <a:srcRect l="0" r="0" t="0" b="0"/>
+          <a:stretch/>
+        </p:blipFill>
+        <p:spPr>
+          <a:xfrm>
+            <a:off x="3364992" y="4892040"/>
+            <a:ext cx="2651760" cy="1143000"/>
+          </a:xfrm>
+          <a:prstGeom prst="ellipse">
+            <a:avLst/>
+          </a:prstGeom>
+        </p:spPr>
+      </p:pic>
+      <p:sp>
+        <p:nvSpPr>
+          <p:cNvPr id="24" name="Text 12"/>
+          <p:cNvSpPr/>
+          <p:nvPr/>
+        </p:nvSpPr>
+        <p:spPr>
+          <a:xfrm>
+            <a:off x="3364992" y="6053328"/>
+            <a:ext cx="2651760" cy="320040"/>
+          </a:xfrm>
+          <a:prstGeom prst="rect">
+            <a:avLst/>
+          </a:prstGeom>
+          <a:noFill/>
+          <a:ln/>
+        </p:spPr>
+        <p:txBody>
+          <a:bodyPr wrap="square" rtlCol="0" anchor="ctr"/>
+          <a:lstStyle/>
+          <a:p>
+            <a:pPr algn="ctr" indent="0" marL="0">
+              <a:buNone/>
+            </a:pPr>
+            <a:r>
+              <a:rPr lang="en-US" sz="1200" b="1" dirty="0">
+                <a:solidFill>
+                  <a:srgbClr val="2D3E75"/>
+                </a:solidFill>
+              </a:rPr>
+              <a:t>Cuidado de niños</a:t>
+            </a:r>
+            <a:endParaRPr lang="en-US" sz="1200" dirty="0"/>
+          </a:p>
+        </p:txBody>
+      </p:sp>
+      <p:pic>
+        <p:nvPicPr>
+          <p:cNvPr id="25" name="Image 10" descr="C:\Users\rpinedar\kiro chats\desktop-organizer\manita\tests\capturas\fotos\fisioterapia.jpg">    </p:cNvPr>
+          <p:cNvPicPr>
+            <a:picLocks noChangeAspect="1"/>
+          </p:cNvPicPr>
+          <p:nvPr/>
+        </p:nvPicPr>
+        <p:blipFill>
+          <a:blip r:embed="rId11"/>
+          <a:srcRect l="0" r="0" t="0" b="0"/>
+          <a:stretch/>
+        </p:blipFill>
+        <p:spPr>
+          <a:xfrm>
+            <a:off x="6181344" y="4892040"/>
+            <a:ext cx="2651760" cy="1143000"/>
+          </a:xfrm>
+          <a:prstGeom prst="ellipse">
+            <a:avLst/>
+          </a:prstGeom>
+        </p:spPr>
+      </p:pic>
+      <p:sp>
+        <p:nvSpPr>
+          <p:cNvPr id="26" name="Text 13"/>
+          <p:cNvSpPr/>
+          <p:nvPr/>
+        </p:nvSpPr>
+        <p:spPr>
+          <a:xfrm>
+            <a:off x="6181344" y="6053328"/>
+            <a:ext cx="2651760" cy="320040"/>
+          </a:xfrm>
+          <a:prstGeom prst="rect">
+            <a:avLst/>
+          </a:prstGeom>
+          <a:noFill/>
+          <a:ln/>
+        </p:spPr>
+        <p:txBody>
+          <a:bodyPr wrap="square" rtlCol="0" anchor="ctr"/>
+          <a:lstStyle/>
+          <a:p>
+            <a:pPr algn="ctr" indent="0" marL="0">
+              <a:buNone/>
+            </a:pPr>
+            <a:r>
+              <a:rPr lang="en-US" sz="1200" b="1" dirty="0">
+                <a:solidFill>
+                  <a:srgbClr val="2D3E75"/>
+                </a:solidFill>
+              </a:rPr>
+              <a:t>Fisioterapia</a:t>
+            </a:r>
+            <a:endParaRPr lang="en-US" sz="1200" dirty="0"/>
+          </a:p>
+        </p:txBody>
+      </p:sp>
+      <p:pic>
+        <p:nvPicPr>
+          <p:cNvPr id="27" name="Image 11" descr="C:\Users\rpinedar\kiro chats\desktop-organizer\manita\tests\capturas\fotos\jardineria.jpg">    </p:cNvPr>
+          <p:cNvPicPr>
+            <a:picLocks noChangeAspect="1"/>
+          </p:cNvPicPr>
+          <p:nvPr/>
+        </p:nvPicPr>
+        <p:blipFill>
+          <a:blip r:embed="rId12"/>
+          <a:srcRect l="0" r="0" t="0" b="0"/>
+          <a:stretch/>
+        </p:blipFill>
+        <p:spPr>
+          <a:xfrm>
+            <a:off x="8997696" y="4892040"/>
+            <a:ext cx="2651760" cy="1143000"/>
+          </a:xfrm>
+          <a:prstGeom prst="ellipse">
+            <a:avLst/>
+          </a:prstGeom>
+        </p:spPr>
+      </p:pic>
+      <p:sp>
+        <p:nvSpPr>
+          <p:cNvPr id="28" name="Text 14"/>
+          <p:cNvSpPr/>
+          <p:nvPr/>
+        </p:nvSpPr>
+        <p:spPr>
+          <a:xfrm>
+            <a:off x="8997696" y="6053328"/>
+            <a:ext cx="2651760" cy="320040"/>
+          </a:xfrm>
+          <a:prstGeom prst="rect">
+            <a:avLst/>
+          </a:prstGeom>
+          <a:noFill/>
+          <a:ln/>
+        </p:spPr>
+        <p:txBody>
+          <a:bodyPr wrap="square" rtlCol="0" anchor="ctr"/>
+          <a:lstStyle/>
+          <a:p>
+            <a:pPr algn="ctr" indent="0" marL="0">
+              <a:buNone/>
+            </a:pPr>
+            <a:r>
+              <a:rPr lang="en-US" sz="1200" b="1" dirty="0">
+                <a:solidFill>
+                  <a:srgbClr val="2D3E75"/>
+                </a:solidFill>
+              </a:rPr>
+              <a:t>Jardinería</a:t>
+            </a:r>
+            <a:endParaRPr lang="en-US" sz="1200" dirty="0"/>
           </a:p>
         </p:txBody>
       </p:sp>
@@ -4166,6 +5731,267 @@
 <file path=ppt/slides/slide4.xml><?xml version="1.0" encoding="utf-8"?>
 <p:sld xmlns:a="http://schemas.openxmlformats.org/drawingml/2006/main" xmlns:r="http://schemas.openxmlformats.org/officeDocument/2006/relationships" xmlns:p="http://schemas.openxmlformats.org/presentationml/2006/main">
   <p:cSld name="Slide 4">
+    <p:spTree>
+      <p:nvGrpSpPr>
+        <p:cNvPr id="1" name=""/>
+        <p:cNvGrpSpPr/>
+        <p:nvPr/>
+      </p:nvGrpSpPr>
+      <p:grpSpPr>
+        <a:xfrm>
+          <a:off x="0" y="0"/>
+          <a:ext cx="0" cy="0"/>
+          <a:chOff x="0" y="0"/>
+          <a:chExt cx="0" cy="0"/>
+        </a:xfrm>
+      </p:grpSpPr>
+      <p:pic>
+        <p:nvPicPr>
+          <p:cNvPr id="2" name="Image 0" descr="C:\Users\rpinedar\kiro chats\desktop-organizer\manita\tests\capturas\fotos\rollers.jpg">    </p:cNvPr>
+          <p:cNvPicPr>
+            <a:picLocks noChangeAspect="1"/>
+          </p:cNvPicPr>
+          <p:nvPr/>
+        </p:nvPicPr>
+        <p:blipFill>
+          <a:blip r:embed="rId1"/>
+          <a:srcRect l="0" r="0" t="0" b="0"/>
+          <a:stretch/>
+        </p:blipFill>
+        <p:spPr>
+          <a:xfrm>
+            <a:off x="0" y="0"/>
+            <a:ext cx="12191695" cy="6858000"/>
+          </a:xfrm>
+          <a:prstGeom prst="rect">
+            <a:avLst/>
+          </a:prstGeom>
+        </p:spPr>
+      </p:pic>
+      <p:sp>
+        <p:nvSpPr>
+          <p:cNvPr id="3" name="Shape 0"/>
+          <p:cNvSpPr/>
+          <p:nvPr/>
+        </p:nvSpPr>
+        <p:spPr>
+          <a:xfrm>
+            <a:off x="0" y="0"/>
+            <a:ext cx="12191695" cy="6858000"/>
+          </a:xfrm>
+          <a:prstGeom prst="rect">
+            <a:avLst/>
+          </a:prstGeom>
+          <a:solidFill>
+            <a:srgbClr val="1F2544">
+              <a:alpha val="55000"/>
+            </a:srgbClr>
+          </a:solidFill>
+          <a:ln/>
+        </p:spPr>
+      </p:sp>
+      <p:sp>
+        <p:nvSpPr>
+          <p:cNvPr id="4" name="Text 1"/>
+          <p:cNvSpPr/>
+          <p:nvPr/>
+        </p:nvSpPr>
+        <p:spPr>
+          <a:xfrm>
+            <a:off x="640080" y="868680"/>
+            <a:ext cx="7315200" cy="365760"/>
+          </a:xfrm>
+          <a:prstGeom prst="rect">
+            <a:avLst/>
+          </a:prstGeom>
+          <a:noFill/>
+          <a:ln/>
+        </p:spPr>
+        <p:txBody>
+          <a:bodyPr wrap="square" rtlCol="0" anchor="ctr"/>
+          <a:lstStyle/>
+          <a:p>
+            <a:pPr indent="0" marL="0">
+              <a:buNone/>
+            </a:pPr>
+            <a:r>
+              <a:rPr lang="en-US" sz="1400" b="1" spc="300" kern="0" dirty="0">
+                <a:solidFill>
+                  <a:srgbClr val="FFB4A2"/>
+                </a:solidFill>
+              </a:rPr>
+              <a:t>CATEGORÍA ESTRELLA</a:t>
+            </a:r>
+            <a:endParaRPr lang="en-US" sz="1400" dirty="0"/>
+          </a:p>
+        </p:txBody>
+      </p:sp>
+      <p:sp>
+        <p:nvSpPr>
+          <p:cNvPr id="5" name="Text 2"/>
+          <p:cNvSpPr/>
+          <p:nvPr/>
+        </p:nvSpPr>
+        <p:spPr>
+          <a:xfrm>
+            <a:off x="640080" y="1325880"/>
+            <a:ext cx="7315200" cy="1645920"/>
+          </a:xfrm>
+          <a:prstGeom prst="rect">
+            <a:avLst/>
+          </a:prstGeom>
+          <a:noFill/>
+          <a:ln/>
+        </p:spPr>
+        <p:txBody>
+          <a:bodyPr wrap="square" rtlCol="0" anchor="ctr"/>
+          <a:lstStyle/>
+          <a:p>
+            <a:pPr indent="0" marL="0">
+              <a:lnSpc>
+                <a:spcPct val="95000"/>
+              </a:lnSpc>
+              <a:buNone/>
+            </a:pPr>
+            <a:r>
+              <a:rPr lang="en-US" sz="4400" b="1" dirty="0">
+                <a:solidFill>
+                  <a:srgbClr val="FFFFFF"/>
+                </a:solidFill>
+              </a:rPr>
+              <a:t>Clases de patinaje</a:t>
+            </a:r>
+            <a:endParaRPr lang="en-US" sz="4400" dirty="0"/>
+          </a:p>
+          <a:p>
+            <a:pPr indent="0" marL="0">
+              <a:lnSpc>
+                <a:spcPct val="95000"/>
+              </a:lnSpc>
+              <a:buNone/>
+            </a:pPr>
+            <a:r>
+              <a:rPr lang="en-US" sz="4400" b="1" dirty="0">
+                <a:solidFill>
+                  <a:srgbClr val="FFFFFF"/>
+                </a:solidFill>
+              </a:rPr>
+              <a:t>y rollers</a:t>
+            </a:r>
+            <a:endParaRPr lang="en-US" sz="4400" dirty="0"/>
+          </a:p>
+        </p:txBody>
+      </p:sp>
+      <p:sp>
+        <p:nvSpPr>
+          <p:cNvPr id="6" name="Text 3"/>
+          <p:cNvSpPr/>
+          <p:nvPr/>
+        </p:nvSpPr>
+        <p:spPr>
+          <a:xfrm>
+            <a:off x="822960" y="3291840"/>
+            <a:ext cx="6400800" cy="1828800"/>
+          </a:xfrm>
+          <a:prstGeom prst="rect">
+            <a:avLst/>
+          </a:prstGeom>
+          <a:noFill/>
+          <a:ln/>
+        </p:spPr>
+        <p:txBody>
+          <a:bodyPr wrap="square" rtlCol="0" anchor="ctr"/>
+          <a:lstStyle/>
+          <a:p>
+            <a:pPr marL="342900" indent="-342900">
+              <a:lnSpc>
+                <a:spcPct val="140000"/>
+              </a:lnSpc>
+              <a:buSzPct val="100000"/>
+              <a:buChar char="•"/>
+            </a:pPr>
+            <a:r>
+              <a:rPr lang="en-US" sz="1900" dirty="0">
+                <a:solidFill>
+                  <a:srgbClr val="FFFFFF"/>
+                </a:solidFill>
+              </a:rPr>
+              <a:t>Para niños y adultos, desde cero.</a:t>
+            </a:r>
+            <a:endParaRPr lang="en-US" sz="1900" dirty="0"/>
+          </a:p>
+          <a:p>
+            <a:pPr marL="342900" indent="-342900">
+              <a:lnSpc>
+                <a:spcPct val="140000"/>
+              </a:lnSpc>
+              <a:buSzPct val="100000"/>
+              <a:buChar char="•"/>
+            </a:pPr>
+            <a:r>
+              <a:rPr lang="en-US" sz="1900" dirty="0">
+                <a:solidFill>
+                  <a:srgbClr val="FFFFFF"/>
+                </a:solidFill>
+              </a:rPr>
+              <a:t>A domicilio o en tu parque favorito de CDMX.</a:t>
+            </a:r>
+            <a:endParaRPr lang="en-US" sz="1900" dirty="0"/>
+          </a:p>
+          <a:p>
+            <a:pPr marL="342900" indent="-342900">
+              <a:lnSpc>
+                <a:spcPct val="140000"/>
+              </a:lnSpc>
+              <a:buSzPct val="100000"/>
+              <a:buChar char="•"/>
+            </a:pPr>
+            <a:r>
+              <a:rPr lang="en-US" sz="1900" dirty="0">
+                <a:solidFill>
+                  <a:srgbClr val="FFFFFF"/>
+                </a:solidFill>
+              </a:rPr>
+              <a:t>Instructores verificados, con reseñas reales.</a:t>
+            </a:r>
+            <a:endParaRPr lang="en-US" sz="1900" dirty="0"/>
+          </a:p>
+        </p:txBody>
+      </p:sp>
+      <p:pic>
+        <p:nvPicPr>
+          <p:cNvPr id="7" name="Image 1" descr="C:\Users\rpinedar\kiro chats\desktop-organizer\manita\tests\capturas\fotos\rollers2.jpg">    </p:cNvPr>
+          <p:cNvPicPr>
+            <a:picLocks noChangeAspect="1"/>
+          </p:cNvPicPr>
+          <p:nvPr/>
+        </p:nvPicPr>
+        <p:blipFill>
+          <a:blip r:embed="rId2"/>
+          <a:srcRect l="0" r="0" t="0" b="0"/>
+          <a:stretch/>
+        </p:blipFill>
+        <p:spPr>
+          <a:xfrm>
+            <a:off x="7955280" y="1463040"/>
+            <a:ext cx="3566160" cy="3840480"/>
+          </a:xfrm>
+          <a:prstGeom prst="ellipse">
+            <a:avLst/>
+          </a:prstGeom>
+        </p:spPr>
+      </p:pic>
+    </p:spTree>
+  </p:cSld>
+  <p:clrMapOvr>
+    <a:masterClrMapping/>
+  </p:clrMapOvr>
+</p:sld>
+</file>
+
+<file path=ppt/slides/slide5.xml><?xml version="1.0" encoding="utf-8"?>
+<p:sld xmlns:a="http://schemas.openxmlformats.org/drawingml/2006/main" xmlns:r="http://schemas.openxmlformats.org/officeDocument/2006/relationships" xmlns:p="http://schemas.openxmlformats.org/presentationml/2006/main">
+  <p:cSld name="Slide 5">
     <p:bg>
       <p:bgPr>
         <a:solidFill>
@@ -4649,267 +6475,6 @@
           </a:p>
         </p:txBody>
       </p:sp>
-    </p:spTree>
-  </p:cSld>
-  <p:clrMapOvr>
-    <a:masterClrMapping/>
-  </p:clrMapOvr>
-</p:sld>
-</file>
-
-<file path=ppt/slides/slide5.xml><?xml version="1.0" encoding="utf-8"?>
-<p:sld xmlns:a="http://schemas.openxmlformats.org/drawingml/2006/main" xmlns:r="http://schemas.openxmlformats.org/officeDocument/2006/relationships" xmlns:p="http://schemas.openxmlformats.org/presentationml/2006/main">
-  <p:cSld name="Slide 5">
-    <p:bg>
-      <p:bgPr>
-        <a:solidFill>
-          <a:srgbClr val="FFFFFF"/>
-        </a:solidFill>
-      </p:bgPr>
-    </p:bg>
-    <p:spTree>
-      <p:nvGrpSpPr>
-        <p:cNvPr id="1" name=""/>
-        <p:cNvGrpSpPr/>
-        <p:nvPr/>
-      </p:nvGrpSpPr>
-      <p:grpSpPr>
-        <a:xfrm>
-          <a:off x="0" y="0"/>
-          <a:ext cx="0" cy="0"/>
-          <a:chOff x="0" y="0"/>
-          <a:chExt cx="0" cy="0"/>
-        </a:xfrm>
-      </p:grpSpPr>
-      <p:sp>
-        <p:nvSpPr>
-          <p:cNvPr id="2" name="Shape 0"/>
-          <p:cNvSpPr/>
-          <p:nvPr/>
-        </p:nvSpPr>
-        <p:spPr>
-          <a:xfrm>
-            <a:off x="0" y="0"/>
-            <a:ext cx="6035040" cy="6858000"/>
-          </a:xfrm>
-          <a:prstGeom prst="rect">
-            <a:avLst/>
-          </a:prstGeom>
-          <a:solidFill>
-            <a:srgbClr val="FBF7F4"/>
-          </a:solidFill>
-          <a:ln/>
-        </p:spPr>
-      </p:sp>
-      <p:sp>
-        <p:nvSpPr>
-          <p:cNvPr id="3" name="Text 1"/>
-          <p:cNvSpPr/>
-          <p:nvPr/>
-        </p:nvSpPr>
-        <p:spPr>
-          <a:xfrm>
-            <a:off x="640080" y="822960"/>
-            <a:ext cx="4572000" cy="365760"/>
-          </a:xfrm>
-          <a:prstGeom prst="rect">
-            <a:avLst/>
-          </a:prstGeom>
-          <a:noFill/>
-          <a:ln/>
-        </p:spPr>
-        <p:txBody>
-          <a:bodyPr wrap="square" rtlCol="0" anchor="ctr"/>
-          <a:lstStyle/>
-          <a:p>
-            <a:pPr indent="0" marL="0">
-              <a:buNone/>
-            </a:pPr>
-            <a:r>
-              <a:rPr lang="en-US" sz="1300" b="1" spc="200" kern="0" dirty="0">
-                <a:solidFill>
-                  <a:srgbClr val="C43D26"/>
-                </a:solidFill>
-              </a:rPr>
-              <a:t>LA SOLUCIÓN</a:t>
-            </a:r>
-            <a:endParaRPr lang="en-US" sz="1300" dirty="0"/>
-          </a:p>
-        </p:txBody>
-      </p:sp>
-      <p:sp>
-        <p:nvSpPr>
-          <p:cNvPr id="4" name="Text 2"/>
-          <p:cNvSpPr/>
-          <p:nvPr/>
-        </p:nvSpPr>
-        <p:spPr>
-          <a:xfrm>
-            <a:off x="640080" y="1234440"/>
-            <a:ext cx="5029200" cy="1463040"/>
-          </a:xfrm>
-          <a:prstGeom prst="rect">
-            <a:avLst/>
-          </a:prstGeom>
-          <a:noFill/>
-          <a:ln/>
-        </p:spPr>
-        <p:txBody>
-          <a:bodyPr wrap="square" rtlCol="0" anchor="ctr"/>
-          <a:lstStyle/>
-          <a:p>
-            <a:pPr indent="0" marL="0">
-              <a:lnSpc>
-                <a:spcPct val="95000"/>
-              </a:lnSpc>
-              <a:buNone/>
-            </a:pPr>
-            <a:r>
-              <a:rPr lang="en-US" sz="3800" b="1" dirty="0">
-                <a:solidFill>
-                  <a:srgbClr val="2D3E75"/>
-                </a:solidFill>
-              </a:rPr>
-              <a:t>Encuentra, reserva</a:t>
-            </a:r>
-            <a:endParaRPr lang="en-US" sz="3800" dirty="0"/>
-          </a:p>
-          <a:p>
-            <a:pPr indent="0" marL="0">
-              <a:lnSpc>
-                <a:spcPct val="95000"/>
-              </a:lnSpc>
-              <a:buNone/>
-            </a:pPr>
-            <a:r>
-              <a:rPr lang="en-US" sz="3800" b="1" dirty="0">
-                <a:solidFill>
-                  <a:srgbClr val="2D3E75"/>
-                </a:solidFill>
-              </a:rPr>
-              <a:t>y relájate</a:t>
-            </a:r>
-            <a:endParaRPr lang="en-US" sz="3800" dirty="0"/>
-          </a:p>
-        </p:txBody>
-      </p:sp>
-      <p:sp>
-        <p:nvSpPr>
-          <p:cNvPr id="5" name="Text 3"/>
-          <p:cNvSpPr/>
-          <p:nvPr/>
-        </p:nvSpPr>
-        <p:spPr>
-          <a:xfrm>
-            <a:off x="640080" y="2926080"/>
-            <a:ext cx="5029200" cy="2743200"/>
-          </a:xfrm>
-          <a:prstGeom prst="rect">
-            <a:avLst/>
-          </a:prstGeom>
-          <a:noFill/>
-          <a:ln/>
-        </p:spPr>
-        <p:txBody>
-          <a:bodyPr wrap="square" rtlCol="0" anchor="ctr"/>
-          <a:lstStyle/>
-          <a:p>
-            <a:pPr marL="342900" indent="-342900">
-              <a:lnSpc>
-                <a:spcPct val="140000"/>
-              </a:lnSpc>
-              <a:buSzPct val="100000"/>
-              <a:buChar char="•"/>
-            </a:pPr>
-            <a:r>
-              <a:rPr lang="en-US" sz="1700" dirty="0">
-                <a:solidFill>
-                  <a:srgbClr val="22232B"/>
-                </a:solidFill>
-              </a:rPr>
-              <a:t>Profesionales verificados por categoría, zona y precio.</a:t>
-            </a:r>
-            <a:endParaRPr lang="en-US" sz="1700" dirty="0"/>
-          </a:p>
-          <a:p>
-            <a:pPr marL="342900" indent="-342900">
-              <a:lnSpc>
-                <a:spcPct val="140000"/>
-              </a:lnSpc>
-              <a:buSzPct val="100000"/>
-              <a:buChar char="•"/>
-            </a:pPr>
-            <a:r>
-              <a:rPr lang="en-US" sz="1700" dirty="0">
-                <a:solidFill>
-                  <a:srgbClr val="22232B"/>
-                </a:solidFill>
-              </a:rPr>
-              <a:t>Reserva en segundos, con precio claro.</a:t>
-            </a:r>
-            <a:endParaRPr lang="en-US" sz="1700" dirty="0"/>
-          </a:p>
-          <a:p>
-            <a:pPr marL="342900" indent="-342900">
-              <a:lnSpc>
-                <a:spcPct val="140000"/>
-              </a:lnSpc>
-              <a:buSzPct val="100000"/>
-              <a:buChar char="•"/>
-            </a:pPr>
-            <a:r>
-              <a:rPr lang="en-US" sz="1700" dirty="0">
-                <a:solidFill>
-                  <a:srgbClr val="22232B"/>
-                </a:solidFill>
-              </a:rPr>
-              <a:t>Reseñas reales y respaldo de principio a fin.</a:t>
-            </a:r>
-            <a:endParaRPr lang="en-US" sz="1700" dirty="0"/>
-          </a:p>
-          <a:p>
-            <a:pPr marL="342900" indent="-342900">
-              <a:lnSpc>
-                <a:spcPct val="140000"/>
-              </a:lnSpc>
-              <a:buSzPct val="100000"/>
-              <a:buChar char="•"/>
-            </a:pPr>
-            <a:r>
-              <a:rPr lang="en-US" sz="1700" dirty="0">
-                <a:solidFill>
-                  <a:srgbClr val="22232B"/>
-                </a:solidFill>
-              </a:rPr>
-              <a:t>Web y app instalable, sin tiendas de por medio.</a:t>
-            </a:r>
-            <a:endParaRPr lang="en-US" sz="1700" dirty="0"/>
-          </a:p>
-        </p:txBody>
-      </p:sp>
-      <p:pic>
-        <p:nvPicPr>
-          <p:cNvPr id="6" name="Image 0" descr="C:\Users\rpinedar\kiro chats\desktop-organizer\manita\tests\capturas\02-inicio-app-iphone.png">    </p:cNvPr>
-          <p:cNvPicPr>
-            <a:picLocks noChangeAspect="1"/>
-          </p:cNvPicPr>
-          <p:nvPr/>
-        </p:nvPicPr>
-        <p:blipFill>
-          <a:blip r:embed="rId1"/>
-          <a:srcRect l="0" r="0" t="0" b="0"/>
-          <a:stretch/>
-        </p:blipFill>
-        <p:spPr>
-          <a:xfrm>
-            <a:off x="7406640" y="731520"/>
-            <a:ext cx="3291840" cy="5486400"/>
-          </a:xfrm>
-          <a:prstGeom prst="rect">
-            <a:avLst/>
-          </a:prstGeom>
-        </p:spPr>
-      </p:pic>
     </p:spTree>
   </p:cSld>
   <p:clrMapOvr>
@@ -4951,104 +6516,10 @@
         <p:spPr>
           <a:xfrm>
             <a:off x="0" y="0"/>
-            <a:ext cx="12191695" cy="164592"/>
-          </a:xfrm>
-          <a:prstGeom prst="rect">
-            <a:avLst/>
-          </a:prstGeom>
-          <a:solidFill>
-            <a:srgbClr val="FF6B4A"/>
-          </a:solidFill>
-          <a:ln/>
-        </p:spPr>
-      </p:sp>
-      <p:sp>
-        <p:nvSpPr>
-          <p:cNvPr id="3" name="Text 1"/>
-          <p:cNvSpPr/>
-          <p:nvPr/>
-        </p:nvSpPr>
-        <p:spPr>
-          <a:xfrm>
-            <a:off x="640080" y="457200"/>
-            <a:ext cx="7315200" cy="365760"/>
-          </a:xfrm>
-          <a:prstGeom prst="rect">
-            <a:avLst/>
-          </a:prstGeom>
-          <a:noFill/>
-          <a:ln/>
-        </p:spPr>
-        <p:txBody>
-          <a:bodyPr wrap="square" rtlCol="0" anchor="ctr"/>
-          <a:lstStyle/>
-          <a:p>
-            <a:pPr indent="0" marL="0">
-              <a:buNone/>
-            </a:pPr>
-            <a:r>
-              <a:rPr lang="en-US" sz="1300" b="1" spc="200" kern="0" dirty="0">
-                <a:solidFill>
-                  <a:srgbClr val="C43D26"/>
-                </a:solidFill>
-              </a:rPr>
-              <a:t>CÓMO FUNCIONA</a:t>
-            </a:r>
-            <a:endParaRPr lang="en-US" sz="1300" dirty="0"/>
-          </a:p>
-        </p:txBody>
-      </p:sp>
-      <p:sp>
-        <p:nvSpPr>
-          <p:cNvPr id="4" name="Text 2"/>
-          <p:cNvSpPr/>
-          <p:nvPr/>
-        </p:nvSpPr>
-        <p:spPr>
-          <a:xfrm>
-            <a:off x="640080" y="868680"/>
-            <a:ext cx="10881360" cy="822960"/>
-          </a:xfrm>
-          <a:prstGeom prst="rect">
-            <a:avLst/>
-          </a:prstGeom>
-          <a:noFill/>
-          <a:ln/>
-        </p:spPr>
-        <p:txBody>
-          <a:bodyPr wrap="square" rtlCol="0" anchor="ctr"/>
-          <a:lstStyle/>
-          <a:p>
-            <a:pPr indent="0" marL="0">
-              <a:buNone/>
-            </a:pPr>
-            <a:r>
-              <a:rPr lang="en-US" sz="3000" b="1" dirty="0">
-                <a:solidFill>
-                  <a:srgbClr val="2D3E75"/>
-                </a:solidFill>
-              </a:rPr>
-              <a:t>Tan fácil como pedir comida</a:t>
-            </a:r>
-            <a:endParaRPr lang="en-US" sz="3000" dirty="0"/>
-          </a:p>
-        </p:txBody>
-      </p:sp>
-      <p:sp>
-        <p:nvSpPr>
-          <p:cNvPr id="5" name="Shape 3"/>
-          <p:cNvSpPr/>
-          <p:nvPr/>
-        </p:nvSpPr>
-        <p:spPr>
-          <a:xfrm>
-            <a:off x="640080" y="2377440"/>
-            <a:ext cx="2606040" cy="2743200"/>
-          </a:xfrm>
-          <a:prstGeom prst="roundRect">
-            <a:avLst>
-              <a:gd name="adj" fmla="val 5263"/>
-            </a:avLst>
+            <a:ext cx="6035040" cy="6858000"/>
+          </a:xfrm>
+          <a:prstGeom prst="rect">
+            <a:avLst/>
           </a:prstGeom>
           <a:solidFill>
             <a:srgbClr val="FBF7F4"/>
@@ -5058,502 +6529,213 @@
       </p:sp>
       <p:sp>
         <p:nvSpPr>
-          <p:cNvPr id="6" name="Text 4"/>
-          <p:cNvSpPr/>
-          <p:nvPr/>
-        </p:nvSpPr>
-        <p:spPr>
-          <a:xfrm>
-            <a:off x="640080" y="2651760"/>
-            <a:ext cx="2606040" cy="914400"/>
-          </a:xfrm>
-          <a:prstGeom prst="rect">
-            <a:avLst/>
-          </a:prstGeom>
-          <a:noFill/>
-          <a:ln/>
-        </p:spPr>
-        <p:txBody>
-          <a:bodyPr wrap="square" rtlCol="0" anchor="ctr"/>
-          <a:lstStyle/>
-          <a:p>
-            <a:pPr algn="ctr" indent="0" marL="0">
-              <a:buNone/>
-            </a:pPr>
-            <a:r>
-              <a:rPr lang="en-US" sz="4400" dirty="0">
-                <a:solidFill>
-                  <a:srgbClr val="000000"/>
-                </a:solidFill>
-              </a:rPr>
-              <a:t>🔍</a:t>
-            </a:r>
-            <a:endParaRPr lang="en-US" sz="4400" dirty="0"/>
-          </a:p>
-        </p:txBody>
-      </p:sp>
-      <p:sp>
-        <p:nvSpPr>
-          <p:cNvPr id="7" name="Text 5"/>
-          <p:cNvSpPr/>
-          <p:nvPr/>
-        </p:nvSpPr>
-        <p:spPr>
-          <a:xfrm>
-            <a:off x="777240" y="3703320"/>
-            <a:ext cx="2331720" cy="457200"/>
-          </a:xfrm>
-          <a:prstGeom prst="rect">
-            <a:avLst/>
-          </a:prstGeom>
-          <a:noFill/>
-          <a:ln/>
-        </p:spPr>
-        <p:txBody>
-          <a:bodyPr wrap="square" rtlCol="0" anchor="ctr"/>
-          <a:lstStyle/>
-          <a:p>
-            <a:pPr algn="ctr" indent="0" marL="0">
-              <a:buNone/>
-            </a:pPr>
-            <a:r>
-              <a:rPr lang="en-US" sz="1800" b="1" dirty="0">
+          <p:cNvPr id="3" name="Text 1"/>
+          <p:cNvSpPr/>
+          <p:nvPr/>
+        </p:nvSpPr>
+        <p:spPr>
+          <a:xfrm>
+            <a:off x="640080" y="822960"/>
+            <a:ext cx="4572000" cy="365760"/>
+          </a:xfrm>
+          <a:prstGeom prst="rect">
+            <a:avLst/>
+          </a:prstGeom>
+          <a:noFill/>
+          <a:ln/>
+        </p:spPr>
+        <p:txBody>
+          <a:bodyPr wrap="square" rtlCol="0" anchor="ctr"/>
+          <a:lstStyle/>
+          <a:p>
+            <a:pPr indent="0" marL="0">
+              <a:buNone/>
+            </a:pPr>
+            <a:r>
+              <a:rPr lang="en-US" sz="1300" b="1" spc="200" kern="0" dirty="0">
+                <a:solidFill>
+                  <a:srgbClr val="C43D26"/>
+                </a:solidFill>
+              </a:rPr>
+              <a:t>LA SOLUCIÓN</a:t>
+            </a:r>
+            <a:endParaRPr lang="en-US" sz="1300" dirty="0"/>
+          </a:p>
+        </p:txBody>
+      </p:sp>
+      <p:sp>
+        <p:nvSpPr>
+          <p:cNvPr id="4" name="Text 2"/>
+          <p:cNvSpPr/>
+          <p:nvPr/>
+        </p:nvSpPr>
+        <p:spPr>
+          <a:xfrm>
+            <a:off x="640080" y="1234440"/>
+            <a:ext cx="5029200" cy="1463040"/>
+          </a:xfrm>
+          <a:prstGeom prst="rect">
+            <a:avLst/>
+          </a:prstGeom>
+          <a:noFill/>
+          <a:ln/>
+        </p:spPr>
+        <p:txBody>
+          <a:bodyPr wrap="square" rtlCol="0" anchor="ctr"/>
+          <a:lstStyle/>
+          <a:p>
+            <a:pPr indent="0" marL="0">
+              <a:lnSpc>
+                <a:spcPct val="95000"/>
+              </a:lnSpc>
+              <a:buNone/>
+            </a:pPr>
+            <a:r>
+              <a:rPr lang="en-US" sz="3800" b="1" dirty="0">
                 <a:solidFill>
                   <a:srgbClr val="2D3E75"/>
                 </a:solidFill>
               </a:rPr>
-              <a:t>1. Busca</a:t>
-            </a:r>
-            <a:endParaRPr lang="en-US" sz="1800" dirty="0"/>
-          </a:p>
-        </p:txBody>
-      </p:sp>
-      <p:sp>
-        <p:nvSpPr>
-          <p:cNvPr id="8" name="Text 6"/>
-          <p:cNvSpPr/>
-          <p:nvPr/>
-        </p:nvSpPr>
-        <p:spPr>
-          <a:xfrm>
-            <a:off x="777240" y="4206240"/>
-            <a:ext cx="2331720" cy="731520"/>
-          </a:xfrm>
-          <a:prstGeom prst="rect">
-            <a:avLst/>
-          </a:prstGeom>
-          <a:noFill/>
-          <a:ln/>
-        </p:spPr>
-        <p:txBody>
-          <a:bodyPr wrap="square" rtlCol="0" anchor="ctr"/>
-          <a:lstStyle/>
-          <a:p>
-            <a:pPr algn="ctr" indent="0" marL="0">
-              <a:buNone/>
-            </a:pPr>
-            <a:r>
-              <a:rPr lang="en-US" sz="1300" dirty="0">
-                <a:solidFill>
-                  <a:srgbClr val="565D6B"/>
-                </a:solidFill>
-              </a:rPr>
-              <a:t>Elige y compara.</a:t>
-            </a:r>
-            <a:endParaRPr lang="en-US" sz="1300" dirty="0"/>
-          </a:p>
-        </p:txBody>
-      </p:sp>
-      <p:sp>
-        <p:nvSpPr>
-          <p:cNvPr id="9" name="Shape 7"/>
-          <p:cNvSpPr/>
-          <p:nvPr/>
-        </p:nvSpPr>
-        <p:spPr>
-          <a:xfrm>
-            <a:off x="3429000" y="2377440"/>
-            <a:ext cx="2606040" cy="2743200"/>
-          </a:xfrm>
-          <a:prstGeom prst="roundRect">
-            <a:avLst>
-              <a:gd name="adj" fmla="val 5263"/>
-            </a:avLst>
-          </a:prstGeom>
-          <a:solidFill>
-            <a:srgbClr val="FFF0EC"/>
-          </a:solidFill>
-          <a:ln/>
-        </p:spPr>
-      </p:sp>
-      <p:sp>
-        <p:nvSpPr>
-          <p:cNvPr id="10" name="Text 8"/>
-          <p:cNvSpPr/>
-          <p:nvPr/>
-        </p:nvSpPr>
-        <p:spPr>
-          <a:xfrm>
-            <a:off x="3429000" y="2651760"/>
-            <a:ext cx="2606040" cy="914400"/>
-          </a:xfrm>
-          <a:prstGeom prst="rect">
-            <a:avLst/>
-          </a:prstGeom>
-          <a:noFill/>
-          <a:ln/>
-        </p:spPr>
-        <p:txBody>
-          <a:bodyPr wrap="square" rtlCol="0" anchor="ctr"/>
-          <a:lstStyle/>
-          <a:p>
-            <a:pPr algn="ctr" indent="0" marL="0">
-              <a:buNone/>
-            </a:pPr>
-            <a:r>
-              <a:rPr lang="en-US" sz="4400" dirty="0">
-                <a:solidFill>
-                  <a:srgbClr val="000000"/>
-                </a:solidFill>
-              </a:rPr>
-              <a:t>📅</a:t>
-            </a:r>
-            <a:endParaRPr lang="en-US" sz="4400" dirty="0"/>
-          </a:p>
-        </p:txBody>
-      </p:sp>
-      <p:sp>
-        <p:nvSpPr>
-          <p:cNvPr id="11" name="Text 9"/>
-          <p:cNvSpPr/>
-          <p:nvPr/>
-        </p:nvSpPr>
-        <p:spPr>
-          <a:xfrm>
-            <a:off x="3566160" y="3703320"/>
-            <a:ext cx="2331720" cy="457200"/>
-          </a:xfrm>
-          <a:prstGeom prst="rect">
-            <a:avLst/>
-          </a:prstGeom>
-          <a:noFill/>
-          <a:ln/>
-        </p:spPr>
-        <p:txBody>
-          <a:bodyPr wrap="square" rtlCol="0" anchor="ctr"/>
-          <a:lstStyle/>
-          <a:p>
-            <a:pPr algn="ctr" indent="0" marL="0">
-              <a:buNone/>
-            </a:pPr>
-            <a:r>
-              <a:rPr lang="en-US" sz="1800" b="1" dirty="0">
+              <a:t>Encuentra, reserva</a:t>
+            </a:r>
+            <a:endParaRPr lang="en-US" sz="3800" dirty="0"/>
+          </a:p>
+          <a:p>
+            <a:pPr indent="0" marL="0">
+              <a:lnSpc>
+                <a:spcPct val="95000"/>
+              </a:lnSpc>
+              <a:buNone/>
+            </a:pPr>
+            <a:r>
+              <a:rPr lang="en-US" sz="3800" b="1" dirty="0">
                 <a:solidFill>
                   <a:srgbClr val="2D3E75"/>
                 </a:solidFill>
               </a:rPr>
-              <a:t>2. Reserva</a:t>
-            </a:r>
-            <a:endParaRPr lang="en-US" sz="1800" dirty="0"/>
-          </a:p>
-        </p:txBody>
-      </p:sp>
-      <p:sp>
-        <p:nvSpPr>
-          <p:cNvPr id="12" name="Text 10"/>
-          <p:cNvSpPr/>
-          <p:nvPr/>
-        </p:nvSpPr>
-        <p:spPr>
-          <a:xfrm>
-            <a:off x="3566160" y="4206240"/>
-            <a:ext cx="2331720" cy="731520"/>
-          </a:xfrm>
-          <a:prstGeom prst="rect">
-            <a:avLst/>
-          </a:prstGeom>
-          <a:noFill/>
-          <a:ln/>
-        </p:spPr>
-        <p:txBody>
-          <a:bodyPr wrap="square" rtlCol="0" anchor="ctr"/>
-          <a:lstStyle/>
-          <a:p>
-            <a:pPr algn="ctr" indent="0" marL="0">
-              <a:buNone/>
-            </a:pPr>
-            <a:r>
-              <a:rPr lang="en-US" sz="1300" dirty="0">
-                <a:solidFill>
-                  <a:srgbClr val="565D6B"/>
-                </a:solidFill>
-              </a:rPr>
-              <a:t>Fecha, hora y lugar.</a:t>
-            </a:r>
-            <a:endParaRPr lang="en-US" sz="1300" dirty="0"/>
-          </a:p>
-        </p:txBody>
-      </p:sp>
-      <p:sp>
-        <p:nvSpPr>
-          <p:cNvPr id="13" name="Shape 11"/>
-          <p:cNvSpPr/>
-          <p:nvPr/>
-        </p:nvSpPr>
-        <p:spPr>
-          <a:xfrm>
-            <a:off x="6217920" y="2377440"/>
-            <a:ext cx="2606040" cy="2743200"/>
-          </a:xfrm>
-          <a:prstGeom prst="roundRect">
-            <a:avLst>
-              <a:gd name="adj" fmla="val 5263"/>
-            </a:avLst>
-          </a:prstGeom>
-          <a:solidFill>
-            <a:srgbClr val="FBF7F4"/>
-          </a:solidFill>
-          <a:ln/>
-        </p:spPr>
-      </p:sp>
-      <p:sp>
-        <p:nvSpPr>
-          <p:cNvPr id="14" name="Text 12"/>
-          <p:cNvSpPr/>
-          <p:nvPr/>
-        </p:nvSpPr>
-        <p:spPr>
-          <a:xfrm>
-            <a:off x="6217920" y="2651760"/>
-            <a:ext cx="2606040" cy="914400"/>
-          </a:xfrm>
-          <a:prstGeom prst="rect">
-            <a:avLst/>
-          </a:prstGeom>
-          <a:noFill/>
-          <a:ln/>
-        </p:spPr>
-        <p:txBody>
-          <a:bodyPr wrap="square" rtlCol="0" anchor="ctr"/>
-          <a:lstStyle/>
-          <a:p>
-            <a:pPr algn="ctr" indent="0" marL="0">
-              <a:buNone/>
-            </a:pPr>
-            <a:r>
-              <a:rPr lang="en-US" sz="4400" dirty="0">
-                <a:solidFill>
-                  <a:srgbClr val="000000"/>
-                </a:solidFill>
-              </a:rPr>
-              <a:t>🧑‍🔧</a:t>
-            </a:r>
-            <a:endParaRPr lang="en-US" sz="4400" dirty="0"/>
-          </a:p>
-        </p:txBody>
-      </p:sp>
-      <p:sp>
-        <p:nvSpPr>
-          <p:cNvPr id="15" name="Text 13"/>
-          <p:cNvSpPr/>
-          <p:nvPr/>
-        </p:nvSpPr>
-        <p:spPr>
-          <a:xfrm>
-            <a:off x="6355080" y="3703320"/>
-            <a:ext cx="2331720" cy="457200"/>
-          </a:xfrm>
-          <a:prstGeom prst="rect">
-            <a:avLst/>
-          </a:prstGeom>
-          <a:noFill/>
-          <a:ln/>
-        </p:spPr>
-        <p:txBody>
-          <a:bodyPr wrap="square" rtlCol="0" anchor="ctr"/>
-          <a:lstStyle/>
-          <a:p>
-            <a:pPr algn="ctr" indent="0" marL="0">
-              <a:buNone/>
-            </a:pPr>
-            <a:r>
-              <a:rPr lang="en-US" sz="1800" b="1" dirty="0">
-                <a:solidFill>
-                  <a:srgbClr val="2D3E75"/>
-                </a:solidFill>
-              </a:rPr>
-              <a:t>3. Recibe</a:t>
-            </a:r>
-            <a:endParaRPr lang="en-US" sz="1800" dirty="0"/>
-          </a:p>
-        </p:txBody>
-      </p:sp>
-      <p:sp>
-        <p:nvSpPr>
-          <p:cNvPr id="16" name="Text 14"/>
-          <p:cNvSpPr/>
-          <p:nvPr/>
-        </p:nvSpPr>
-        <p:spPr>
-          <a:xfrm>
-            <a:off x="6355080" y="4206240"/>
-            <a:ext cx="2331720" cy="731520"/>
-          </a:xfrm>
-          <a:prstGeom prst="rect">
-            <a:avLst/>
-          </a:prstGeom>
-          <a:noFill/>
-          <a:ln/>
-        </p:spPr>
-        <p:txBody>
-          <a:bodyPr wrap="square" rtlCol="0" anchor="ctr"/>
-          <a:lstStyle/>
-          <a:p>
-            <a:pPr algn="ctr" indent="0" marL="0">
-              <a:buNone/>
-            </a:pPr>
-            <a:r>
-              <a:rPr lang="en-US" sz="1300" dirty="0">
-                <a:solidFill>
-                  <a:srgbClr val="565D6B"/>
-                </a:solidFill>
-              </a:rPr>
-              <a:t>Llega y trabaja.</a:t>
-            </a:r>
-            <a:endParaRPr lang="en-US" sz="1300" dirty="0"/>
-          </a:p>
-        </p:txBody>
-      </p:sp>
-      <p:sp>
-        <p:nvSpPr>
-          <p:cNvPr id="17" name="Shape 15"/>
-          <p:cNvSpPr/>
-          <p:nvPr/>
-        </p:nvSpPr>
-        <p:spPr>
-          <a:xfrm>
-            <a:off x="9006840" y="2377440"/>
-            <a:ext cx="2606040" cy="2743200"/>
-          </a:xfrm>
-          <a:prstGeom prst="roundRect">
-            <a:avLst>
-              <a:gd name="adj" fmla="val 5263"/>
-            </a:avLst>
-          </a:prstGeom>
-          <a:solidFill>
-            <a:srgbClr val="FFF0EC"/>
-          </a:solidFill>
-          <a:ln/>
-        </p:spPr>
-      </p:sp>
-      <p:sp>
-        <p:nvSpPr>
-          <p:cNvPr id="18" name="Text 16"/>
-          <p:cNvSpPr/>
-          <p:nvPr/>
-        </p:nvSpPr>
-        <p:spPr>
-          <a:xfrm>
-            <a:off x="9006840" y="2651760"/>
-            <a:ext cx="2606040" cy="914400"/>
-          </a:xfrm>
-          <a:prstGeom prst="rect">
-            <a:avLst/>
-          </a:prstGeom>
-          <a:noFill/>
-          <a:ln/>
-        </p:spPr>
-        <p:txBody>
-          <a:bodyPr wrap="square" rtlCol="0" anchor="ctr"/>
-          <a:lstStyle/>
-          <a:p>
-            <a:pPr algn="ctr" indent="0" marL="0">
-              <a:buNone/>
-            </a:pPr>
-            <a:r>
-              <a:rPr lang="en-US" sz="4400" dirty="0">
-                <a:solidFill>
-                  <a:srgbClr val="000000"/>
-                </a:solidFill>
-              </a:rPr>
-              <a:t>⭐</a:t>
-            </a:r>
-            <a:endParaRPr lang="en-US" sz="4400" dirty="0"/>
-          </a:p>
-        </p:txBody>
-      </p:sp>
-      <p:sp>
-        <p:nvSpPr>
-          <p:cNvPr id="19" name="Text 17"/>
-          <p:cNvSpPr/>
-          <p:nvPr/>
-        </p:nvSpPr>
-        <p:spPr>
-          <a:xfrm>
-            <a:off x="9144000" y="3703320"/>
-            <a:ext cx="2331720" cy="457200"/>
-          </a:xfrm>
-          <a:prstGeom prst="rect">
-            <a:avLst/>
-          </a:prstGeom>
-          <a:noFill/>
-          <a:ln/>
-        </p:spPr>
-        <p:txBody>
-          <a:bodyPr wrap="square" rtlCol="0" anchor="ctr"/>
-          <a:lstStyle/>
-          <a:p>
-            <a:pPr algn="ctr" indent="0" marL="0">
-              <a:buNone/>
-            </a:pPr>
-            <a:r>
-              <a:rPr lang="en-US" sz="1800" b="1" dirty="0">
-                <a:solidFill>
-                  <a:srgbClr val="2D3E75"/>
-                </a:solidFill>
-              </a:rPr>
-              <a:t>4. Reseña</a:t>
-            </a:r>
-            <a:endParaRPr lang="en-US" sz="1800" dirty="0"/>
-          </a:p>
-        </p:txBody>
-      </p:sp>
-      <p:sp>
-        <p:nvSpPr>
-          <p:cNvPr id="20" name="Text 18"/>
-          <p:cNvSpPr/>
-          <p:nvPr/>
-        </p:nvSpPr>
-        <p:spPr>
-          <a:xfrm>
-            <a:off x="9144000" y="4206240"/>
-            <a:ext cx="2331720" cy="731520"/>
-          </a:xfrm>
-          <a:prstGeom prst="rect">
-            <a:avLst/>
-          </a:prstGeom>
-          <a:noFill/>
-          <a:ln/>
-        </p:spPr>
-        <p:txBody>
-          <a:bodyPr wrap="square" rtlCol="0" anchor="ctr"/>
-          <a:lstStyle/>
-          <a:p>
-            <a:pPr algn="ctr" indent="0" marL="0">
-              <a:buNone/>
-            </a:pPr>
-            <a:r>
-              <a:rPr lang="en-US" sz="1300" dirty="0">
-                <a:solidFill>
-                  <a:srgbClr val="565D6B"/>
-                </a:solidFill>
-              </a:rPr>
-              <a:t>Confirmas y calificas.</a:t>
-            </a:r>
-            <a:endParaRPr lang="en-US" sz="1300" dirty="0"/>
-          </a:p>
-        </p:txBody>
-      </p:sp>
+              <a:t>y relájate</a:t>
+            </a:r>
+            <a:endParaRPr lang="en-US" sz="3800" dirty="0"/>
+          </a:p>
+        </p:txBody>
+      </p:sp>
+      <p:sp>
+        <p:nvSpPr>
+          <p:cNvPr id="5" name="Text 3"/>
+          <p:cNvSpPr/>
+          <p:nvPr/>
+        </p:nvSpPr>
+        <p:spPr>
+          <a:xfrm>
+            <a:off x="640080" y="2926080"/>
+            <a:ext cx="5029200" cy="2743200"/>
+          </a:xfrm>
+          <a:prstGeom prst="rect">
+            <a:avLst/>
+          </a:prstGeom>
+          <a:noFill/>
+          <a:ln/>
+        </p:spPr>
+        <p:txBody>
+          <a:bodyPr wrap="square" rtlCol="0" anchor="ctr"/>
+          <a:lstStyle/>
+          <a:p>
+            <a:pPr marL="342900" indent="-342900">
+              <a:lnSpc>
+                <a:spcPct val="140000"/>
+              </a:lnSpc>
+              <a:buSzPct val="100000"/>
+              <a:buChar char="•"/>
+            </a:pPr>
+            <a:r>
+              <a:rPr lang="en-US" sz="1700" dirty="0">
+                <a:solidFill>
+                  <a:srgbClr val="22232B"/>
+                </a:solidFill>
+              </a:rPr>
+              <a:t>Profesionales verificados por categoría, zona y precio.</a:t>
+            </a:r>
+            <a:endParaRPr lang="en-US" sz="1700" dirty="0"/>
+          </a:p>
+          <a:p>
+            <a:pPr marL="342900" indent="-342900">
+              <a:lnSpc>
+                <a:spcPct val="140000"/>
+              </a:lnSpc>
+              <a:buSzPct val="100000"/>
+              <a:buChar char="•"/>
+            </a:pPr>
+            <a:r>
+              <a:rPr lang="en-US" sz="1700" dirty="0">
+                <a:solidFill>
+                  <a:srgbClr val="22232B"/>
+                </a:solidFill>
+              </a:rPr>
+              <a:t>Reserva en segundos, con precio claro.</a:t>
+            </a:r>
+            <a:endParaRPr lang="en-US" sz="1700" dirty="0"/>
+          </a:p>
+          <a:p>
+            <a:pPr marL="342900" indent="-342900">
+              <a:lnSpc>
+                <a:spcPct val="140000"/>
+              </a:lnSpc>
+              <a:buSzPct val="100000"/>
+              <a:buChar char="•"/>
+            </a:pPr>
+            <a:r>
+              <a:rPr lang="en-US" sz="1700" dirty="0">
+                <a:solidFill>
+                  <a:srgbClr val="22232B"/>
+                </a:solidFill>
+              </a:rPr>
+              <a:t>Reseñas reales y respaldo de principio a fin.</a:t>
+            </a:r>
+            <a:endParaRPr lang="en-US" sz="1700" dirty="0"/>
+          </a:p>
+          <a:p>
+            <a:pPr marL="342900" indent="-342900">
+              <a:lnSpc>
+                <a:spcPct val="140000"/>
+              </a:lnSpc>
+              <a:buSzPct val="100000"/>
+              <a:buChar char="•"/>
+            </a:pPr>
+            <a:r>
+              <a:rPr lang="en-US" sz="1700" dirty="0">
+                <a:solidFill>
+                  <a:srgbClr val="22232B"/>
+                </a:solidFill>
+              </a:rPr>
+              <a:t>Web y app instalable, sin tiendas de por medio.</a:t>
+            </a:r>
+            <a:endParaRPr lang="en-US" sz="1700" dirty="0"/>
+          </a:p>
+        </p:txBody>
+      </p:sp>
+      <p:pic>
+        <p:nvPicPr>
+          <p:cNvPr id="6" name="Image 0" descr="C:\Users\rpinedar\kiro chats\desktop-organizer\manita\tests\capturas\02-inicio-app-iphone.png">    </p:cNvPr>
+          <p:cNvPicPr>
+            <a:picLocks noChangeAspect="1"/>
+          </p:cNvPicPr>
+          <p:nvPr/>
+        </p:nvPicPr>
+        <p:blipFill>
+          <a:blip r:embed="rId1"/>
+          <a:srcRect l="0" r="0" t="0" b="0"/>
+          <a:stretch/>
+        </p:blipFill>
+        <p:spPr>
+          <a:xfrm>
+            <a:off x="7406640" y="731520"/>
+            <a:ext cx="3291840" cy="5486400"/>
+          </a:xfrm>
+          <a:prstGeom prst="rect">
+            <a:avLst/>
+          </a:prstGeom>
+        </p:spPr>
+      </p:pic>
     </p:spTree>
   </p:cSld>
   <p:clrMapOvr>
@@ -5565,364 +6747,6 @@
 <file path=ppt/slides/slide7.xml><?xml version="1.0" encoding="utf-8"?>
 <p:sld xmlns:a="http://schemas.openxmlformats.org/drawingml/2006/main" xmlns:r="http://schemas.openxmlformats.org/officeDocument/2006/relationships" xmlns:p="http://schemas.openxmlformats.org/presentationml/2006/main">
   <p:cSld name="Slide 7">
-    <p:spTree>
-      <p:nvGrpSpPr>
-        <p:cNvPr id="1" name=""/>
-        <p:cNvGrpSpPr/>
-        <p:nvPr/>
-      </p:nvGrpSpPr>
-      <p:grpSpPr>
-        <a:xfrm>
-          <a:off x="0" y="0"/>
-          <a:ext cx="0" cy="0"/>
-          <a:chOff x="0" y="0"/>
-          <a:chExt cx="0" cy="0"/>
-        </a:xfrm>
-      </p:grpSpPr>
-      <p:pic>
-        <p:nvPicPr>
-          <p:cNvPr id="2" name="Image 0" descr="C:\Users\rpinedar\kiro chats\desktop-organizer\manita\tests\capturas\fotos\cliente-feliz.jpg">    </p:cNvPr>
-          <p:cNvPicPr>
-            <a:picLocks noChangeAspect="1"/>
-          </p:cNvPicPr>
-          <p:nvPr/>
-        </p:nvPicPr>
-        <p:blipFill>
-          <a:blip r:embed="rId1"/>
-          <a:srcRect l="0" r="0" t="0" b="0"/>
-          <a:stretch/>
-        </p:blipFill>
-        <p:spPr>
-          <a:xfrm>
-            <a:off x="0" y="0"/>
-            <a:ext cx="12191695" cy="6858000"/>
-          </a:xfrm>
-          <a:prstGeom prst="rect">
-            <a:avLst/>
-          </a:prstGeom>
-        </p:spPr>
-      </p:pic>
-      <p:sp>
-        <p:nvSpPr>
-          <p:cNvPr id="3" name="Shape 0"/>
-          <p:cNvSpPr/>
-          <p:nvPr/>
-        </p:nvSpPr>
-        <p:spPr>
-          <a:xfrm>
-            <a:off x="0" y="0"/>
-            <a:ext cx="12191695" cy="6858000"/>
-          </a:xfrm>
-          <a:prstGeom prst="rect">
-            <a:avLst/>
-          </a:prstGeom>
-          <a:solidFill>
-            <a:srgbClr val="1F2544">
-              <a:alpha val="55000"/>
-            </a:srgbClr>
-          </a:solidFill>
-          <a:ln/>
-        </p:spPr>
-      </p:sp>
-      <p:sp>
-        <p:nvSpPr>
-          <p:cNvPr id="4" name="Text 1"/>
-          <p:cNvSpPr/>
-          <p:nvPr/>
-        </p:nvSpPr>
-        <p:spPr>
-          <a:xfrm>
-            <a:off x="640080" y="914400"/>
-            <a:ext cx="7315200" cy="365760"/>
-          </a:xfrm>
-          <a:prstGeom prst="rect">
-            <a:avLst/>
-          </a:prstGeom>
-          <a:noFill/>
-          <a:ln/>
-        </p:spPr>
-        <p:txBody>
-          <a:bodyPr wrap="square" rtlCol="0" anchor="ctr"/>
-          <a:lstStyle/>
-          <a:p>
-            <a:pPr indent="0" marL="0">
-              <a:buNone/>
-            </a:pPr>
-            <a:r>
-              <a:rPr lang="en-US" sz="1400" b="1" spc="300" kern="0" dirty="0">
-                <a:solidFill>
-                  <a:srgbClr val="FFB4A2"/>
-                </a:solidFill>
-              </a:rPr>
-              <a:t>GARANTÍA MANITA</a:t>
-            </a:r>
-            <a:endParaRPr lang="en-US" sz="1400" dirty="0"/>
-          </a:p>
-        </p:txBody>
-      </p:sp>
-      <p:sp>
-        <p:nvSpPr>
-          <p:cNvPr id="5" name="Text 2"/>
-          <p:cNvSpPr/>
-          <p:nvPr/>
-        </p:nvSpPr>
-        <p:spPr>
-          <a:xfrm>
-            <a:off x="640080" y="1371600"/>
-            <a:ext cx="10881360" cy="914400"/>
-          </a:xfrm>
-          <a:prstGeom prst="rect">
-            <a:avLst/>
-          </a:prstGeom>
-          <a:noFill/>
-          <a:ln/>
-        </p:spPr>
-        <p:txBody>
-          <a:bodyPr wrap="square" rtlCol="0" anchor="ctr"/>
-          <a:lstStyle/>
-          <a:p>
-            <a:pPr indent="0" marL="0">
-              <a:buNone/>
-            </a:pPr>
-            <a:r>
-              <a:rPr lang="en-US" sz="3800" b="1" dirty="0">
-                <a:solidFill>
-                  <a:srgbClr val="FFFFFF"/>
-                </a:solidFill>
-              </a:rPr>
-              <a:t>Tu tranquilidad, primero</a:t>
-            </a:r>
-            <a:endParaRPr lang="en-US" sz="3800" dirty="0"/>
-          </a:p>
-        </p:txBody>
-      </p:sp>
-      <p:sp>
-        <p:nvSpPr>
-          <p:cNvPr id="6" name="Text 3"/>
-          <p:cNvSpPr/>
-          <p:nvPr/>
-        </p:nvSpPr>
-        <p:spPr>
-          <a:xfrm>
-            <a:off x="822960" y="2651760"/>
-            <a:ext cx="731520" cy="822960"/>
-          </a:xfrm>
-          <a:prstGeom prst="rect">
-            <a:avLst/>
-          </a:prstGeom>
-          <a:noFill/>
-          <a:ln/>
-        </p:spPr>
-        <p:txBody>
-          <a:bodyPr wrap="square" rtlCol="0" anchor="ctr"/>
-          <a:lstStyle/>
-          <a:p>
-            <a:pPr indent="0" marL="0">
-              <a:buNone/>
-            </a:pPr>
-            <a:r>
-              <a:rPr lang="en-US" sz="3000" dirty="0">
-                <a:solidFill>
-                  <a:srgbClr val="000000"/>
-                </a:solidFill>
-              </a:rPr>
-              <a:t>🛡️</a:t>
-            </a:r>
-            <a:endParaRPr lang="en-US" sz="3000" dirty="0"/>
-          </a:p>
-        </p:txBody>
-      </p:sp>
-      <p:sp>
-        <p:nvSpPr>
-          <p:cNvPr id="7" name="Text 4"/>
-          <p:cNvSpPr/>
-          <p:nvPr/>
-        </p:nvSpPr>
-        <p:spPr>
-          <a:xfrm>
-            <a:off x="1737360" y="2651760"/>
-            <a:ext cx="9601200" cy="822960"/>
-          </a:xfrm>
-          <a:prstGeom prst="rect">
-            <a:avLst/>
-          </a:prstGeom>
-          <a:noFill/>
-          <a:ln/>
-        </p:spPr>
-        <p:txBody>
-          <a:bodyPr wrap="square" rtlCol="0" anchor="ctr"/>
-          <a:lstStyle/>
-          <a:p>
-            <a:pPr indent="0" marL="0">
-              <a:buNone/>
-            </a:pPr>
-            <a:r>
-              <a:rPr lang="en-US" sz="1700" dirty="0">
-                <a:solidFill>
-                  <a:srgbClr val="FFFFFF"/>
-                </a:solidFill>
-              </a:rPr>
-              <a:t>Pago protegido — El pro cobra cuando confirmas que todo salió bien.</a:t>
-            </a:r>
-            <a:endParaRPr lang="en-US" sz="1700" dirty="0"/>
-          </a:p>
-        </p:txBody>
-      </p:sp>
-      <p:sp>
-        <p:nvSpPr>
-          <p:cNvPr id="8" name="Text 5"/>
-          <p:cNvSpPr/>
-          <p:nvPr/>
-        </p:nvSpPr>
-        <p:spPr>
-          <a:xfrm>
-            <a:off x="822960" y="3749040"/>
-            <a:ext cx="731520" cy="822960"/>
-          </a:xfrm>
-          <a:prstGeom prst="rect">
-            <a:avLst/>
-          </a:prstGeom>
-          <a:noFill/>
-          <a:ln/>
-        </p:spPr>
-        <p:txBody>
-          <a:bodyPr wrap="square" rtlCol="0" anchor="ctr"/>
-          <a:lstStyle/>
-          <a:p>
-            <a:pPr indent="0" marL="0">
-              <a:buNone/>
-            </a:pPr>
-            <a:r>
-              <a:rPr lang="en-US" sz="3000" dirty="0">
-                <a:solidFill>
-                  <a:srgbClr val="000000"/>
-                </a:solidFill>
-              </a:rPr>
-              <a:t>✔️</a:t>
-            </a:r>
-            <a:endParaRPr lang="en-US" sz="3000" dirty="0"/>
-          </a:p>
-        </p:txBody>
-      </p:sp>
-      <p:sp>
-        <p:nvSpPr>
-          <p:cNvPr id="9" name="Text 6"/>
-          <p:cNvSpPr/>
-          <p:nvPr/>
-        </p:nvSpPr>
-        <p:spPr>
-          <a:xfrm>
-            <a:off x="1737360" y="3749040"/>
-            <a:ext cx="9601200" cy="822960"/>
-          </a:xfrm>
-          <a:prstGeom prst="rect">
-            <a:avLst/>
-          </a:prstGeom>
-          <a:noFill/>
-          <a:ln/>
-        </p:spPr>
-        <p:txBody>
-          <a:bodyPr wrap="square" rtlCol="0" anchor="ctr"/>
-          <a:lstStyle/>
-          <a:p>
-            <a:pPr indent="0" marL="0">
-              <a:buNone/>
-            </a:pPr>
-            <a:r>
-              <a:rPr lang="en-US" sz="1700" dirty="0">
-                <a:solidFill>
-                  <a:srgbClr val="FFFFFF"/>
-                </a:solidFill>
-              </a:rPr>
-              <a:t>Verificados — Identidad revisada por Manita.</a:t>
-            </a:r>
-            <a:endParaRPr lang="en-US" sz="1700" dirty="0"/>
-          </a:p>
-        </p:txBody>
-      </p:sp>
-      <p:sp>
-        <p:nvSpPr>
-          <p:cNvPr id="10" name="Text 7"/>
-          <p:cNvSpPr/>
-          <p:nvPr/>
-        </p:nvSpPr>
-        <p:spPr>
-          <a:xfrm>
-            <a:off x="822960" y="4846320"/>
-            <a:ext cx="731520" cy="822960"/>
-          </a:xfrm>
-          <a:prstGeom prst="rect">
-            <a:avLst/>
-          </a:prstGeom>
-          <a:noFill/>
-          <a:ln/>
-        </p:spPr>
-        <p:txBody>
-          <a:bodyPr wrap="square" rtlCol="0" anchor="ctr"/>
-          <a:lstStyle/>
-          <a:p>
-            <a:pPr indent="0" marL="0">
-              <a:buNone/>
-            </a:pPr>
-            <a:r>
-              <a:rPr lang="en-US" sz="3000" dirty="0">
-                <a:solidFill>
-                  <a:srgbClr val="000000"/>
-                </a:solidFill>
-              </a:rPr>
-              <a:t>⭐</a:t>
-            </a:r>
-            <a:endParaRPr lang="en-US" sz="3000" dirty="0"/>
-          </a:p>
-        </p:txBody>
-      </p:sp>
-      <p:sp>
-        <p:nvSpPr>
-          <p:cNvPr id="11" name="Text 8"/>
-          <p:cNvSpPr/>
-          <p:nvPr/>
-        </p:nvSpPr>
-        <p:spPr>
-          <a:xfrm>
-            <a:off x="1737360" y="4846320"/>
-            <a:ext cx="9601200" cy="822960"/>
-          </a:xfrm>
-          <a:prstGeom prst="rect">
-            <a:avLst/>
-          </a:prstGeom>
-          <a:noFill/>
-          <a:ln/>
-        </p:spPr>
-        <p:txBody>
-          <a:bodyPr wrap="square" rtlCol="0" anchor="ctr"/>
-          <a:lstStyle/>
-          <a:p>
-            <a:pPr indent="0" marL="0">
-              <a:buNone/>
-            </a:pPr>
-            <a:r>
-              <a:rPr lang="en-US" sz="1700" dirty="0">
-                <a:solidFill>
-                  <a:srgbClr val="FFFFFF"/>
-                </a:solidFill>
-              </a:rPr>
-              <a:t>Reseñas reales — Solo quien contrató puede calificar.</a:t>
-            </a:r>
-            <a:endParaRPr lang="en-US" sz="1700" dirty="0"/>
-          </a:p>
-        </p:txBody>
-      </p:sp>
-    </p:spTree>
-  </p:cSld>
-  <p:clrMapOvr>
-    <a:masterClrMapping/>
-  </p:clrMapOvr>
-</p:sld>
-</file>
-
-<file path=ppt/slides/slide8.xml><?xml version="1.0" encoding="utf-8"?>
-<p:sld xmlns:a="http://schemas.openxmlformats.org/drawingml/2006/main" xmlns:r="http://schemas.openxmlformats.org/officeDocument/2006/relationships" xmlns:p="http://schemas.openxmlformats.org/presentationml/2006/main">
-  <p:cSld name="Slide 8">
     <p:bg>
       <p:bgPr>
         <a:solidFill>
@@ -5994,7 +6818,7 @@
                   <a:srgbClr val="C43D26"/>
                 </a:solidFill>
               </a:rPr>
-              <a:t>PARA QUIEN OFRECE SERVICIOS</a:t>
+              <a:t>CÓMO FUNCIONA</a:t>
             </a:r>
             <a:endParaRPr lang="en-US" sz="1300" dirty="0"/>
           </a:p>
@@ -6030,15 +6854,560 @@
                   <a:srgbClr val="2D3E75"/>
                 </a:solidFill>
               </a:rPr>
-              <a:t>Convierte tu talento en ingresos</a:t>
+              <a:t>Tan fácil como pedir comida</a:t>
             </a:r>
             <a:endParaRPr lang="en-US" sz="3000" dirty="0"/>
           </a:p>
         </p:txBody>
       </p:sp>
+      <p:sp>
+        <p:nvSpPr>
+          <p:cNvPr id="5" name="Shape 3"/>
+          <p:cNvSpPr/>
+          <p:nvPr/>
+        </p:nvSpPr>
+        <p:spPr>
+          <a:xfrm>
+            <a:off x="640080" y="2377440"/>
+            <a:ext cx="2606040" cy="2743200"/>
+          </a:xfrm>
+          <a:prstGeom prst="roundRect">
+            <a:avLst>
+              <a:gd name="adj" fmla="val 5263"/>
+            </a:avLst>
+          </a:prstGeom>
+          <a:solidFill>
+            <a:srgbClr val="FBF7F4"/>
+          </a:solidFill>
+          <a:ln/>
+        </p:spPr>
+      </p:sp>
+      <p:sp>
+        <p:nvSpPr>
+          <p:cNvPr id="6" name="Text 4"/>
+          <p:cNvSpPr/>
+          <p:nvPr/>
+        </p:nvSpPr>
+        <p:spPr>
+          <a:xfrm>
+            <a:off x="640080" y="2651760"/>
+            <a:ext cx="2606040" cy="914400"/>
+          </a:xfrm>
+          <a:prstGeom prst="rect">
+            <a:avLst/>
+          </a:prstGeom>
+          <a:noFill/>
+          <a:ln/>
+        </p:spPr>
+        <p:txBody>
+          <a:bodyPr wrap="square" rtlCol="0" anchor="ctr"/>
+          <a:lstStyle/>
+          <a:p>
+            <a:pPr algn="ctr" indent="0" marL="0">
+              <a:buNone/>
+            </a:pPr>
+            <a:r>
+              <a:rPr lang="en-US" sz="4400" dirty="0">
+                <a:solidFill>
+                  <a:srgbClr val="000000"/>
+                </a:solidFill>
+              </a:rPr>
+              <a:t>🔍</a:t>
+            </a:r>
+            <a:endParaRPr lang="en-US" sz="4400" dirty="0"/>
+          </a:p>
+        </p:txBody>
+      </p:sp>
+      <p:sp>
+        <p:nvSpPr>
+          <p:cNvPr id="7" name="Text 5"/>
+          <p:cNvSpPr/>
+          <p:nvPr/>
+        </p:nvSpPr>
+        <p:spPr>
+          <a:xfrm>
+            <a:off x="777240" y="3703320"/>
+            <a:ext cx="2331720" cy="457200"/>
+          </a:xfrm>
+          <a:prstGeom prst="rect">
+            <a:avLst/>
+          </a:prstGeom>
+          <a:noFill/>
+          <a:ln/>
+        </p:spPr>
+        <p:txBody>
+          <a:bodyPr wrap="square" rtlCol="0" anchor="ctr"/>
+          <a:lstStyle/>
+          <a:p>
+            <a:pPr algn="ctr" indent="0" marL="0">
+              <a:buNone/>
+            </a:pPr>
+            <a:r>
+              <a:rPr lang="en-US" sz="1800" b="1" dirty="0">
+                <a:solidFill>
+                  <a:srgbClr val="2D3E75"/>
+                </a:solidFill>
+              </a:rPr>
+              <a:t>1. Busca</a:t>
+            </a:r>
+            <a:endParaRPr lang="en-US" sz="1800" dirty="0"/>
+          </a:p>
+        </p:txBody>
+      </p:sp>
+      <p:sp>
+        <p:nvSpPr>
+          <p:cNvPr id="8" name="Text 6"/>
+          <p:cNvSpPr/>
+          <p:nvPr/>
+        </p:nvSpPr>
+        <p:spPr>
+          <a:xfrm>
+            <a:off x="777240" y="4206240"/>
+            <a:ext cx="2331720" cy="731520"/>
+          </a:xfrm>
+          <a:prstGeom prst="rect">
+            <a:avLst/>
+          </a:prstGeom>
+          <a:noFill/>
+          <a:ln/>
+        </p:spPr>
+        <p:txBody>
+          <a:bodyPr wrap="square" rtlCol="0" anchor="ctr"/>
+          <a:lstStyle/>
+          <a:p>
+            <a:pPr algn="ctr" indent="0" marL="0">
+              <a:buNone/>
+            </a:pPr>
+            <a:r>
+              <a:rPr lang="en-US" sz="1300" dirty="0">
+                <a:solidFill>
+                  <a:srgbClr val="565D6B"/>
+                </a:solidFill>
+              </a:rPr>
+              <a:t>Elige y compara.</a:t>
+            </a:r>
+            <a:endParaRPr lang="en-US" sz="1300" dirty="0"/>
+          </a:p>
+        </p:txBody>
+      </p:sp>
+      <p:sp>
+        <p:nvSpPr>
+          <p:cNvPr id="9" name="Shape 7"/>
+          <p:cNvSpPr/>
+          <p:nvPr/>
+        </p:nvSpPr>
+        <p:spPr>
+          <a:xfrm>
+            <a:off x="3429000" y="2377440"/>
+            <a:ext cx="2606040" cy="2743200"/>
+          </a:xfrm>
+          <a:prstGeom prst="roundRect">
+            <a:avLst>
+              <a:gd name="adj" fmla="val 5263"/>
+            </a:avLst>
+          </a:prstGeom>
+          <a:solidFill>
+            <a:srgbClr val="FFF0EC"/>
+          </a:solidFill>
+          <a:ln/>
+        </p:spPr>
+      </p:sp>
+      <p:sp>
+        <p:nvSpPr>
+          <p:cNvPr id="10" name="Text 8"/>
+          <p:cNvSpPr/>
+          <p:nvPr/>
+        </p:nvSpPr>
+        <p:spPr>
+          <a:xfrm>
+            <a:off x="3429000" y="2651760"/>
+            <a:ext cx="2606040" cy="914400"/>
+          </a:xfrm>
+          <a:prstGeom prst="rect">
+            <a:avLst/>
+          </a:prstGeom>
+          <a:noFill/>
+          <a:ln/>
+        </p:spPr>
+        <p:txBody>
+          <a:bodyPr wrap="square" rtlCol="0" anchor="ctr"/>
+          <a:lstStyle/>
+          <a:p>
+            <a:pPr algn="ctr" indent="0" marL="0">
+              <a:buNone/>
+            </a:pPr>
+            <a:r>
+              <a:rPr lang="en-US" sz="4400" dirty="0">
+                <a:solidFill>
+                  <a:srgbClr val="000000"/>
+                </a:solidFill>
+              </a:rPr>
+              <a:t>📅</a:t>
+            </a:r>
+            <a:endParaRPr lang="en-US" sz="4400" dirty="0"/>
+          </a:p>
+        </p:txBody>
+      </p:sp>
+      <p:sp>
+        <p:nvSpPr>
+          <p:cNvPr id="11" name="Text 9"/>
+          <p:cNvSpPr/>
+          <p:nvPr/>
+        </p:nvSpPr>
+        <p:spPr>
+          <a:xfrm>
+            <a:off x="3566160" y="3703320"/>
+            <a:ext cx="2331720" cy="457200"/>
+          </a:xfrm>
+          <a:prstGeom prst="rect">
+            <a:avLst/>
+          </a:prstGeom>
+          <a:noFill/>
+          <a:ln/>
+        </p:spPr>
+        <p:txBody>
+          <a:bodyPr wrap="square" rtlCol="0" anchor="ctr"/>
+          <a:lstStyle/>
+          <a:p>
+            <a:pPr algn="ctr" indent="0" marL="0">
+              <a:buNone/>
+            </a:pPr>
+            <a:r>
+              <a:rPr lang="en-US" sz="1800" b="1" dirty="0">
+                <a:solidFill>
+                  <a:srgbClr val="2D3E75"/>
+                </a:solidFill>
+              </a:rPr>
+              <a:t>2. Reserva</a:t>
+            </a:r>
+            <a:endParaRPr lang="en-US" sz="1800" dirty="0"/>
+          </a:p>
+        </p:txBody>
+      </p:sp>
+      <p:sp>
+        <p:nvSpPr>
+          <p:cNvPr id="12" name="Text 10"/>
+          <p:cNvSpPr/>
+          <p:nvPr/>
+        </p:nvSpPr>
+        <p:spPr>
+          <a:xfrm>
+            <a:off x="3566160" y="4206240"/>
+            <a:ext cx="2331720" cy="731520"/>
+          </a:xfrm>
+          <a:prstGeom prst="rect">
+            <a:avLst/>
+          </a:prstGeom>
+          <a:noFill/>
+          <a:ln/>
+        </p:spPr>
+        <p:txBody>
+          <a:bodyPr wrap="square" rtlCol="0" anchor="ctr"/>
+          <a:lstStyle/>
+          <a:p>
+            <a:pPr algn="ctr" indent="0" marL="0">
+              <a:buNone/>
+            </a:pPr>
+            <a:r>
+              <a:rPr lang="en-US" sz="1300" dirty="0">
+                <a:solidFill>
+                  <a:srgbClr val="565D6B"/>
+                </a:solidFill>
+              </a:rPr>
+              <a:t>Fecha, hora y lugar.</a:t>
+            </a:r>
+            <a:endParaRPr lang="en-US" sz="1300" dirty="0"/>
+          </a:p>
+        </p:txBody>
+      </p:sp>
+      <p:sp>
+        <p:nvSpPr>
+          <p:cNvPr id="13" name="Shape 11"/>
+          <p:cNvSpPr/>
+          <p:nvPr/>
+        </p:nvSpPr>
+        <p:spPr>
+          <a:xfrm>
+            <a:off x="6217920" y="2377440"/>
+            <a:ext cx="2606040" cy="2743200"/>
+          </a:xfrm>
+          <a:prstGeom prst="roundRect">
+            <a:avLst>
+              <a:gd name="adj" fmla="val 5263"/>
+            </a:avLst>
+          </a:prstGeom>
+          <a:solidFill>
+            <a:srgbClr val="FBF7F4"/>
+          </a:solidFill>
+          <a:ln/>
+        </p:spPr>
+      </p:sp>
+      <p:sp>
+        <p:nvSpPr>
+          <p:cNvPr id="14" name="Text 12"/>
+          <p:cNvSpPr/>
+          <p:nvPr/>
+        </p:nvSpPr>
+        <p:spPr>
+          <a:xfrm>
+            <a:off x="6217920" y="2651760"/>
+            <a:ext cx="2606040" cy="914400"/>
+          </a:xfrm>
+          <a:prstGeom prst="rect">
+            <a:avLst/>
+          </a:prstGeom>
+          <a:noFill/>
+          <a:ln/>
+        </p:spPr>
+        <p:txBody>
+          <a:bodyPr wrap="square" rtlCol="0" anchor="ctr"/>
+          <a:lstStyle/>
+          <a:p>
+            <a:pPr algn="ctr" indent="0" marL="0">
+              <a:buNone/>
+            </a:pPr>
+            <a:r>
+              <a:rPr lang="en-US" sz="4400" dirty="0">
+                <a:solidFill>
+                  <a:srgbClr val="000000"/>
+                </a:solidFill>
+              </a:rPr>
+              <a:t>🧑‍🔧</a:t>
+            </a:r>
+            <a:endParaRPr lang="en-US" sz="4400" dirty="0"/>
+          </a:p>
+        </p:txBody>
+      </p:sp>
+      <p:sp>
+        <p:nvSpPr>
+          <p:cNvPr id="15" name="Text 13"/>
+          <p:cNvSpPr/>
+          <p:nvPr/>
+        </p:nvSpPr>
+        <p:spPr>
+          <a:xfrm>
+            <a:off x="6355080" y="3703320"/>
+            <a:ext cx="2331720" cy="457200"/>
+          </a:xfrm>
+          <a:prstGeom prst="rect">
+            <a:avLst/>
+          </a:prstGeom>
+          <a:noFill/>
+          <a:ln/>
+        </p:spPr>
+        <p:txBody>
+          <a:bodyPr wrap="square" rtlCol="0" anchor="ctr"/>
+          <a:lstStyle/>
+          <a:p>
+            <a:pPr algn="ctr" indent="0" marL="0">
+              <a:buNone/>
+            </a:pPr>
+            <a:r>
+              <a:rPr lang="en-US" sz="1800" b="1" dirty="0">
+                <a:solidFill>
+                  <a:srgbClr val="2D3E75"/>
+                </a:solidFill>
+              </a:rPr>
+              <a:t>3. Recibe</a:t>
+            </a:r>
+            <a:endParaRPr lang="en-US" sz="1800" dirty="0"/>
+          </a:p>
+        </p:txBody>
+      </p:sp>
+      <p:sp>
+        <p:nvSpPr>
+          <p:cNvPr id="16" name="Text 14"/>
+          <p:cNvSpPr/>
+          <p:nvPr/>
+        </p:nvSpPr>
+        <p:spPr>
+          <a:xfrm>
+            <a:off x="6355080" y="4206240"/>
+            <a:ext cx="2331720" cy="731520"/>
+          </a:xfrm>
+          <a:prstGeom prst="rect">
+            <a:avLst/>
+          </a:prstGeom>
+          <a:noFill/>
+          <a:ln/>
+        </p:spPr>
+        <p:txBody>
+          <a:bodyPr wrap="square" rtlCol="0" anchor="ctr"/>
+          <a:lstStyle/>
+          <a:p>
+            <a:pPr algn="ctr" indent="0" marL="0">
+              <a:buNone/>
+            </a:pPr>
+            <a:r>
+              <a:rPr lang="en-US" sz="1300" dirty="0">
+                <a:solidFill>
+                  <a:srgbClr val="565D6B"/>
+                </a:solidFill>
+              </a:rPr>
+              <a:t>Llega y trabaja.</a:t>
+            </a:r>
+            <a:endParaRPr lang="en-US" sz="1300" dirty="0"/>
+          </a:p>
+        </p:txBody>
+      </p:sp>
+      <p:sp>
+        <p:nvSpPr>
+          <p:cNvPr id="17" name="Shape 15"/>
+          <p:cNvSpPr/>
+          <p:nvPr/>
+        </p:nvSpPr>
+        <p:spPr>
+          <a:xfrm>
+            <a:off x="9006840" y="2377440"/>
+            <a:ext cx="2606040" cy="2743200"/>
+          </a:xfrm>
+          <a:prstGeom prst="roundRect">
+            <a:avLst>
+              <a:gd name="adj" fmla="val 5263"/>
+            </a:avLst>
+          </a:prstGeom>
+          <a:solidFill>
+            <a:srgbClr val="FFF0EC"/>
+          </a:solidFill>
+          <a:ln/>
+        </p:spPr>
+      </p:sp>
+      <p:sp>
+        <p:nvSpPr>
+          <p:cNvPr id="18" name="Text 16"/>
+          <p:cNvSpPr/>
+          <p:nvPr/>
+        </p:nvSpPr>
+        <p:spPr>
+          <a:xfrm>
+            <a:off x="9006840" y="2651760"/>
+            <a:ext cx="2606040" cy="914400"/>
+          </a:xfrm>
+          <a:prstGeom prst="rect">
+            <a:avLst/>
+          </a:prstGeom>
+          <a:noFill/>
+          <a:ln/>
+        </p:spPr>
+        <p:txBody>
+          <a:bodyPr wrap="square" rtlCol="0" anchor="ctr"/>
+          <a:lstStyle/>
+          <a:p>
+            <a:pPr algn="ctr" indent="0" marL="0">
+              <a:buNone/>
+            </a:pPr>
+            <a:r>
+              <a:rPr lang="en-US" sz="4400" dirty="0">
+                <a:solidFill>
+                  <a:srgbClr val="000000"/>
+                </a:solidFill>
+              </a:rPr>
+              <a:t>⭐</a:t>
+            </a:r>
+            <a:endParaRPr lang="en-US" sz="4400" dirty="0"/>
+          </a:p>
+        </p:txBody>
+      </p:sp>
+      <p:sp>
+        <p:nvSpPr>
+          <p:cNvPr id="19" name="Text 17"/>
+          <p:cNvSpPr/>
+          <p:nvPr/>
+        </p:nvSpPr>
+        <p:spPr>
+          <a:xfrm>
+            <a:off x="9144000" y="3703320"/>
+            <a:ext cx="2331720" cy="457200"/>
+          </a:xfrm>
+          <a:prstGeom prst="rect">
+            <a:avLst/>
+          </a:prstGeom>
+          <a:noFill/>
+          <a:ln/>
+        </p:spPr>
+        <p:txBody>
+          <a:bodyPr wrap="square" rtlCol="0" anchor="ctr"/>
+          <a:lstStyle/>
+          <a:p>
+            <a:pPr algn="ctr" indent="0" marL="0">
+              <a:buNone/>
+            </a:pPr>
+            <a:r>
+              <a:rPr lang="en-US" sz="1800" b="1" dirty="0">
+                <a:solidFill>
+                  <a:srgbClr val="2D3E75"/>
+                </a:solidFill>
+              </a:rPr>
+              <a:t>4. Reseña</a:t>
+            </a:r>
+            <a:endParaRPr lang="en-US" sz="1800" dirty="0"/>
+          </a:p>
+        </p:txBody>
+      </p:sp>
+      <p:sp>
+        <p:nvSpPr>
+          <p:cNvPr id="20" name="Text 18"/>
+          <p:cNvSpPr/>
+          <p:nvPr/>
+        </p:nvSpPr>
+        <p:spPr>
+          <a:xfrm>
+            <a:off x="9144000" y="4206240"/>
+            <a:ext cx="2331720" cy="731520"/>
+          </a:xfrm>
+          <a:prstGeom prst="rect">
+            <a:avLst/>
+          </a:prstGeom>
+          <a:noFill/>
+          <a:ln/>
+        </p:spPr>
+        <p:txBody>
+          <a:bodyPr wrap="square" rtlCol="0" anchor="ctr"/>
+          <a:lstStyle/>
+          <a:p>
+            <a:pPr algn="ctr" indent="0" marL="0">
+              <a:buNone/>
+            </a:pPr>
+            <a:r>
+              <a:rPr lang="en-US" sz="1300" dirty="0">
+                <a:solidFill>
+                  <a:srgbClr val="565D6B"/>
+                </a:solidFill>
+              </a:rPr>
+              <a:t>Confirmas y calificas.</a:t>
+            </a:r>
+            <a:endParaRPr lang="en-US" sz="1300" dirty="0"/>
+          </a:p>
+        </p:txBody>
+      </p:sp>
+    </p:spTree>
+  </p:cSld>
+  <p:clrMapOvr>
+    <a:masterClrMapping/>
+  </p:clrMapOvr>
+</p:sld>
+</file>
+
+<file path=ppt/slides/slide8.xml><?xml version="1.0" encoding="utf-8"?>
+<p:sld xmlns:a="http://schemas.openxmlformats.org/drawingml/2006/main" xmlns:r="http://schemas.openxmlformats.org/officeDocument/2006/relationships" xmlns:p="http://schemas.openxmlformats.org/presentationml/2006/main">
+  <p:cSld name="Slide 8">
+    <p:spTree>
+      <p:nvGrpSpPr>
+        <p:cNvPr id="1" name=""/>
+        <p:cNvGrpSpPr/>
+        <p:nvPr/>
+      </p:nvGrpSpPr>
+      <p:grpSpPr>
+        <a:xfrm>
+          <a:off x="0" y="0"/>
+          <a:ext cx="0" cy="0"/>
+          <a:chOff x="0" y="0"/>
+          <a:chExt cx="0" cy="0"/>
+        </a:xfrm>
+      </p:grpSpPr>
       <p:pic>
         <p:nvPicPr>
-          <p:cNvPr id="5" name="Image 0" descr="C:\Users\rpinedar\kiro chats\desktop-organizer\manita\tests\capturas\fotos\piano.jpg">    </p:cNvPr>
+          <p:cNvPr id="2" name="Image 0" descr="C:\Users\rpinedar\kiro chats\desktop-organizer\manita\tests\capturas\fotos\cliente-feliz.jpg">    </p:cNvPr>
           <p:cNvPicPr>
             <a:picLocks noChangeAspect="1"/>
           </p:cNvPicPr>
@@ -6051,24 +7420,118 @@
         </p:blipFill>
         <p:spPr>
           <a:xfrm>
-            <a:off x="548640" y="1920240"/>
-            <a:ext cx="3566160" cy="2103120"/>
-          </a:xfrm>
-          <a:prstGeom prst="ellipse">
+            <a:off x="0" y="0"/>
+            <a:ext cx="12191695" cy="6858000"/>
+          </a:xfrm>
+          <a:prstGeom prst="rect">
             <a:avLst/>
           </a:prstGeom>
         </p:spPr>
       </p:pic>
       <p:sp>
         <p:nvSpPr>
+          <p:cNvPr id="3" name="Shape 0"/>
+          <p:cNvSpPr/>
+          <p:nvPr/>
+        </p:nvSpPr>
+        <p:spPr>
+          <a:xfrm>
+            <a:off x="0" y="0"/>
+            <a:ext cx="12191695" cy="6858000"/>
+          </a:xfrm>
+          <a:prstGeom prst="rect">
+            <a:avLst/>
+          </a:prstGeom>
+          <a:solidFill>
+            <a:srgbClr val="1F2544">
+              <a:alpha val="55000"/>
+            </a:srgbClr>
+          </a:solidFill>
+          <a:ln/>
+        </p:spPr>
+      </p:sp>
+      <p:sp>
+        <p:nvSpPr>
+          <p:cNvPr id="4" name="Text 1"/>
+          <p:cNvSpPr/>
+          <p:nvPr/>
+        </p:nvSpPr>
+        <p:spPr>
+          <a:xfrm>
+            <a:off x="640080" y="914400"/>
+            <a:ext cx="7315200" cy="365760"/>
+          </a:xfrm>
+          <a:prstGeom prst="rect">
+            <a:avLst/>
+          </a:prstGeom>
+          <a:noFill/>
+          <a:ln/>
+        </p:spPr>
+        <p:txBody>
+          <a:bodyPr wrap="square" rtlCol="0" anchor="ctr"/>
+          <a:lstStyle/>
+          <a:p>
+            <a:pPr indent="0" marL="0">
+              <a:buNone/>
+            </a:pPr>
+            <a:r>
+              <a:rPr lang="en-US" sz="1400" b="1" spc="300" kern="0" dirty="0">
+                <a:solidFill>
+                  <a:srgbClr val="FFB4A2"/>
+                </a:solidFill>
+              </a:rPr>
+              <a:t>GARANTÍA MANITA</a:t>
+            </a:r>
+            <a:endParaRPr lang="en-US" sz="1400" dirty="0"/>
+          </a:p>
+        </p:txBody>
+      </p:sp>
+      <p:sp>
+        <p:nvSpPr>
+          <p:cNvPr id="5" name="Text 2"/>
+          <p:cNvSpPr/>
+          <p:nvPr/>
+        </p:nvSpPr>
+        <p:spPr>
+          <a:xfrm>
+            <a:off x="640080" y="1371600"/>
+            <a:ext cx="10881360" cy="914400"/>
+          </a:xfrm>
+          <a:prstGeom prst="rect">
+            <a:avLst/>
+          </a:prstGeom>
+          <a:noFill/>
+          <a:ln/>
+        </p:spPr>
+        <p:txBody>
+          <a:bodyPr wrap="square" rtlCol="0" anchor="ctr"/>
+          <a:lstStyle/>
+          <a:p>
+            <a:pPr indent="0" marL="0">
+              <a:buNone/>
+            </a:pPr>
+            <a:r>
+              <a:rPr lang="en-US" sz="3800" b="1" dirty="0">
+                <a:solidFill>
+                  <a:srgbClr val="FFFFFF"/>
+                </a:solidFill>
+              </a:rPr>
+              <a:t>Tu tranquilidad, primero</a:t>
+            </a:r>
+            <a:endParaRPr lang="en-US" sz="3800" dirty="0"/>
+          </a:p>
+        </p:txBody>
+      </p:sp>
+      <p:sp>
+        <p:nvSpPr>
           <p:cNvPr id="6" name="Text 3"/>
           <p:cNvSpPr/>
           <p:nvPr/>
         </p:nvSpPr>
         <p:spPr>
           <a:xfrm>
-            <a:off x="548640" y="4114800"/>
-            <a:ext cx="3566160" cy="457200"/>
+            <a:off x="822960" y="2651760"/>
+            <a:ext cx="731520" cy="822960"/>
           </a:xfrm>
           <a:prstGeom prst="rect">
             <a:avLst/>
@@ -6084,12 +7547,48 @@
               <a:buNone/>
             </a:pPr>
             <a:r>
-              <a:rPr lang="en-US" sz="1700" b="1" dirty="0">
-                <a:solidFill>
-                  <a:srgbClr val="2D3E75"/>
-                </a:solidFill>
-              </a:rPr>
-              <a:t>Da clases de piano</a:t>
+              <a:rPr lang="en-US" sz="3000" dirty="0">
+                <a:solidFill>
+                  <a:srgbClr val="000000"/>
+                </a:solidFill>
+              </a:rPr>
+              <a:t>🛡️</a:t>
+            </a:r>
+            <a:endParaRPr lang="en-US" sz="3000" dirty="0"/>
+          </a:p>
+        </p:txBody>
+      </p:sp>
+      <p:sp>
+        <p:nvSpPr>
+          <p:cNvPr id="7" name="Text 4"/>
+          <p:cNvSpPr/>
+          <p:nvPr/>
+        </p:nvSpPr>
+        <p:spPr>
+          <a:xfrm>
+            <a:off x="1737360" y="2651760"/>
+            <a:ext cx="9601200" cy="822960"/>
+          </a:xfrm>
+          <a:prstGeom prst="rect">
+            <a:avLst/>
+          </a:prstGeom>
+          <a:noFill/>
+          <a:ln/>
+        </p:spPr>
+        <p:txBody>
+          <a:bodyPr wrap="square" rtlCol="0" anchor="ctr"/>
+          <a:lstStyle/>
+          <a:p>
+            <a:pPr indent="0" marL="0">
+              <a:buNone/>
+            </a:pPr>
+            <a:r>
+              <a:rPr lang="en-US" sz="1700" dirty="0">
+                <a:solidFill>
+                  <a:srgbClr val="FFFFFF"/>
+                </a:solidFill>
+              </a:rPr>
+              <a:t>Pago protegido — El pro cobra cuando confirmas que todo salió bien.</a:t>
             </a:r>
             <a:endParaRPr lang="en-US" sz="1700" dirty="0"/>
           </a:p>
@@ -6097,14 +7596,14 @@
       </p:sp>
       <p:sp>
         <p:nvSpPr>
-          <p:cNvPr id="7" name="Text 4"/>
-          <p:cNvSpPr/>
-          <p:nvPr/>
-        </p:nvSpPr>
-        <p:spPr>
-          <a:xfrm>
-            <a:off x="548640" y="4572000"/>
-            <a:ext cx="3566160" cy="731520"/>
+          <p:cNvPr id="8" name="Text 5"/>
+          <p:cNvSpPr/>
+          <p:nvPr/>
+        </p:nvSpPr>
+        <p:spPr>
+          <a:xfrm>
+            <a:off x="822960" y="3749040"/>
+            <a:ext cx="731520" cy="822960"/>
           </a:xfrm>
           <a:prstGeom prst="rect">
             <a:avLst/>
@@ -6120,50 +7619,27 @@
               <a:buNone/>
             </a:pPr>
             <a:r>
-              <a:rPr lang="en-US" sz="1300" dirty="0">
-                <a:solidFill>
-                  <a:srgbClr val="565D6B"/>
-                </a:solidFill>
-              </a:rPr>
-              <a:t>Comparte tu música y llena tu agenda.</a:t>
-            </a:r>
-            <a:endParaRPr lang="en-US" sz="1300" dirty="0"/>
-          </a:p>
-        </p:txBody>
-      </p:sp>
-      <p:pic>
-        <p:nvPicPr>
-          <p:cNvPr id="8" name="Image 1" descr="C:\Users\rpinedar\kiro chats\desktop-organizer\manita\tests\capturas\fotos\patinaje.jpg">    </p:cNvPr>
-          <p:cNvPicPr>
-            <a:picLocks noChangeAspect="1"/>
-          </p:cNvPicPr>
-          <p:nvPr/>
-        </p:nvPicPr>
-        <p:blipFill>
-          <a:blip r:embed="rId2"/>
-          <a:srcRect l="0" r="0" t="0" b="0"/>
-          <a:stretch/>
-        </p:blipFill>
-        <p:spPr>
-          <a:xfrm>
-            <a:off x="4297680" y="1920240"/>
-            <a:ext cx="3566160" cy="2103120"/>
-          </a:xfrm>
-          <a:prstGeom prst="ellipse">
-            <a:avLst/>
-          </a:prstGeom>
-        </p:spPr>
-      </p:pic>
-      <p:sp>
-        <p:nvSpPr>
-          <p:cNvPr id="9" name="Text 5"/>
-          <p:cNvSpPr/>
-          <p:nvPr/>
-        </p:nvSpPr>
-        <p:spPr>
-          <a:xfrm>
-            <a:off x="4297680" y="4114800"/>
-            <a:ext cx="3566160" cy="457200"/>
+              <a:rPr lang="en-US" sz="3000" dirty="0">
+                <a:solidFill>
+                  <a:srgbClr val="000000"/>
+                </a:solidFill>
+              </a:rPr>
+              <a:t>✔️</a:t>
+            </a:r>
+            <a:endParaRPr lang="en-US" sz="3000" dirty="0"/>
+          </a:p>
+        </p:txBody>
+      </p:sp>
+      <p:sp>
+        <p:nvSpPr>
+          <p:cNvPr id="9" name="Text 6"/>
+          <p:cNvSpPr/>
+          <p:nvPr/>
+        </p:nvSpPr>
+        <p:spPr>
+          <a:xfrm>
+            <a:off x="1737360" y="3749040"/>
+            <a:ext cx="9601200" cy="822960"/>
           </a:xfrm>
           <a:prstGeom prst="rect">
             <a:avLst/>
@@ -6179,12 +7655,12 @@
               <a:buNone/>
             </a:pPr>
             <a:r>
-              <a:rPr lang="en-US" sz="1700" b="1" dirty="0">
-                <a:solidFill>
-                  <a:srgbClr val="2D3E75"/>
-                </a:solidFill>
-              </a:rPr>
-              <a:t>Enseña patinaje</a:t>
+              <a:rPr lang="en-US" sz="1700" dirty="0">
+                <a:solidFill>
+                  <a:srgbClr val="FFFFFF"/>
+                </a:solidFill>
+              </a:rPr>
+              <a:t>Verificados — Identidad revisada por Manita.</a:t>
             </a:r>
             <a:endParaRPr lang="en-US" sz="1700" dirty="0"/>
           </a:p>
@@ -6192,14 +7668,14 @@
       </p:sp>
       <p:sp>
         <p:nvSpPr>
-          <p:cNvPr id="10" name="Text 6"/>
-          <p:cNvSpPr/>
-          <p:nvPr/>
-        </p:nvSpPr>
-        <p:spPr>
-          <a:xfrm>
-            <a:off x="4297680" y="4572000"/>
-            <a:ext cx="3566160" cy="731520"/>
+          <p:cNvPr id="10" name="Text 7"/>
+          <p:cNvSpPr/>
+          <p:nvPr/>
+        </p:nvSpPr>
+        <p:spPr>
+          <a:xfrm>
+            <a:off x="822960" y="4846320"/>
+            <a:ext cx="731520" cy="822960"/>
           </a:xfrm>
           <a:prstGeom prst="rect">
             <a:avLst/>
@@ -6215,50 +7691,27 @@
               <a:buNone/>
             </a:pPr>
             <a:r>
-              <a:rPr lang="en-US" sz="1300" dirty="0">
-                <a:solidFill>
-                  <a:srgbClr val="565D6B"/>
-                </a:solidFill>
-              </a:rPr>
-              <a:t>Convierte tu pasión en tu trabajo.</a:t>
-            </a:r>
-            <a:endParaRPr lang="en-US" sz="1300" dirty="0"/>
-          </a:p>
-        </p:txBody>
-      </p:sp>
-      <p:pic>
-        <p:nvPicPr>
-          <p:cNvPr id="11" name="Image 2" descr="C:\Users\rpinedar\kiro chats\desktop-organizer\manita\tests\capturas\fotos\belleza.jpg">    </p:cNvPr>
-          <p:cNvPicPr>
-            <a:picLocks noChangeAspect="1"/>
-          </p:cNvPicPr>
-          <p:nvPr/>
-        </p:nvPicPr>
-        <p:blipFill>
-          <a:blip r:embed="rId3"/>
-          <a:srcRect l="0" r="0" t="0" b="0"/>
-          <a:stretch/>
-        </p:blipFill>
-        <p:spPr>
-          <a:xfrm>
-            <a:off x="8046720" y="1920240"/>
-            <a:ext cx="3566160" cy="2103120"/>
-          </a:xfrm>
-          <a:prstGeom prst="ellipse">
-            <a:avLst/>
-          </a:prstGeom>
-        </p:spPr>
-      </p:pic>
-      <p:sp>
-        <p:nvSpPr>
-          <p:cNvPr id="12" name="Text 7"/>
-          <p:cNvSpPr/>
-          <p:nvPr/>
-        </p:nvSpPr>
-        <p:spPr>
-          <a:xfrm>
-            <a:off x="8046720" y="4114800"/>
-            <a:ext cx="3566160" cy="457200"/>
+              <a:rPr lang="en-US" sz="3000" dirty="0">
+                <a:solidFill>
+                  <a:srgbClr val="000000"/>
+                </a:solidFill>
+              </a:rPr>
+              <a:t>⭐</a:t>
+            </a:r>
+            <a:endParaRPr lang="en-US" sz="3000" dirty="0"/>
+          </a:p>
+        </p:txBody>
+      </p:sp>
+      <p:sp>
+        <p:nvSpPr>
+          <p:cNvPr id="11" name="Text 8"/>
+          <p:cNvSpPr/>
+          <p:nvPr/>
+        </p:nvSpPr>
+        <p:spPr>
+          <a:xfrm>
+            <a:off x="1737360" y="4846320"/>
+            <a:ext cx="9601200" cy="822960"/>
           </a:xfrm>
           <a:prstGeom prst="rect">
             <a:avLst/>
@@ -6274,86 +7727,14 @@
               <a:buNone/>
             </a:pPr>
             <a:r>
-              <a:rPr lang="en-US" sz="1700" b="1" dirty="0">
-                <a:solidFill>
-                  <a:srgbClr val="2D3E75"/>
-                </a:solidFill>
-              </a:rPr>
-              <a:t>Servicios de belleza</a:t>
+              <a:rPr lang="en-US" sz="1700" dirty="0">
+                <a:solidFill>
+                  <a:srgbClr val="FFFFFF"/>
+                </a:solidFill>
+              </a:rPr>
+              <a:t>Reseñas reales — Solo quien contrató puede calificar.</a:t>
             </a:r>
             <a:endParaRPr lang="en-US" sz="1700" dirty="0"/>
-          </a:p>
-        </p:txBody>
-      </p:sp>
-      <p:sp>
-        <p:nvSpPr>
-          <p:cNvPr id="13" name="Text 8"/>
-          <p:cNvSpPr/>
-          <p:nvPr/>
-        </p:nvSpPr>
-        <p:spPr>
-          <a:xfrm>
-            <a:off x="8046720" y="4572000"/>
-            <a:ext cx="3566160" cy="731520"/>
-          </a:xfrm>
-          <a:prstGeom prst="rect">
-            <a:avLst/>
-          </a:prstGeom>
-          <a:noFill/>
-          <a:ln/>
-        </p:spPr>
-        <p:txBody>
-          <a:bodyPr wrap="square" rtlCol="0" anchor="ctr"/>
-          <a:lstStyle/>
-          <a:p>
-            <a:pPr indent="0" marL="0">
-              <a:buNone/>
-            </a:pPr>
-            <a:r>
-              <a:rPr lang="en-US" sz="1300" dirty="0">
-                <a:solidFill>
-                  <a:srgbClr val="565D6B"/>
-                </a:solidFill>
-              </a:rPr>
-              <a:t>Lleva tu estudio a domicilio.</a:t>
-            </a:r>
-            <a:endParaRPr lang="en-US" sz="1300" dirty="0"/>
-          </a:p>
-        </p:txBody>
-      </p:sp>
-      <p:sp>
-        <p:nvSpPr>
-          <p:cNvPr id="14" name="Text 9"/>
-          <p:cNvSpPr/>
-          <p:nvPr/>
-        </p:nvSpPr>
-        <p:spPr>
-          <a:xfrm>
-            <a:off x="640080" y="5577840"/>
-            <a:ext cx="10881360" cy="457200"/>
-          </a:xfrm>
-          <a:prstGeom prst="rect">
-            <a:avLst/>
-          </a:prstGeom>
-          <a:noFill/>
-          <a:ln/>
-        </p:spPr>
-        <p:txBody>
-          <a:bodyPr wrap="square" rtlCol="0" anchor="ctr"/>
-          <a:lstStyle/>
-          <a:p>
-            <a:pPr indent="0" marL="0">
-              <a:buNone/>
-            </a:pPr>
-            <a:r>
-              <a:rPr lang="en-US" sz="1500" b="1" dirty="0">
-                <a:solidFill>
-                  <a:srgbClr val="C43D26"/>
-                </a:solidFill>
-              </a:rPr>
-              <a:t>Publicar es gratis. Manita solo cobra una comisión cuando tú ganas.</a:t>
-            </a:r>
-            <a:endParaRPr lang="en-US" sz="1500" dirty="0"/>
           </a:p>
         </p:txBody>
       </p:sp>
@@ -6371,7 +7752,7 @@
     <p:bg>
       <p:bgPr>
         <a:solidFill>
-          <a:srgbClr val="2D3E75"/>
+          <a:srgbClr val="FFFFFF"/>
         </a:solidFill>
       </p:bgPr>
     </p:bg>
@@ -6391,13 +7772,33 @@
       </p:grpSpPr>
       <p:sp>
         <p:nvSpPr>
-          <p:cNvPr id="2" name="Text 0"/>
-          <p:cNvSpPr/>
-          <p:nvPr/>
-        </p:nvSpPr>
-        <p:spPr>
-          <a:xfrm>
-            <a:off x="640080" y="502920"/>
+          <p:cNvPr id="2" name="Shape 0"/>
+          <p:cNvSpPr/>
+          <p:nvPr/>
+        </p:nvSpPr>
+        <p:spPr>
+          <a:xfrm>
+            <a:off x="0" y="0"/>
+            <a:ext cx="12191695" cy="164592"/>
+          </a:xfrm>
+          <a:prstGeom prst="rect">
+            <a:avLst/>
+          </a:prstGeom>
+          <a:solidFill>
+            <a:srgbClr val="FF6B4A"/>
+          </a:solidFill>
+          <a:ln/>
+        </p:spPr>
+      </p:sp>
+      <p:sp>
+        <p:nvSpPr>
+          <p:cNvPr id="3" name="Text 1"/>
+          <p:cNvSpPr/>
+          <p:nvPr/>
+        </p:nvSpPr>
+        <p:spPr>
+          <a:xfrm>
+            <a:off x="640080" y="457200"/>
             <a:ext cx="7315200" cy="365760"/>
           </a:xfrm>
           <a:prstGeom prst="rect">
@@ -6416,10 +7817,10 @@
             <a:r>
               <a:rPr lang="en-US" sz="1300" b="1" spc="200" kern="0" dirty="0">
                 <a:solidFill>
-                  <a:srgbClr val="FFB4A2"/>
-                </a:solidFill>
-              </a:rPr>
-              <a:t>EL PRODUCTO</a:t>
+                  <a:srgbClr val="C43D26"/>
+                </a:solidFill>
+              </a:rPr>
+              <a:t>PARA QUIEN OFRECE SERVICIOS</a:t>
             </a:r>
             <a:endParaRPr lang="en-US" sz="1300" dirty="0"/>
           </a:p>
@@ -6427,13 +7828,13 @@
       </p:sp>
       <p:sp>
         <p:nvSpPr>
-          <p:cNvPr id="3" name="Text 1"/>
-          <p:cNvSpPr/>
-          <p:nvPr/>
-        </p:nvSpPr>
-        <p:spPr>
-          <a:xfrm>
-            <a:off x="640080" y="914400"/>
+          <p:cNvPr id="4" name="Text 2"/>
+          <p:cNvSpPr/>
+          <p:nvPr/>
+        </p:nvSpPr>
+        <p:spPr>
+          <a:xfrm>
+            <a:off x="640080" y="868680"/>
             <a:ext cx="10881360" cy="822960"/>
           </a:xfrm>
           <a:prstGeom prst="rect">
@@ -6452,10 +7853,10 @@
             <a:r>
               <a:rPr lang="en-US" sz="3000" b="1" dirty="0">
                 <a:solidFill>
-                  <a:srgbClr val="FFFFFF"/>
-                </a:solidFill>
-              </a:rPr>
-              <a:t>Se ve y se siente como una app real</a:t>
+                  <a:srgbClr val="2D3E75"/>
+                </a:solidFill>
+              </a:rPr>
+              <a:t>Convierte tu talento en ingresos</a:t>
             </a:r>
             <a:endParaRPr lang="en-US" sz="3000" dirty="0"/>
           </a:p>
@@ -6463,7 +7864,7 @@
       </p:sp>
       <p:pic>
         <p:nvPicPr>
-          <p:cNvPr id="4" name="Image 0" descr="C:\Users\rpinedar\kiro chats\desktop-organizer\manita\tests\capturas\02-inicio-app-iphone.png">    </p:cNvPr>
+          <p:cNvPr id="5" name="Image 0" descr="C:\Users\rpinedar\kiro chats\desktop-organizer\manita\tests\capturas\fotos\piano.jpg">    </p:cNvPr>
           <p:cNvPicPr>
             <a:picLocks noChangeAspect="1"/>
           </p:cNvPicPr>
@@ -6476,17 +7877,89 @@
         </p:blipFill>
         <p:spPr>
           <a:xfrm>
-            <a:off x="960120" y="2011680"/>
-            <a:ext cx="2194560" cy="4297680"/>
-          </a:xfrm>
-          <a:prstGeom prst="rect">
+            <a:off x="548640" y="1920240"/>
+            <a:ext cx="3566160" cy="2103120"/>
+          </a:xfrm>
+          <a:prstGeom prst="ellipse">
             <a:avLst/>
           </a:prstGeom>
         </p:spPr>
       </p:pic>
+      <p:sp>
+        <p:nvSpPr>
+          <p:cNvPr id="6" name="Text 3"/>
+          <p:cNvSpPr/>
+          <p:nvPr/>
+        </p:nvSpPr>
+        <p:spPr>
+          <a:xfrm>
+            <a:off x="548640" y="4114800"/>
+            <a:ext cx="3566160" cy="457200"/>
+          </a:xfrm>
+          <a:prstGeom prst="rect">
+            <a:avLst/>
+          </a:prstGeom>
+          <a:noFill/>
+          <a:ln/>
+        </p:spPr>
+        <p:txBody>
+          <a:bodyPr wrap="square" rtlCol="0" anchor="ctr"/>
+          <a:lstStyle/>
+          <a:p>
+            <a:pPr indent="0" marL="0">
+              <a:buNone/>
+            </a:pPr>
+            <a:r>
+              <a:rPr lang="en-US" sz="1700" b="1" dirty="0">
+                <a:solidFill>
+                  <a:srgbClr val="2D3E75"/>
+                </a:solidFill>
+              </a:rPr>
+              <a:t>Da clases de piano</a:t>
+            </a:r>
+            <a:endParaRPr lang="en-US" sz="1700" dirty="0"/>
+          </a:p>
+        </p:txBody>
+      </p:sp>
+      <p:sp>
+        <p:nvSpPr>
+          <p:cNvPr id="7" name="Text 4"/>
+          <p:cNvSpPr/>
+          <p:nvPr/>
+        </p:nvSpPr>
+        <p:spPr>
+          <a:xfrm>
+            <a:off x="548640" y="4572000"/>
+            <a:ext cx="3566160" cy="731520"/>
+          </a:xfrm>
+          <a:prstGeom prst="rect">
+            <a:avLst/>
+          </a:prstGeom>
+          <a:noFill/>
+          <a:ln/>
+        </p:spPr>
+        <p:txBody>
+          <a:bodyPr wrap="square" rtlCol="0" anchor="ctr"/>
+          <a:lstStyle/>
+          <a:p>
+            <a:pPr indent="0" marL="0">
+              <a:buNone/>
+            </a:pPr>
+            <a:r>
+              <a:rPr lang="en-US" sz="1300" dirty="0">
+                <a:solidFill>
+                  <a:srgbClr val="565D6B"/>
+                </a:solidFill>
+              </a:rPr>
+              <a:t>Comparte tu música y llena tu agenda.</a:t>
+            </a:r>
+            <a:endParaRPr lang="en-US" sz="1300" dirty="0"/>
+          </a:p>
+        </p:txBody>
+      </p:sp>
       <p:pic>
         <p:nvPicPr>
-          <p:cNvPr id="5" name="Image 1" descr="C:\Users\rpinedar\kiro chats\desktop-organizer\manita\tests\capturas\04-servicios-iphone.png">    </p:cNvPr>
+          <p:cNvPr id="8" name="Image 1" descr="C:\Users\rpinedar\kiro chats\desktop-organizer\manita\tests\capturas\fotos\patinaje.jpg">    </p:cNvPr>
           <p:cNvPicPr>
             <a:picLocks noChangeAspect="1"/>
           </p:cNvPicPr>
@@ -6499,17 +7972,89 @@
         </p:blipFill>
         <p:spPr>
           <a:xfrm>
-            <a:off x="3794760" y="2011680"/>
-            <a:ext cx="2194560" cy="4297680"/>
-          </a:xfrm>
-          <a:prstGeom prst="rect">
+            <a:off x="4297680" y="1920240"/>
+            <a:ext cx="3566160" cy="2103120"/>
+          </a:xfrm>
+          <a:prstGeom prst="ellipse">
             <a:avLst/>
           </a:prstGeom>
         </p:spPr>
       </p:pic>
+      <p:sp>
+        <p:nvSpPr>
+          <p:cNvPr id="9" name="Text 5"/>
+          <p:cNvSpPr/>
+          <p:nvPr/>
+        </p:nvSpPr>
+        <p:spPr>
+          <a:xfrm>
+            <a:off x="4297680" y="4114800"/>
+            <a:ext cx="3566160" cy="457200"/>
+          </a:xfrm>
+          <a:prstGeom prst="rect">
+            <a:avLst/>
+          </a:prstGeom>
+          <a:noFill/>
+          <a:ln/>
+        </p:spPr>
+        <p:txBody>
+          <a:bodyPr wrap="square" rtlCol="0" anchor="ctr"/>
+          <a:lstStyle/>
+          <a:p>
+            <a:pPr indent="0" marL="0">
+              <a:buNone/>
+            </a:pPr>
+            <a:r>
+              <a:rPr lang="en-US" sz="1700" b="1" dirty="0">
+                <a:solidFill>
+                  <a:srgbClr val="2D3E75"/>
+                </a:solidFill>
+              </a:rPr>
+              <a:t>Enseña patinaje</a:t>
+            </a:r>
+            <a:endParaRPr lang="en-US" sz="1700" dirty="0"/>
+          </a:p>
+        </p:txBody>
+      </p:sp>
+      <p:sp>
+        <p:nvSpPr>
+          <p:cNvPr id="10" name="Text 6"/>
+          <p:cNvSpPr/>
+          <p:nvPr/>
+        </p:nvSpPr>
+        <p:spPr>
+          <a:xfrm>
+            <a:off x="4297680" y="4572000"/>
+            <a:ext cx="3566160" cy="731520"/>
+          </a:xfrm>
+          <a:prstGeom prst="rect">
+            <a:avLst/>
+          </a:prstGeom>
+          <a:noFill/>
+          <a:ln/>
+        </p:spPr>
+        <p:txBody>
+          <a:bodyPr wrap="square" rtlCol="0" anchor="ctr"/>
+          <a:lstStyle/>
+          <a:p>
+            <a:pPr indent="0" marL="0">
+              <a:buNone/>
+            </a:pPr>
+            <a:r>
+              <a:rPr lang="en-US" sz="1300" dirty="0">
+                <a:solidFill>
+                  <a:srgbClr val="565D6B"/>
+                </a:solidFill>
+              </a:rPr>
+              <a:t>Convierte tu pasión en tu trabajo.</a:t>
+            </a:r>
+            <a:endParaRPr lang="en-US" sz="1300" dirty="0"/>
+          </a:p>
+        </p:txBody>
+      </p:sp>
       <p:pic>
         <p:nvPicPr>
-          <p:cNvPr id="6" name="Image 2" descr="C:\Users\rpinedar\kiro chats\desktop-organizer\manita\tests\capturas\06-perfil-pro-iphone.png">    </p:cNvPr>
+          <p:cNvPr id="11" name="Image 2" descr="C:\Users\rpinedar\kiro chats\desktop-organizer\manita\tests\capturas\fotos\belleza.jpg">    </p:cNvPr>
           <p:cNvPicPr>
             <a:picLocks noChangeAspect="1"/>
           </p:cNvPicPr>
@@ -6522,37 +8067,122 @@
         </p:blipFill>
         <p:spPr>
           <a:xfrm>
-            <a:off x="6629400" y="2011680"/>
-            <a:ext cx="2194560" cy="4297680"/>
-          </a:xfrm>
-          <a:prstGeom prst="rect">
+            <a:off x="8046720" y="1920240"/>
+            <a:ext cx="3566160" cy="2103120"/>
+          </a:xfrm>
+          <a:prstGeom prst="ellipse">
             <a:avLst/>
           </a:prstGeom>
         </p:spPr>
       </p:pic>
-      <p:pic>
-        <p:nvPicPr>
-          <p:cNvPr id="7" name="Image 3" descr="C:\Users\rpinedar\kiro chats\desktop-organizer\manita\tests\capturas\11-onboarding-iphone.png">    </p:cNvPr>
-          <p:cNvPicPr>
-            <a:picLocks noChangeAspect="1"/>
-          </p:cNvPicPr>
-          <p:nvPr/>
-        </p:nvPicPr>
-        <p:blipFill>
-          <a:blip r:embed="rId4"/>
-          <a:srcRect l="0" r="0" t="0" b="0"/>
-          <a:stretch/>
-        </p:blipFill>
-        <p:spPr>
-          <a:xfrm>
-            <a:off x="9464040" y="2011680"/>
-            <a:ext cx="2194560" cy="4297680"/>
-          </a:xfrm>
-          <a:prstGeom prst="rect">
-            <a:avLst/>
-          </a:prstGeom>
-        </p:spPr>
-      </p:pic>
+      <p:sp>
+        <p:nvSpPr>
+          <p:cNvPr id="12" name="Text 7"/>
+          <p:cNvSpPr/>
+          <p:nvPr/>
+        </p:nvSpPr>
+        <p:spPr>
+          <a:xfrm>
+            <a:off x="8046720" y="4114800"/>
+            <a:ext cx="3566160" cy="457200"/>
+          </a:xfrm>
+          <a:prstGeom prst="rect">
+            <a:avLst/>
+          </a:prstGeom>
+          <a:noFill/>
+          <a:ln/>
+        </p:spPr>
+        <p:txBody>
+          <a:bodyPr wrap="square" rtlCol="0" anchor="ctr"/>
+          <a:lstStyle/>
+          <a:p>
+            <a:pPr indent="0" marL="0">
+              <a:buNone/>
+            </a:pPr>
+            <a:r>
+              <a:rPr lang="en-US" sz="1700" b="1" dirty="0">
+                <a:solidFill>
+                  <a:srgbClr val="2D3E75"/>
+                </a:solidFill>
+              </a:rPr>
+              <a:t>Servicios de belleza</a:t>
+            </a:r>
+            <a:endParaRPr lang="en-US" sz="1700" dirty="0"/>
+          </a:p>
+        </p:txBody>
+      </p:sp>
+      <p:sp>
+        <p:nvSpPr>
+          <p:cNvPr id="13" name="Text 8"/>
+          <p:cNvSpPr/>
+          <p:nvPr/>
+        </p:nvSpPr>
+        <p:spPr>
+          <a:xfrm>
+            <a:off x="8046720" y="4572000"/>
+            <a:ext cx="3566160" cy="731520"/>
+          </a:xfrm>
+          <a:prstGeom prst="rect">
+            <a:avLst/>
+          </a:prstGeom>
+          <a:noFill/>
+          <a:ln/>
+        </p:spPr>
+        <p:txBody>
+          <a:bodyPr wrap="square" rtlCol="0" anchor="ctr"/>
+          <a:lstStyle/>
+          <a:p>
+            <a:pPr indent="0" marL="0">
+              <a:buNone/>
+            </a:pPr>
+            <a:r>
+              <a:rPr lang="en-US" sz="1300" dirty="0">
+                <a:solidFill>
+                  <a:srgbClr val="565D6B"/>
+                </a:solidFill>
+              </a:rPr>
+              <a:t>Lleva tu estudio a domicilio.</a:t>
+            </a:r>
+            <a:endParaRPr lang="en-US" sz="1300" dirty="0"/>
+          </a:p>
+        </p:txBody>
+      </p:sp>
+      <p:sp>
+        <p:nvSpPr>
+          <p:cNvPr id="14" name="Text 9"/>
+          <p:cNvSpPr/>
+          <p:nvPr/>
+        </p:nvSpPr>
+        <p:spPr>
+          <a:xfrm>
+            <a:off x="640080" y="5577840"/>
+            <a:ext cx="10881360" cy="457200"/>
+          </a:xfrm>
+          <a:prstGeom prst="rect">
+            <a:avLst/>
+          </a:prstGeom>
+          <a:noFill/>
+          <a:ln/>
+        </p:spPr>
+        <p:txBody>
+          <a:bodyPr wrap="square" rtlCol="0" anchor="ctr"/>
+          <a:lstStyle/>
+          <a:p>
+            <a:pPr indent="0" marL="0">
+              <a:buNone/>
+            </a:pPr>
+            <a:r>
+              <a:rPr lang="en-US" sz="1500" b="1" dirty="0">
+                <a:solidFill>
+                  <a:srgbClr val="C43D26"/>
+                </a:solidFill>
+              </a:rPr>
+              <a:t>Publicar es gratis. Manita solo cobra una comisión cuando tú ganas.</a:t>
+            </a:r>
+            <a:endParaRPr lang="en-US" sz="1500" dirty="0"/>
+          </a:p>
+        </p:txBody>
+      </p:sp>
     </p:spTree>
   </p:cSld>
   <p:clrMapOvr>
